--- a/Block_1_Cheetsheet_551.pptx
+++ b/Block_1_Cheetsheet_551.pptx
@@ -104,6 +104,11 @@
       </a:defRPr>
     </a:lvl9pPr>
   </p:defaultTextStyle>
+  <p:extLst>
+    <p:ext uri="{EFAFB233-063F-42B5-8137-9DF3F51BA10A}">
+      <p15:sldGuideLst xmlns:p15="http://schemas.microsoft.com/office/powerpoint/2012/main"/>
+    </p:ext>
+  </p:extLst>
 </p:presentation>
 </file>
 
@@ -3359,7 +3364,7 @@
             <p:spPr>
               <a:xfrm>
                 <a:off x="0" y="0"/>
-                <a:ext cx="11285034" cy="3926844"/>
+                <a:ext cx="5892800" cy="6745949"/>
               </a:xfrm>
               <a:prstGeom prst="rect">
                 <a:avLst/>
@@ -3388,32 +3393,44 @@
                 <a14:m>
                   <m:oMath xmlns:m="http://schemas.openxmlformats.org/officeDocument/2006/math">
                     <m:r>
-                      <a:rPr lang="en-IN" sz="1000" i="1"/>
+                      <a:rPr lang="en-IN" sz="1000" i="1">
+                        <a:latin typeface="Cambria Math" panose="02040503050406030204" pitchFamily="18" charset="0"/>
+                      </a:rPr>
                       <m:t>𝑜</m:t>
                     </m:r>
                     <m:r>
-                      <a:rPr lang="en-IN" sz="1000" i="1"/>
+                      <a:rPr lang="en-IN" sz="1000" i="1">
+                        <a:latin typeface="Cambria Math" panose="02040503050406030204" pitchFamily="18" charset="0"/>
+                      </a:rPr>
                       <m:t>=</m:t>
                     </m:r>
                     <m:f>
                       <m:fPr>
                         <m:ctrlPr>
-                          <a:rPr lang="en-IN" sz="1000" i="1"/>
+                          <a:rPr lang="en-IN" sz="1000" i="1">
+                            <a:latin typeface="Cambria Math" panose="02040503050406030204" pitchFamily="18" charset="0"/>
+                          </a:rPr>
                         </m:ctrlPr>
                       </m:fPr>
                       <m:num>
                         <m:r>
-                          <a:rPr lang="en-IN" sz="1000" i="1"/>
+                          <a:rPr lang="en-IN" sz="1000" i="1">
+                            <a:latin typeface="Cambria Math" panose="02040503050406030204" pitchFamily="18" charset="0"/>
+                          </a:rPr>
                           <m:t>𝑝</m:t>
                         </m:r>
                       </m:num>
                       <m:den>
                         <m:r>
-                          <a:rPr lang="en-IN" sz="1000" i="1"/>
+                          <a:rPr lang="en-IN" sz="1000" i="1">
+                            <a:latin typeface="Cambria Math" panose="02040503050406030204" pitchFamily="18" charset="0"/>
+                          </a:rPr>
                           <m:t>1−</m:t>
                         </m:r>
                         <m:r>
-                          <a:rPr lang="en-IN" sz="1000" i="1"/>
+                          <a:rPr lang="en-IN" sz="1000" i="1">
+                            <a:latin typeface="Cambria Math" panose="02040503050406030204" pitchFamily="18" charset="0"/>
+                          </a:rPr>
                           <m:t>𝑝</m:t>
                         </m:r>
                       </m:den>
@@ -3439,24 +3456,32 @@
                 <a14:m>
                   <m:oMath xmlns:m="http://schemas.openxmlformats.org/officeDocument/2006/math">
                     <m:r>
-                      <a:rPr lang="en-IN" sz="1000" i="1"/>
+                      <a:rPr lang="en-IN" sz="1000" i="1">
+                        <a:latin typeface="Cambria Math" panose="02040503050406030204" pitchFamily="18" charset="0"/>
+                      </a:rPr>
                       <m:t>𝐻</m:t>
                     </m:r>
                     <m:d>
                       <m:dPr>
                         <m:ctrlPr>
-                          <a:rPr lang="en-IN" sz="1000" i="1"/>
+                          <a:rPr lang="en-IN" sz="1000" i="1">
+                            <a:latin typeface="Cambria Math" panose="02040503050406030204" pitchFamily="18" charset="0"/>
+                          </a:rPr>
                         </m:ctrlPr>
                       </m:dPr>
                       <m:e>
                         <m:r>
-                          <a:rPr lang="en-IN" sz="1000" i="1"/>
+                          <a:rPr lang="en-IN" sz="1000" i="1">
+                            <a:latin typeface="Cambria Math" panose="02040503050406030204" pitchFamily="18" charset="0"/>
+                          </a:rPr>
                           <m:t>𝑋</m:t>
                         </m:r>
                       </m:e>
                     </m:d>
                     <m:r>
-                      <a:rPr lang="en-IN" sz="1000" i="1"/>
+                      <a:rPr lang="en-IN" sz="1000" i="1">
+                        <a:latin typeface="Cambria Math" panose="02040503050406030204" pitchFamily="18" charset="0"/>
+                      </a:rPr>
                       <m:t>=−</m:t>
                     </m:r>
                     <m:nary>
@@ -3465,19 +3490,25 @@
                         <m:limLoc m:val="undOvr"/>
                         <m:supHide m:val="on"/>
                         <m:ctrlPr>
-                          <a:rPr lang="en-IN" sz="1000" i="1"/>
+                          <a:rPr lang="en-IN" sz="1000" i="1">
+                            <a:latin typeface="Cambria Math" panose="02040503050406030204" pitchFamily="18" charset="0"/>
+                          </a:rPr>
                         </m:ctrlPr>
                       </m:naryPr>
                       <m:sub>
                         <m:r>
-                          <a:rPr lang="en-IN" sz="1000" i="1"/>
+                          <a:rPr lang="en-IN" sz="1000" i="1">
+                            <a:latin typeface="Cambria Math" panose="02040503050406030204" pitchFamily="18" charset="0"/>
+                          </a:rPr>
                           <m:t>𝑥</m:t>
                         </m:r>
                       </m:sub>
                       <m:sup/>
                       <m:e>
                         <m:r>
-                          <a:rPr lang="en-IN" sz="1000" i="1"/>
+                          <a:rPr lang="en-IN" sz="1000" i="1">
+                            <a:latin typeface="Cambria Math" panose="02040503050406030204" pitchFamily="18" charset="0"/>
+                          </a:rPr>
                           <m:t>𝑃</m:t>
                         </m:r>
                       </m:e>
@@ -3485,20 +3516,28 @@
                     <m:d>
                       <m:dPr>
                         <m:ctrlPr>
-                          <a:rPr lang="en-IN" sz="1000" i="1"/>
+                          <a:rPr lang="en-IN" sz="1000" i="1">
+                            <a:latin typeface="Cambria Math" panose="02040503050406030204" pitchFamily="18" charset="0"/>
+                          </a:rPr>
                         </m:ctrlPr>
                       </m:dPr>
                       <m:e>
                         <m:r>
-                          <a:rPr lang="en-IN" sz="1000" i="1"/>
+                          <a:rPr lang="en-IN" sz="1000" i="1">
+                            <a:latin typeface="Cambria Math" panose="02040503050406030204" pitchFamily="18" charset="0"/>
+                          </a:rPr>
                           <m:t>𝑋</m:t>
                         </m:r>
                         <m:r>
-                          <a:rPr lang="en-IN" sz="1000" i="1"/>
+                          <a:rPr lang="en-IN" sz="1000" i="1">
+                            <a:latin typeface="Cambria Math" panose="02040503050406030204" pitchFamily="18" charset="0"/>
+                          </a:rPr>
                           <m:t>=</m:t>
                         </m:r>
                         <m:r>
-                          <a:rPr lang="en-IN" sz="1000" i="1"/>
+                          <a:rPr lang="en-IN" sz="1000" i="1">
+                            <a:latin typeface="Cambria Math" panose="02040503050406030204" pitchFamily="18" charset="0"/>
+                          </a:rPr>
                           <m:t>𝑥</m:t>
                         </m:r>
                       </m:e>
@@ -3506,7 +3545,9 @@
                     <m:func>
                       <m:funcPr>
                         <m:ctrlPr>
-                          <a:rPr lang="en-IN" sz="1000"/>
+                          <a:rPr lang="en-IN" sz="1000">
+                            <a:latin typeface="Cambria Math" panose="02040503050406030204" pitchFamily="18" charset="0"/>
+                          </a:rPr>
                         </m:ctrlPr>
                       </m:funcPr>
                       <m:fName>
@@ -3514,7 +3555,9 @@
                           <m:rPr>
                             <m:sty m:val="p"/>
                           </m:rPr>
-                          <a:rPr lang="en-IN" sz="1000"/>
+                          <a:rPr lang="en-IN" sz="1000">
+                            <a:latin typeface="Cambria Math" panose="02040503050406030204" pitchFamily="18" charset="0"/>
+                          </a:rPr>
                           <m:t>log</m:t>
                         </m:r>
                       </m:fName>
@@ -3524,31 +3567,43 @@
                             <m:begChr m:val="["/>
                             <m:endChr m:val="]"/>
                             <m:ctrlPr>
-                              <a:rPr lang="en-IN" sz="1000" i="1"/>
+                              <a:rPr lang="en-IN" sz="1000" i="1">
+                                <a:latin typeface="Cambria Math" panose="02040503050406030204" pitchFamily="18" charset="0"/>
+                              </a:rPr>
                             </m:ctrlPr>
                           </m:dPr>
                           <m:e>
                             <m:r>
-                              <a:rPr lang="en-IN" sz="1000" i="1"/>
+                              <a:rPr lang="en-IN" sz="1000" i="1">
+                                <a:latin typeface="Cambria Math" panose="02040503050406030204" pitchFamily="18" charset="0"/>
+                              </a:rPr>
                               <m:t>𝑃</m:t>
                             </m:r>
                             <m:d>
                               <m:dPr>
                                 <m:ctrlPr>
-                                  <a:rPr lang="en-IN" sz="1000" i="1"/>
+                                  <a:rPr lang="en-IN" sz="1000" i="1">
+                                    <a:latin typeface="Cambria Math" panose="02040503050406030204" pitchFamily="18" charset="0"/>
+                                  </a:rPr>
                                 </m:ctrlPr>
                               </m:dPr>
                               <m:e>
                                 <m:r>
-                                  <a:rPr lang="en-IN" sz="1000" i="1"/>
+                                  <a:rPr lang="en-IN" sz="1000" i="1">
+                                    <a:latin typeface="Cambria Math" panose="02040503050406030204" pitchFamily="18" charset="0"/>
+                                  </a:rPr>
                                   <m:t>𝑋</m:t>
                                 </m:r>
                                 <m:r>
-                                  <a:rPr lang="en-IN" sz="1000" i="1"/>
+                                  <a:rPr lang="en-IN" sz="1000" i="1">
+                                    <a:latin typeface="Cambria Math" panose="02040503050406030204" pitchFamily="18" charset="0"/>
+                                  </a:rPr>
                                   <m:t>=</m:t>
                                 </m:r>
                                 <m:r>
-                                  <a:rPr lang="en-IN" sz="1000" i="1"/>
+                                  <a:rPr lang="en-IN" sz="1000" i="1">
+                                    <a:latin typeface="Cambria Math" panose="02040503050406030204" pitchFamily="18" charset="0"/>
+                                  </a:rPr>
                                   <m:t>𝑥</m:t>
                                 </m:r>
                               </m:e>
@@ -3578,7 +3633,9 @@
                 <a14:m>
                   <m:oMath xmlns:m="http://schemas.openxmlformats.org/officeDocument/2006/math">
                     <m:r>
-                      <a:rPr lang="en-IN" sz="1000"/>
+                      <a:rPr lang="en-IN" sz="1000">
+                        <a:latin typeface="Cambria Math" panose="02040503050406030204" pitchFamily="18" charset="0"/>
+                      </a:rPr>
                       <m:t>𝔼</m:t>
                     </m:r>
                     <m:d>
@@ -3586,23 +3643,31 @@
                         <m:begChr m:val="["/>
                         <m:endChr m:val="]"/>
                         <m:ctrlPr>
-                          <a:rPr lang="en-IN" sz="1000" i="1"/>
+                          <a:rPr lang="en-IN" sz="1000" i="1">
+                            <a:latin typeface="Cambria Math" panose="02040503050406030204" pitchFamily="18" charset="0"/>
+                          </a:rPr>
                         </m:ctrlPr>
                       </m:dPr>
                       <m:e>
                         <m:r>
-                          <a:rPr lang="en-IN" sz="1000" i="1"/>
+                          <a:rPr lang="en-IN" sz="1000" i="1">
+                            <a:latin typeface="Cambria Math" panose="02040503050406030204" pitchFamily="18" charset="0"/>
+                          </a:rPr>
                           <m:t>𝑔</m:t>
                         </m:r>
                         <m:d>
                           <m:dPr>
                             <m:ctrlPr>
-                              <a:rPr lang="en-IN" sz="1000" i="1"/>
+                              <a:rPr lang="en-IN" sz="1000" i="1">
+                                <a:latin typeface="Cambria Math" panose="02040503050406030204" pitchFamily="18" charset="0"/>
+                              </a:rPr>
                             </m:ctrlPr>
                           </m:dPr>
                           <m:e>
                             <m:r>
-                              <a:rPr lang="en-IN" sz="1000" i="1"/>
+                              <a:rPr lang="en-IN" sz="1000" i="1">
+                                <a:latin typeface="Cambria Math" panose="02040503050406030204" pitchFamily="18" charset="0"/>
+                              </a:rPr>
                               <m:t>𝑋</m:t>
                             </m:r>
                           </m:e>
@@ -3610,7 +3675,9 @@
                       </m:e>
                     </m:d>
                     <m:r>
-                      <a:rPr lang="en-IN" sz="1000" i="1"/>
+                      <a:rPr lang="en-IN" sz="1000" i="1">
+                        <a:latin typeface="Cambria Math" panose="02040503050406030204" pitchFamily="18" charset="0"/>
+                      </a:rPr>
                       <m:t>=</m:t>
                     </m:r>
                     <m:nary>
@@ -3619,19 +3686,25 @@
                         <m:limLoc m:val="undOvr"/>
                         <m:supHide m:val="on"/>
                         <m:ctrlPr>
-                          <a:rPr lang="en-IN" sz="1000" i="1"/>
+                          <a:rPr lang="en-IN" sz="1000" i="1">
+                            <a:latin typeface="Cambria Math" panose="02040503050406030204" pitchFamily="18" charset="0"/>
+                          </a:rPr>
                         </m:ctrlPr>
                       </m:naryPr>
                       <m:sub>
                         <m:r>
-                          <a:rPr lang="en-IN" sz="1000" i="1"/>
+                          <a:rPr lang="en-IN" sz="1000" i="1">
+                            <a:latin typeface="Cambria Math" panose="02040503050406030204" pitchFamily="18" charset="0"/>
+                          </a:rPr>
                           <m:t>𝑥</m:t>
                         </m:r>
                       </m:sub>
                       <m:sup/>
                       <m:e>
                         <m:r>
-                          <a:rPr lang="en-IN" sz="1000" i="1"/>
+                          <a:rPr lang="en-IN" sz="1000" i="1">
+                            <a:latin typeface="Cambria Math" panose="02040503050406030204" pitchFamily="18" charset="0"/>
+                          </a:rPr>
                           <m:t>𝑔</m:t>
                         </m:r>
                       </m:e>
@@ -3639,41 +3712,57 @@
                     <m:d>
                       <m:dPr>
                         <m:ctrlPr>
-                          <a:rPr lang="en-IN" sz="1000" i="1"/>
+                          <a:rPr lang="en-IN" sz="1000" i="1">
+                            <a:latin typeface="Cambria Math" panose="02040503050406030204" pitchFamily="18" charset="0"/>
+                          </a:rPr>
                         </m:ctrlPr>
                       </m:dPr>
                       <m:e>
                         <m:r>
-                          <a:rPr lang="en-IN" sz="1000" i="1"/>
+                          <a:rPr lang="en-IN" sz="1000" i="1">
+                            <a:latin typeface="Cambria Math" panose="02040503050406030204" pitchFamily="18" charset="0"/>
+                          </a:rPr>
                           <m:t>𝑋</m:t>
                         </m:r>
                       </m:e>
                     </m:d>
                     <m:r>
-                      <a:rPr lang="en-IN" sz="1000" i="1"/>
+                      <a:rPr lang="en-IN" sz="1000" i="1">
+                        <a:latin typeface="Cambria Math" panose="02040503050406030204" pitchFamily="18" charset="0"/>
+                      </a:rPr>
                       <m:t>⋅</m:t>
                     </m:r>
                     <m:r>
-                      <a:rPr lang="en-IN" sz="1000" i="1"/>
+                      <a:rPr lang="en-IN" sz="1000" i="1">
+                        <a:latin typeface="Cambria Math" panose="02040503050406030204" pitchFamily="18" charset="0"/>
+                      </a:rPr>
                       <m:t>𝑃</m:t>
                     </m:r>
                     <m:d>
                       <m:dPr>
                         <m:ctrlPr>
-                          <a:rPr lang="en-IN" sz="1000" i="1"/>
+                          <a:rPr lang="en-IN" sz="1000" i="1">
+                            <a:latin typeface="Cambria Math" panose="02040503050406030204" pitchFamily="18" charset="0"/>
+                          </a:rPr>
                         </m:ctrlPr>
                       </m:dPr>
                       <m:e>
                         <m:r>
-                          <a:rPr lang="en-IN" sz="1000" i="1"/>
+                          <a:rPr lang="en-IN" sz="1000" i="1">
+                            <a:latin typeface="Cambria Math" panose="02040503050406030204" pitchFamily="18" charset="0"/>
+                          </a:rPr>
                           <m:t>𝑋</m:t>
                         </m:r>
                         <m:r>
-                          <a:rPr lang="en-IN" sz="1000" i="1"/>
+                          <a:rPr lang="en-IN" sz="1000" i="1">
+                            <a:latin typeface="Cambria Math" panose="02040503050406030204" pitchFamily="18" charset="0"/>
+                          </a:rPr>
                           <m:t>=</m:t>
                         </m:r>
                         <m:r>
-                          <a:rPr lang="en-IN" sz="1000" i="1"/>
+                          <a:rPr lang="en-IN" sz="1000" i="1">
+                            <a:latin typeface="Cambria Math" panose="02040503050406030204" pitchFamily="18" charset="0"/>
+                          </a:rPr>
                           <m:t>𝑥</m:t>
                         </m:r>
                       </m:e>
@@ -3711,57 +3800,79 @@
                 <a14:m>
                   <m:oMath xmlns:m="http://schemas.openxmlformats.org/officeDocument/2006/math">
                     <m:r>
-                      <a:rPr lang="en-IN" sz="1000" i="1"/>
+                      <a:rPr lang="en-IN" sz="1000" i="1">
+                        <a:latin typeface="Cambria Math" panose="02040503050406030204" pitchFamily="18" charset="0"/>
+                      </a:rPr>
                       <m:t>𝑃</m:t>
                     </m:r>
                     <m:d>
                       <m:dPr>
                         <m:ctrlPr>
-                          <a:rPr lang="en-IN" sz="1000" i="1"/>
+                          <a:rPr lang="en-IN" sz="1000" i="1">
+                            <a:latin typeface="Cambria Math" panose="02040503050406030204" pitchFamily="18" charset="0"/>
+                          </a:rPr>
                         </m:ctrlPr>
                       </m:dPr>
                       <m:e>
                         <m:r>
-                          <a:rPr lang="en-IN" sz="1000" i="1"/>
+                          <a:rPr lang="en-IN" sz="1000" i="1">
+                            <a:latin typeface="Cambria Math" panose="02040503050406030204" pitchFamily="18" charset="0"/>
+                          </a:rPr>
                           <m:t>𝑋</m:t>
                         </m:r>
                         <m:r>
-                          <a:rPr lang="en-IN" sz="1000" i="1"/>
+                          <a:rPr lang="en-IN" sz="1000" i="1">
+                            <a:latin typeface="Cambria Math" panose="02040503050406030204" pitchFamily="18" charset="0"/>
+                          </a:rPr>
                           <m:t>=</m:t>
                         </m:r>
                         <m:r>
-                          <a:rPr lang="en-IN" sz="1000" i="1"/>
+                          <a:rPr lang="en-IN" sz="1000" i="1">
+                            <a:latin typeface="Cambria Math" panose="02040503050406030204" pitchFamily="18" charset="0"/>
+                          </a:rPr>
                           <m:t>𝑥</m:t>
                         </m:r>
                         <m:r>
-                          <a:rPr lang="en-IN" sz="1000" i="1"/>
+                          <a:rPr lang="en-IN" sz="1000" i="1">
+                            <a:latin typeface="Cambria Math" panose="02040503050406030204" pitchFamily="18" charset="0"/>
+                          </a:rPr>
                           <m:t>∣</m:t>
                         </m:r>
                         <m:r>
-                          <a:rPr lang="en-IN" sz="1000" i="1"/>
+                          <a:rPr lang="en-IN" sz="1000" i="1">
+                            <a:latin typeface="Cambria Math" panose="02040503050406030204" pitchFamily="18" charset="0"/>
+                          </a:rPr>
                           <m:t>𝑝</m:t>
                         </m:r>
                       </m:e>
                     </m:d>
                     <m:r>
-                      <a:rPr lang="en-IN" sz="1000" i="1"/>
+                      <a:rPr lang="en-IN" sz="1000" i="1">
+                        <a:latin typeface="Cambria Math" panose="02040503050406030204" pitchFamily="18" charset="0"/>
+                      </a:rPr>
                       <m:t>=</m:t>
                     </m:r>
                     <m:sSup>
                       <m:sSupPr>
                         <m:ctrlPr>
-                          <a:rPr lang="en-IN" sz="1000" i="1"/>
+                          <a:rPr lang="en-IN" sz="1000" i="1">
+                            <a:latin typeface="Cambria Math" panose="02040503050406030204" pitchFamily="18" charset="0"/>
+                          </a:rPr>
                         </m:ctrlPr>
                       </m:sSupPr>
                       <m:e>
                         <m:r>
-                          <a:rPr lang="en-IN" sz="1000" i="1"/>
+                          <a:rPr lang="en-IN" sz="1000" i="1">
+                            <a:latin typeface="Cambria Math" panose="02040503050406030204" pitchFamily="18" charset="0"/>
+                          </a:rPr>
                           <m:t>𝑝</m:t>
                         </m:r>
                       </m:e>
                       <m:sup>
                         <m:r>
-                          <a:rPr lang="en-IN" sz="1000" i="1"/>
+                          <a:rPr lang="en-IN" sz="1000" i="1">
+                            <a:latin typeface="Cambria Math" panose="02040503050406030204" pitchFamily="18" charset="0"/>
+                          </a:rPr>
                           <m:t>𝑥</m:t>
                         </m:r>
                       </m:sup>
@@ -3769,23 +3880,31 @@
                     <m:sSup>
                       <m:sSupPr>
                         <m:ctrlPr>
-                          <a:rPr lang="en-IN" sz="1000" i="1"/>
+                          <a:rPr lang="en-IN" sz="1000" i="1">
+                            <a:latin typeface="Cambria Math" panose="02040503050406030204" pitchFamily="18" charset="0"/>
+                          </a:rPr>
                         </m:ctrlPr>
                       </m:sSupPr>
                       <m:e>
                         <m:d>
                           <m:dPr>
                             <m:ctrlPr>
-                              <a:rPr lang="en-IN" sz="1000" i="1"/>
+                              <a:rPr lang="en-IN" sz="1000" i="1">
+                                <a:latin typeface="Cambria Math" panose="02040503050406030204" pitchFamily="18" charset="0"/>
+                              </a:rPr>
                             </m:ctrlPr>
                           </m:dPr>
                           <m:e>
                             <m:r>
-                              <a:rPr lang="en-IN" sz="1000" i="1"/>
+                              <a:rPr lang="en-IN" sz="1000" i="1">
+                                <a:latin typeface="Cambria Math" panose="02040503050406030204" pitchFamily="18" charset="0"/>
+                              </a:rPr>
                               <m:t>1−</m:t>
                             </m:r>
                             <m:r>
-                              <a:rPr lang="en-IN" sz="1000" i="1"/>
+                              <a:rPr lang="en-IN" sz="1000" i="1">
+                                <a:latin typeface="Cambria Math" panose="02040503050406030204" pitchFamily="18" charset="0"/>
+                              </a:rPr>
                               <m:t>𝑝</m:t>
                             </m:r>
                           </m:e>
@@ -3793,11 +3912,15 @@
                       </m:e>
                       <m:sup>
                         <m:r>
-                          <a:rPr lang="en-IN" sz="1000" i="1"/>
+                          <a:rPr lang="en-IN" sz="1000" i="1">
+                            <a:latin typeface="Cambria Math" panose="02040503050406030204" pitchFamily="18" charset="0"/>
+                          </a:rPr>
                           <m:t>1−</m:t>
                         </m:r>
                         <m:r>
-                          <a:rPr lang="en-IN" sz="1000" i="1"/>
+                          <a:rPr lang="en-IN" sz="1000" i="1">
+                            <a:latin typeface="Cambria Math" panose="02040503050406030204" pitchFamily="18" charset="0"/>
+                          </a:rPr>
                           <m:t>𝑥</m:t>
                         </m:r>
                       </m:sup>
@@ -3811,28 +3934,38 @@
                 <a14:m>
                   <m:oMath xmlns:m="http://schemas.openxmlformats.org/officeDocument/2006/math">
                     <m:r>
-                      <a:rPr lang="en-IN" sz="1000"/>
+                      <a:rPr lang="en-IN" sz="1000">
+                        <a:latin typeface="Cambria Math" panose="02040503050406030204" pitchFamily="18" charset="0"/>
+                      </a:rPr>
                       <m:t>𝔼</m:t>
                     </m:r>
                     <m:d>
                       <m:dPr>
                         <m:ctrlPr>
-                          <a:rPr lang="en-IN" sz="1000" i="1"/>
+                          <a:rPr lang="en-IN" sz="1000" i="1">
+                            <a:latin typeface="Cambria Math" panose="02040503050406030204" pitchFamily="18" charset="0"/>
+                          </a:rPr>
                         </m:ctrlPr>
                       </m:dPr>
                       <m:e>
                         <m:r>
-                          <a:rPr lang="en-IN" sz="1000" i="1"/>
+                          <a:rPr lang="en-IN" sz="1000" i="1">
+                            <a:latin typeface="Cambria Math" panose="02040503050406030204" pitchFamily="18" charset="0"/>
+                          </a:rPr>
                           <m:t>𝑋</m:t>
                         </m:r>
                       </m:e>
                     </m:d>
                     <m:r>
-                      <a:rPr lang="en-IN" sz="1000" i="1"/>
+                      <a:rPr lang="en-IN" sz="1000" i="1">
+                        <a:latin typeface="Cambria Math" panose="02040503050406030204" pitchFamily="18" charset="0"/>
+                      </a:rPr>
                       <m:t>=</m:t>
                     </m:r>
                     <m:r>
-                      <a:rPr lang="en-IN" sz="1000" i="1"/>
+                      <a:rPr lang="en-IN" sz="1000" i="1">
+                        <a:latin typeface="Cambria Math" panose="02040503050406030204" pitchFamily="18" charset="0"/>
+                      </a:rPr>
                       <m:t>𝑝</m:t>
                     </m:r>
                   </m:oMath>
@@ -3844,43 +3977,59 @@
                 <a14:m>
                   <m:oMath xmlns:m="http://schemas.openxmlformats.org/officeDocument/2006/math">
                     <m:r>
-                      <a:rPr lang="en-IN" sz="1000" i="1"/>
+                      <a:rPr lang="en-IN" sz="1000" i="1">
+                        <a:latin typeface="Cambria Math" panose="02040503050406030204" pitchFamily="18" charset="0"/>
+                      </a:rPr>
                       <m:t>𝑉𝑎𝑟</m:t>
                     </m:r>
                     <m:d>
                       <m:dPr>
                         <m:ctrlPr>
-                          <a:rPr lang="en-IN" sz="1000" i="1"/>
+                          <a:rPr lang="en-IN" sz="1000" i="1">
+                            <a:latin typeface="Cambria Math" panose="02040503050406030204" pitchFamily="18" charset="0"/>
+                          </a:rPr>
                         </m:ctrlPr>
                       </m:dPr>
                       <m:e>
                         <m:r>
-                          <a:rPr lang="en-IN" sz="1000" i="1"/>
+                          <a:rPr lang="en-IN" sz="1000" i="1">
+                            <a:latin typeface="Cambria Math" panose="02040503050406030204" pitchFamily="18" charset="0"/>
+                          </a:rPr>
                           <m:t>𝑋</m:t>
                         </m:r>
                       </m:e>
                     </m:d>
                     <m:r>
-                      <a:rPr lang="en-IN" sz="1000" i="1"/>
+                      <a:rPr lang="en-IN" sz="1000" i="1">
+                        <a:latin typeface="Cambria Math" panose="02040503050406030204" pitchFamily="18" charset="0"/>
+                      </a:rPr>
                       <m:t>=</m:t>
                     </m:r>
                     <m:r>
-                      <a:rPr lang="en-IN" sz="1000" i="1"/>
+                      <a:rPr lang="en-IN" sz="1000" i="1">
+                        <a:latin typeface="Cambria Math" panose="02040503050406030204" pitchFamily="18" charset="0"/>
+                      </a:rPr>
                       <m:t>𝑝</m:t>
                     </m:r>
                     <m:d>
                       <m:dPr>
                         <m:ctrlPr>
-                          <a:rPr lang="en-IN" sz="1000" i="1"/>
+                          <a:rPr lang="en-IN" sz="1000" i="1">
+                            <a:latin typeface="Cambria Math" panose="02040503050406030204" pitchFamily="18" charset="0"/>
+                          </a:rPr>
                         </m:ctrlPr>
                       </m:dPr>
                       <m:e>
                         <m:r>
-                          <a:rPr lang="en-IN" sz="1000" i="1"/>
+                          <a:rPr lang="en-IN" sz="1000" i="1">
+                            <a:latin typeface="Cambria Math" panose="02040503050406030204" pitchFamily="18" charset="0"/>
+                          </a:rPr>
                           <m:t>1−</m:t>
                         </m:r>
                         <m:r>
-                          <a:rPr lang="en-IN" sz="1000" i="1"/>
+                          <a:rPr lang="en-IN" sz="1000" i="1">
+                            <a:latin typeface="Cambria Math" panose="02040503050406030204" pitchFamily="18" charset="0"/>
+                          </a:rPr>
                           <m:t>𝑝</m:t>
                         </m:r>
                       </m:e>
@@ -3906,54 +4055,76 @@
                 <a14:m>
                   <m:oMath xmlns:m="http://schemas.openxmlformats.org/officeDocument/2006/math">
                     <m:r>
-                      <a:rPr lang="en-IN" sz="1000" i="1"/>
+                      <a:rPr lang="en-IN" sz="1000" i="1">
+                        <a:latin typeface="Cambria Math" panose="02040503050406030204" pitchFamily="18" charset="0"/>
+                      </a:rPr>
                       <m:t>𝑃</m:t>
                     </m:r>
                     <m:d>
                       <m:dPr>
                         <m:ctrlPr>
-                          <a:rPr lang="en-IN" sz="1000" i="1"/>
+                          <a:rPr lang="en-IN" sz="1000" i="1">
+                            <a:latin typeface="Cambria Math" panose="02040503050406030204" pitchFamily="18" charset="0"/>
+                          </a:rPr>
                         </m:ctrlPr>
                       </m:dPr>
                       <m:e>
                         <m:r>
-                          <a:rPr lang="en-IN" sz="1000" i="1"/>
+                          <a:rPr lang="en-IN" sz="1000" i="1">
+                            <a:latin typeface="Cambria Math" panose="02040503050406030204" pitchFamily="18" charset="0"/>
+                          </a:rPr>
                           <m:t>𝑋</m:t>
                         </m:r>
                         <m:r>
-                          <a:rPr lang="en-IN" sz="1000" i="1"/>
+                          <a:rPr lang="en-IN" sz="1000" i="1">
+                            <a:latin typeface="Cambria Math" panose="02040503050406030204" pitchFamily="18" charset="0"/>
+                          </a:rPr>
                           <m:t>=</m:t>
                         </m:r>
                         <m:r>
-                          <a:rPr lang="en-IN" sz="1000" i="1"/>
+                          <a:rPr lang="en-IN" sz="1000" i="1">
+                            <a:latin typeface="Cambria Math" panose="02040503050406030204" pitchFamily="18" charset="0"/>
+                          </a:rPr>
                           <m:t>𝑥</m:t>
                         </m:r>
                         <m:r>
-                          <a:rPr lang="en-IN" sz="1000" i="1"/>
+                          <a:rPr lang="en-IN" sz="1000" i="1">
+                            <a:latin typeface="Cambria Math" panose="02040503050406030204" pitchFamily="18" charset="0"/>
+                          </a:rPr>
                           <m:t>∣</m:t>
                         </m:r>
                         <m:r>
-                          <a:rPr lang="en-IN" sz="1000" i="1"/>
+                          <a:rPr lang="en-IN" sz="1000" i="1">
+                            <a:latin typeface="Cambria Math" panose="02040503050406030204" pitchFamily="18" charset="0"/>
+                          </a:rPr>
                           <m:t>𝑛</m:t>
                         </m:r>
                         <m:r>
-                          <a:rPr lang="en-IN" sz="1000" i="1"/>
+                          <a:rPr lang="en-IN" sz="1000" i="1">
+                            <a:latin typeface="Cambria Math" panose="02040503050406030204" pitchFamily="18" charset="0"/>
+                          </a:rPr>
                           <m:t>,</m:t>
                         </m:r>
                         <m:r>
-                          <a:rPr lang="en-IN" sz="1000" i="1"/>
+                          <a:rPr lang="en-IN" sz="1000" i="1">
+                            <a:latin typeface="Cambria Math" panose="02040503050406030204" pitchFamily="18" charset="0"/>
+                          </a:rPr>
                           <m:t>𝑝</m:t>
                         </m:r>
                       </m:e>
                     </m:d>
                     <m:r>
-                      <a:rPr lang="en-IN" sz="1000" i="1"/>
+                      <a:rPr lang="en-IN" sz="1000" i="1">
+                        <a:latin typeface="Cambria Math" panose="02040503050406030204" pitchFamily="18" charset="0"/>
+                      </a:rPr>
                       <m:t>=</m:t>
                     </m:r>
                     <m:d>
                       <m:dPr>
                         <m:ctrlPr>
-                          <a:rPr lang="en-IN" sz="1000" i="1"/>
+                          <a:rPr lang="en-IN" sz="1000" i="1">
+                            <a:latin typeface="Cambria Math" panose="02040503050406030204" pitchFamily="18" charset="0"/>
+                          </a:rPr>
                         </m:ctrlPr>
                       </m:dPr>
                       <m:e>
@@ -3961,18 +4132,24 @@
                           <m:fPr>
                             <m:type m:val="noBar"/>
                             <m:ctrlPr>
-                              <a:rPr lang="en-IN" sz="1000" i="1"/>
+                              <a:rPr lang="en-IN" sz="1000" i="1">
+                                <a:latin typeface="Cambria Math" panose="02040503050406030204" pitchFamily="18" charset="0"/>
+                              </a:rPr>
                             </m:ctrlPr>
                           </m:fPr>
                           <m:num>
                             <m:r>
-                              <a:rPr lang="en-IN" sz="1000" i="1"/>
+                              <a:rPr lang="en-IN" sz="1000" i="1">
+                                <a:latin typeface="Cambria Math" panose="02040503050406030204" pitchFamily="18" charset="0"/>
+                              </a:rPr>
                               <m:t>𝑛</m:t>
                             </m:r>
                           </m:num>
                           <m:den>
                             <m:r>
-                              <a:rPr lang="en-IN" sz="1000" i="1"/>
+                              <a:rPr lang="en-IN" sz="1000" i="1">
+                                <a:latin typeface="Cambria Math" panose="02040503050406030204" pitchFamily="18" charset="0"/>
+                              </a:rPr>
                               <m:t>𝑥</m:t>
                             </m:r>
                           </m:den>
@@ -3982,18 +4159,24 @@
                     <m:sSup>
                       <m:sSupPr>
                         <m:ctrlPr>
-                          <a:rPr lang="en-IN" sz="1000" i="1"/>
+                          <a:rPr lang="en-IN" sz="1000" i="1">
+                            <a:latin typeface="Cambria Math" panose="02040503050406030204" pitchFamily="18" charset="0"/>
+                          </a:rPr>
                         </m:ctrlPr>
                       </m:sSupPr>
                       <m:e>
                         <m:r>
-                          <a:rPr lang="en-IN" sz="1000" i="1"/>
+                          <a:rPr lang="en-IN" sz="1000" i="1">
+                            <a:latin typeface="Cambria Math" panose="02040503050406030204" pitchFamily="18" charset="0"/>
+                          </a:rPr>
                           <m:t>𝑝</m:t>
                         </m:r>
                       </m:e>
                       <m:sup>
                         <m:r>
-                          <a:rPr lang="en-IN" sz="1000" i="1"/>
+                          <a:rPr lang="en-IN" sz="1000" i="1">
+                            <a:latin typeface="Cambria Math" panose="02040503050406030204" pitchFamily="18" charset="0"/>
+                          </a:rPr>
                           <m:t>𝑥</m:t>
                         </m:r>
                       </m:sup>
@@ -4001,23 +4184,31 @@
                     <m:sSup>
                       <m:sSupPr>
                         <m:ctrlPr>
-                          <a:rPr lang="en-IN" sz="1000" i="1"/>
+                          <a:rPr lang="en-IN" sz="1000" i="1">
+                            <a:latin typeface="Cambria Math" panose="02040503050406030204" pitchFamily="18" charset="0"/>
+                          </a:rPr>
                         </m:ctrlPr>
                       </m:sSupPr>
                       <m:e>
                         <m:d>
                           <m:dPr>
                             <m:ctrlPr>
-                              <a:rPr lang="en-IN" sz="1000" i="1"/>
+                              <a:rPr lang="en-IN" sz="1000" i="1">
+                                <a:latin typeface="Cambria Math" panose="02040503050406030204" pitchFamily="18" charset="0"/>
+                              </a:rPr>
                             </m:ctrlPr>
                           </m:dPr>
                           <m:e>
                             <m:r>
-                              <a:rPr lang="en-IN" sz="1000" i="1"/>
+                              <a:rPr lang="en-IN" sz="1000" i="1">
+                                <a:latin typeface="Cambria Math" panose="02040503050406030204" pitchFamily="18" charset="0"/>
+                              </a:rPr>
                               <m:t>1−</m:t>
                             </m:r>
                             <m:r>
-                              <a:rPr lang="en-IN" sz="1000" i="1"/>
+                              <a:rPr lang="en-IN" sz="1000" i="1">
+                                <a:latin typeface="Cambria Math" panose="02040503050406030204" pitchFamily="18" charset="0"/>
+                              </a:rPr>
                               <m:t>𝑝</m:t>
                             </m:r>
                           </m:e>
@@ -4025,15 +4216,21 @@
                       </m:e>
                       <m:sup>
                         <m:r>
-                          <a:rPr lang="en-IN" sz="1000" i="1"/>
+                          <a:rPr lang="en-IN" sz="1000" i="1">
+                            <a:latin typeface="Cambria Math" panose="02040503050406030204" pitchFamily="18" charset="0"/>
+                          </a:rPr>
                           <m:t>𝑛</m:t>
                         </m:r>
                         <m:r>
-                          <a:rPr lang="en-IN" sz="1000" i="1"/>
+                          <a:rPr lang="en-IN" sz="1000" i="1">
+                            <a:latin typeface="Cambria Math" panose="02040503050406030204" pitchFamily="18" charset="0"/>
+                          </a:rPr>
                           <m:t>−</m:t>
                         </m:r>
                         <m:r>
-                          <a:rPr lang="en-IN" sz="1000" i="1"/>
+                          <a:rPr lang="en-IN" sz="1000" i="1">
+                            <a:latin typeface="Cambria Math" panose="02040503050406030204" pitchFamily="18" charset="0"/>
+                          </a:rPr>
                           <m:t>𝑥</m:t>
                         </m:r>
                       </m:sup>
@@ -4047,28 +4244,38 @@
                 <a14:m>
                   <m:oMath xmlns:m="http://schemas.openxmlformats.org/officeDocument/2006/math">
                     <m:r>
-                      <a:rPr lang="en-IN" sz="1000"/>
+                      <a:rPr lang="en-IN" sz="1000">
+                        <a:latin typeface="Cambria Math" panose="02040503050406030204" pitchFamily="18" charset="0"/>
+                      </a:rPr>
                       <m:t>𝔼</m:t>
                     </m:r>
                     <m:d>
                       <m:dPr>
                         <m:ctrlPr>
-                          <a:rPr lang="en-IN" sz="1000" i="1"/>
+                          <a:rPr lang="en-IN" sz="1000" i="1">
+                            <a:latin typeface="Cambria Math" panose="02040503050406030204" pitchFamily="18" charset="0"/>
+                          </a:rPr>
                         </m:ctrlPr>
                       </m:dPr>
                       <m:e>
                         <m:r>
-                          <a:rPr lang="en-IN" sz="1000" i="1"/>
+                          <a:rPr lang="en-IN" sz="1000" i="1">
+                            <a:latin typeface="Cambria Math" panose="02040503050406030204" pitchFamily="18" charset="0"/>
+                          </a:rPr>
                           <m:t>𝑋</m:t>
                         </m:r>
                       </m:e>
                     </m:d>
                     <m:r>
-                      <a:rPr lang="en-IN" sz="1000" i="1"/>
+                      <a:rPr lang="en-IN" sz="1000" i="1">
+                        <a:latin typeface="Cambria Math" panose="02040503050406030204" pitchFamily="18" charset="0"/>
+                      </a:rPr>
                       <m:t>=</m:t>
                     </m:r>
                     <m:r>
-                      <a:rPr lang="en-IN" sz="1000" i="1"/>
+                      <a:rPr lang="en-IN" sz="1000" i="1">
+                        <a:latin typeface="Cambria Math" panose="02040503050406030204" pitchFamily="18" charset="0"/>
+                      </a:rPr>
                       <m:t>𝑛𝑝</m:t>
                     </m:r>
                   </m:oMath>
@@ -4089,37 +4296,51 @@
                     <m:d>
                       <m:dPr>
                         <m:ctrlPr>
-                          <a:rPr lang="en-IN" sz="1000" i="1"/>
+                          <a:rPr lang="en-IN" sz="1000" i="1">
+                            <a:latin typeface="Cambria Math" panose="02040503050406030204" pitchFamily="18" charset="0"/>
+                          </a:rPr>
                         </m:ctrlPr>
                       </m:dPr>
                       <m:e>
                         <m:r>
-                          <a:rPr lang="en-IN" sz="1000" i="1"/>
+                          <a:rPr lang="en-IN" sz="1000" i="1">
+                            <a:latin typeface="Cambria Math" panose="02040503050406030204" pitchFamily="18" charset="0"/>
+                          </a:rPr>
                           <m:t>𝑋</m:t>
                         </m:r>
                       </m:e>
                     </m:d>
                     <m:r>
-                      <a:rPr lang="en-IN" sz="1000" i="1"/>
+                      <a:rPr lang="en-IN" sz="1000" i="1">
+                        <a:latin typeface="Cambria Math" panose="02040503050406030204" pitchFamily="18" charset="0"/>
+                      </a:rPr>
                       <m:t>=</m:t>
                     </m:r>
                     <m:r>
-                      <a:rPr lang="en-IN" sz="1000" i="1"/>
+                      <a:rPr lang="en-IN" sz="1000" i="1">
+                        <a:latin typeface="Cambria Math" panose="02040503050406030204" pitchFamily="18" charset="0"/>
+                      </a:rPr>
                       <m:t>𝑛𝑝</m:t>
                     </m:r>
                     <m:d>
                       <m:dPr>
                         <m:ctrlPr>
-                          <a:rPr lang="en-IN" sz="1000" i="1"/>
+                          <a:rPr lang="en-IN" sz="1000" i="1">
+                            <a:latin typeface="Cambria Math" panose="02040503050406030204" pitchFamily="18" charset="0"/>
+                          </a:rPr>
                         </m:ctrlPr>
                       </m:dPr>
                       <m:e>
                         <m:r>
-                          <a:rPr lang="en-IN" sz="1000" i="1"/>
+                          <a:rPr lang="en-IN" sz="1000" i="1">
+                            <a:latin typeface="Cambria Math" panose="02040503050406030204" pitchFamily="18" charset="0"/>
+                          </a:rPr>
                           <m:t>1−</m:t>
                         </m:r>
                         <m:r>
-                          <a:rPr lang="en-IN" sz="1000" i="1"/>
+                          <a:rPr lang="en-IN" sz="1000" i="1">
+                            <a:latin typeface="Cambria Math" panose="02040503050406030204" pitchFamily="18" charset="0"/>
+                          </a:rPr>
                           <m:t>𝑝</m:t>
                         </m:r>
                       </m:e>
@@ -4148,66 +4369,92 @@
                 <a14:m>
                   <m:oMath xmlns:m="http://schemas.openxmlformats.org/officeDocument/2006/math">
                     <m:r>
-                      <a:rPr lang="en-IN" sz="1000" i="1"/>
+                      <a:rPr lang="en-IN" sz="1000" i="1">
+                        <a:latin typeface="Cambria Math" panose="02040503050406030204" pitchFamily="18" charset="0"/>
+                      </a:rPr>
                       <m:t>𝑃</m:t>
                     </m:r>
                     <m:d>
                       <m:dPr>
                         <m:ctrlPr>
-                          <a:rPr lang="en-IN" sz="1000" i="1"/>
+                          <a:rPr lang="en-IN" sz="1000" i="1">
+                            <a:latin typeface="Cambria Math" panose="02040503050406030204" pitchFamily="18" charset="0"/>
+                          </a:rPr>
                         </m:ctrlPr>
                       </m:dPr>
                       <m:e>
                         <m:r>
-                          <a:rPr lang="en-IN" sz="1000" i="1"/>
+                          <a:rPr lang="en-IN" sz="1000" i="1">
+                            <a:latin typeface="Cambria Math" panose="02040503050406030204" pitchFamily="18" charset="0"/>
+                          </a:rPr>
                           <m:t>𝑋</m:t>
                         </m:r>
                         <m:r>
-                          <a:rPr lang="en-IN" sz="1000" i="1"/>
+                          <a:rPr lang="en-IN" sz="1000" i="1">
+                            <a:latin typeface="Cambria Math" panose="02040503050406030204" pitchFamily="18" charset="0"/>
+                          </a:rPr>
                           <m:t>=</m:t>
                         </m:r>
                         <m:r>
-                          <a:rPr lang="en-IN" sz="1000" i="1"/>
+                          <a:rPr lang="en-IN" sz="1000" i="1">
+                            <a:latin typeface="Cambria Math" panose="02040503050406030204" pitchFamily="18" charset="0"/>
+                          </a:rPr>
                           <m:t>𝑥</m:t>
                         </m:r>
                         <m:r>
-                          <a:rPr lang="en-IN" sz="1000" i="1"/>
+                          <a:rPr lang="en-IN" sz="1000" i="1">
+                            <a:latin typeface="Cambria Math" panose="02040503050406030204" pitchFamily="18" charset="0"/>
+                          </a:rPr>
                           <m:t>∣</m:t>
                         </m:r>
                         <m:r>
-                          <a:rPr lang="en-IN" sz="1000" i="1"/>
+                          <a:rPr lang="en-IN" sz="1000" i="1">
+                            <a:latin typeface="Cambria Math" panose="02040503050406030204" pitchFamily="18" charset="0"/>
+                          </a:rPr>
                           <m:t>𝑝</m:t>
                         </m:r>
                       </m:e>
                     </m:d>
                     <m:r>
-                      <a:rPr lang="en-IN" sz="1000" i="1"/>
+                      <a:rPr lang="en-IN" sz="1000" i="1">
+                        <a:latin typeface="Cambria Math" panose="02040503050406030204" pitchFamily="18" charset="0"/>
+                      </a:rPr>
                       <m:t>=</m:t>
                     </m:r>
                     <m:r>
-                      <a:rPr lang="en-IN" sz="1000" i="1"/>
+                      <a:rPr lang="en-IN" sz="1000" i="1">
+                        <a:latin typeface="Cambria Math" panose="02040503050406030204" pitchFamily="18" charset="0"/>
+                      </a:rPr>
                       <m:t>𝑝</m:t>
                     </m:r>
                     <m:sSup>
                       <m:sSupPr>
                         <m:ctrlPr>
-                          <a:rPr lang="en-IN" sz="1000" i="1"/>
+                          <a:rPr lang="en-IN" sz="1000" i="1">
+                            <a:latin typeface="Cambria Math" panose="02040503050406030204" pitchFamily="18" charset="0"/>
+                          </a:rPr>
                         </m:ctrlPr>
                       </m:sSupPr>
                       <m:e>
                         <m:d>
                           <m:dPr>
                             <m:ctrlPr>
-                              <a:rPr lang="en-IN" sz="1000" i="1"/>
+                              <a:rPr lang="en-IN" sz="1000" i="1">
+                                <a:latin typeface="Cambria Math" panose="02040503050406030204" pitchFamily="18" charset="0"/>
+                              </a:rPr>
                             </m:ctrlPr>
                           </m:dPr>
                           <m:e>
                             <m:r>
-                              <a:rPr lang="en-IN" sz="1000" i="1"/>
+                              <a:rPr lang="en-IN" sz="1000" i="1">
+                                <a:latin typeface="Cambria Math" panose="02040503050406030204" pitchFamily="18" charset="0"/>
+                              </a:rPr>
                               <m:t>1−</m:t>
                             </m:r>
                             <m:r>
-                              <a:rPr lang="en-IN" sz="1000" i="1"/>
+                              <a:rPr lang="en-IN" sz="1000" i="1">
+                                <a:latin typeface="Cambria Math" panose="02040503050406030204" pitchFamily="18" charset="0"/>
+                              </a:rPr>
                               <m:t>𝑝</m:t>
                             </m:r>
                           </m:e>
@@ -4215,7 +4462,9 @@
                       </m:e>
                       <m:sup>
                         <m:r>
-                          <a:rPr lang="en-IN" sz="1000" i="1"/>
+                          <a:rPr lang="en-IN" sz="1000" i="1">
+                            <a:latin typeface="Cambria Math" panose="02040503050406030204" pitchFamily="18" charset="0"/>
+                          </a:rPr>
                           <m:t>𝑥</m:t>
                         </m:r>
                       </m:sup>
@@ -4231,45 +4480,61 @@
                 <a14:m>
                   <m:oMath xmlns:m="http://schemas.openxmlformats.org/officeDocument/2006/math">
                     <m:r>
-                      <a:rPr lang="en-IN" sz="1000"/>
+                      <a:rPr lang="en-IN" sz="1000">
+                        <a:latin typeface="Cambria Math" panose="02040503050406030204" pitchFamily="18" charset="0"/>
+                      </a:rPr>
                       <m:t>𝔼</m:t>
                     </m:r>
                     <m:d>
                       <m:dPr>
                         <m:ctrlPr>
-                          <a:rPr lang="en-IN" sz="1000" i="1"/>
+                          <a:rPr lang="en-IN" sz="1000" i="1">
+                            <a:latin typeface="Cambria Math" panose="02040503050406030204" pitchFamily="18" charset="0"/>
+                          </a:rPr>
                         </m:ctrlPr>
                       </m:dPr>
                       <m:e>
                         <m:r>
-                          <a:rPr lang="en-IN" sz="1000" i="1"/>
+                          <a:rPr lang="en-IN" sz="1000" i="1">
+                            <a:latin typeface="Cambria Math" panose="02040503050406030204" pitchFamily="18" charset="0"/>
+                          </a:rPr>
                           <m:t>𝑋</m:t>
                         </m:r>
                       </m:e>
                     </m:d>
                     <m:r>
-                      <a:rPr lang="en-IN" sz="1000" i="1"/>
+                      <a:rPr lang="en-IN" sz="1000" i="1">
+                        <a:latin typeface="Cambria Math" panose="02040503050406030204" pitchFamily="18" charset="0"/>
+                      </a:rPr>
                       <m:t>=</m:t>
                     </m:r>
                     <m:f>
                       <m:fPr>
                         <m:ctrlPr>
-                          <a:rPr lang="en-IN" sz="1000" i="1"/>
+                          <a:rPr lang="en-IN" sz="1000" i="1">
+                            <a:latin typeface="Cambria Math" panose="02040503050406030204" pitchFamily="18" charset="0"/>
+                          </a:rPr>
                         </m:ctrlPr>
                       </m:fPr>
                       <m:num>
                         <m:r>
-                          <a:rPr lang="en-IN" sz="1000" i="1"/>
+                          <a:rPr lang="en-IN" sz="1000" i="1">
+                            <a:latin typeface="Cambria Math" panose="02040503050406030204" pitchFamily="18" charset="0"/>
+                          </a:rPr>
                           <m:t>1−</m:t>
                         </m:r>
                         <m:r>
-                          <a:rPr lang="en-IN" sz="1000" i="1"/>
+                          <a:rPr lang="en-IN" sz="1000" i="1">
+                            <a:latin typeface="Cambria Math" panose="02040503050406030204" pitchFamily="18" charset="0"/>
+                          </a:rPr>
                           <m:t>𝑝</m:t>
                         </m:r>
                       </m:num>
                       <m:den>
                         <m:r>
-                          <a:rPr lang="en-IN" sz="1000" i="1"/>
+                          <a:rPr lang="en-IN" sz="1000" i="1">
+                            <a:latin typeface="Cambria Math" panose="02040503050406030204" pitchFamily="18" charset="0"/>
+                          </a:rPr>
                           <m:t>𝑝</m:t>
                         </m:r>
                       </m:den>
@@ -4292,33 +4557,45 @@
                     <m:d>
                       <m:dPr>
                         <m:ctrlPr>
-                          <a:rPr lang="en-IN" sz="1000" i="1"/>
+                          <a:rPr lang="en-IN" sz="1000" i="1">
+                            <a:latin typeface="Cambria Math" panose="02040503050406030204" pitchFamily="18" charset="0"/>
+                          </a:rPr>
                         </m:ctrlPr>
                       </m:dPr>
                       <m:e>
                         <m:r>
-                          <a:rPr lang="en-IN" sz="1000" i="1"/>
+                          <a:rPr lang="en-IN" sz="1000" i="1">
+                            <a:latin typeface="Cambria Math" panose="02040503050406030204" pitchFamily="18" charset="0"/>
+                          </a:rPr>
                           <m:t>𝑋</m:t>
                         </m:r>
                       </m:e>
                     </m:d>
                     <m:r>
-                      <a:rPr lang="en-IN" sz="1000" i="1"/>
+                      <a:rPr lang="en-IN" sz="1000" i="1">
+                        <a:latin typeface="Cambria Math" panose="02040503050406030204" pitchFamily="18" charset="0"/>
+                      </a:rPr>
                       <m:t>=</m:t>
                     </m:r>
                     <m:f>
                       <m:fPr>
                         <m:ctrlPr>
-                          <a:rPr lang="en-IN" sz="1000" i="1"/>
+                          <a:rPr lang="en-IN" sz="1000" i="1">
+                            <a:latin typeface="Cambria Math" panose="02040503050406030204" pitchFamily="18" charset="0"/>
+                          </a:rPr>
                         </m:ctrlPr>
                       </m:fPr>
                       <m:num>
                         <m:r>
-                          <a:rPr lang="en-IN" sz="1000" i="1"/>
+                          <a:rPr lang="en-IN" sz="1000" i="1">
+                            <a:latin typeface="Cambria Math" panose="02040503050406030204" pitchFamily="18" charset="0"/>
+                          </a:rPr>
                           <m:t>1−</m:t>
                         </m:r>
                         <m:r>
-                          <a:rPr lang="en-IN" sz="1000" i="1"/>
+                          <a:rPr lang="en-IN" sz="1000" i="1">
+                            <a:latin typeface="Cambria Math" panose="02040503050406030204" pitchFamily="18" charset="0"/>
+                          </a:rPr>
                           <m:t>𝑝</m:t>
                         </m:r>
                       </m:num>
@@ -4326,18 +4603,24 @@
                         <m:sSup>
                           <m:sSupPr>
                             <m:ctrlPr>
-                              <a:rPr lang="en-IN" sz="1000" i="1"/>
+                              <a:rPr lang="en-IN" sz="1000" i="1">
+                                <a:latin typeface="Cambria Math" panose="02040503050406030204" pitchFamily="18" charset="0"/>
+                              </a:rPr>
                             </m:ctrlPr>
                           </m:sSupPr>
                           <m:e>
                             <m:r>
-                              <a:rPr lang="en-IN" sz="1000" i="1"/>
+                              <a:rPr lang="en-IN" sz="1000" i="1">
+                                <a:latin typeface="Cambria Math" panose="02040503050406030204" pitchFamily="18" charset="0"/>
+                              </a:rPr>
                               <m:t>𝑝</m:t>
                             </m:r>
                           </m:e>
                           <m:sup>
                             <m:r>
-                              <a:rPr lang="en-IN" sz="1000" i="1"/>
+                              <a:rPr lang="en-IN" sz="1000" i="1">
+                                <a:latin typeface="Cambria Math" panose="02040503050406030204" pitchFamily="18" charset="0"/>
+                              </a:rPr>
                               <m:t>2</m:t>
                             </m:r>
                           </m:sup>
@@ -4365,54 +4648,76 @@
                 <a14:m>
                   <m:oMath xmlns:m="http://schemas.openxmlformats.org/officeDocument/2006/math">
                     <m:r>
-                      <a:rPr lang="en-IN" sz="1000" i="1"/>
+                      <a:rPr lang="en-IN" sz="1000" i="1">
+                        <a:latin typeface="Cambria Math" panose="02040503050406030204" pitchFamily="18" charset="0"/>
+                      </a:rPr>
                       <m:t>𝑃</m:t>
                     </m:r>
                     <m:d>
                       <m:dPr>
                         <m:ctrlPr>
-                          <a:rPr lang="en-IN" sz="1000" i="1"/>
+                          <a:rPr lang="en-IN" sz="1000" i="1">
+                            <a:latin typeface="Cambria Math" panose="02040503050406030204" pitchFamily="18" charset="0"/>
+                          </a:rPr>
                         </m:ctrlPr>
                       </m:dPr>
                       <m:e>
                         <m:r>
-                          <a:rPr lang="en-IN" sz="1000" i="1"/>
+                          <a:rPr lang="en-IN" sz="1000" i="1">
+                            <a:latin typeface="Cambria Math" panose="02040503050406030204" pitchFamily="18" charset="0"/>
+                          </a:rPr>
                           <m:t>𝑋</m:t>
                         </m:r>
                         <m:r>
-                          <a:rPr lang="en-IN" sz="1000" i="1"/>
+                          <a:rPr lang="en-IN" sz="1000" i="1">
+                            <a:latin typeface="Cambria Math" panose="02040503050406030204" pitchFamily="18" charset="0"/>
+                          </a:rPr>
                           <m:t>=</m:t>
                         </m:r>
                         <m:r>
-                          <a:rPr lang="en-IN" sz="1000" i="1"/>
+                          <a:rPr lang="en-IN" sz="1000" i="1">
+                            <a:latin typeface="Cambria Math" panose="02040503050406030204" pitchFamily="18" charset="0"/>
+                          </a:rPr>
                           <m:t>𝑥</m:t>
                         </m:r>
                         <m:r>
-                          <a:rPr lang="en-IN" sz="1000" i="1"/>
+                          <a:rPr lang="en-IN" sz="1000" i="1">
+                            <a:latin typeface="Cambria Math" panose="02040503050406030204" pitchFamily="18" charset="0"/>
+                          </a:rPr>
                           <m:t>∣</m:t>
                         </m:r>
                         <m:r>
-                          <a:rPr lang="en-IN" sz="1000" i="1"/>
+                          <a:rPr lang="en-IN" sz="1000" i="1">
+                            <a:latin typeface="Cambria Math" panose="02040503050406030204" pitchFamily="18" charset="0"/>
+                          </a:rPr>
                           <m:t>𝑘</m:t>
                         </m:r>
                         <m:r>
-                          <a:rPr lang="en-IN" sz="1000" i="1"/>
+                          <a:rPr lang="en-IN" sz="1000" i="1">
+                            <a:latin typeface="Cambria Math" panose="02040503050406030204" pitchFamily="18" charset="0"/>
+                          </a:rPr>
                           <m:t>,</m:t>
                         </m:r>
                         <m:r>
-                          <a:rPr lang="en-IN" sz="1000" i="1"/>
+                          <a:rPr lang="en-IN" sz="1000" i="1">
+                            <a:latin typeface="Cambria Math" panose="02040503050406030204" pitchFamily="18" charset="0"/>
+                          </a:rPr>
                           <m:t>𝑝</m:t>
                         </m:r>
                       </m:e>
                     </m:d>
                     <m:r>
-                      <a:rPr lang="en-IN" sz="1000" i="1"/>
+                      <a:rPr lang="en-IN" sz="1000" i="1">
+                        <a:latin typeface="Cambria Math" panose="02040503050406030204" pitchFamily="18" charset="0"/>
+                      </a:rPr>
                       <m:t>=</m:t>
                     </m:r>
                     <m:d>
                       <m:dPr>
                         <m:ctrlPr>
-                          <a:rPr lang="en-IN" sz="1000" i="1"/>
+                          <a:rPr lang="en-IN" sz="1000" i="1">
+                            <a:latin typeface="Cambria Math" panose="02040503050406030204" pitchFamily="18" charset="0"/>
+                          </a:rPr>
                         </m:ctrlPr>
                       </m:dPr>
                       <m:e>
@@ -4420,26 +4725,36 @@
                           <m:fPr>
                             <m:type m:val="noBar"/>
                             <m:ctrlPr>
-                              <a:rPr lang="en-IN" sz="1000" i="1"/>
+                              <a:rPr lang="en-IN" sz="1000" i="1">
+                                <a:latin typeface="Cambria Math" panose="02040503050406030204" pitchFamily="18" charset="0"/>
+                              </a:rPr>
                             </m:ctrlPr>
                           </m:fPr>
                           <m:num>
                             <m:r>
-                              <a:rPr lang="en-IN" sz="1000" i="1"/>
+                              <a:rPr lang="en-IN" sz="1000" i="1">
+                                <a:latin typeface="Cambria Math" panose="02040503050406030204" pitchFamily="18" charset="0"/>
+                              </a:rPr>
                               <m:t>𝑘</m:t>
                             </m:r>
                             <m:r>
-                              <a:rPr lang="en-IN" sz="1000" i="1"/>
+                              <a:rPr lang="en-IN" sz="1000" i="1">
+                                <a:latin typeface="Cambria Math" panose="02040503050406030204" pitchFamily="18" charset="0"/>
+                              </a:rPr>
                               <m:t>−1+</m:t>
                             </m:r>
                             <m:r>
-                              <a:rPr lang="en-IN" sz="1000" i="1"/>
+                              <a:rPr lang="en-IN" sz="1000" i="1">
+                                <a:latin typeface="Cambria Math" panose="02040503050406030204" pitchFamily="18" charset="0"/>
+                              </a:rPr>
                               <m:t>𝑥</m:t>
                             </m:r>
                           </m:num>
                           <m:den>
                             <m:r>
-                              <a:rPr lang="en-IN" sz="1000" i="1"/>
+                              <a:rPr lang="en-IN" sz="1000" i="1">
+                                <a:latin typeface="Cambria Math" panose="02040503050406030204" pitchFamily="18" charset="0"/>
+                              </a:rPr>
                               <m:t>𝑥</m:t>
                             </m:r>
                           </m:den>
@@ -4449,18 +4764,24 @@
                     <m:sSup>
                       <m:sSupPr>
                         <m:ctrlPr>
-                          <a:rPr lang="en-IN" sz="1000" i="1"/>
+                          <a:rPr lang="en-IN" sz="1000" i="1">
+                            <a:latin typeface="Cambria Math" panose="02040503050406030204" pitchFamily="18" charset="0"/>
+                          </a:rPr>
                         </m:ctrlPr>
                       </m:sSupPr>
                       <m:e>
                         <m:r>
-                          <a:rPr lang="en-IN" sz="1000" i="1"/>
+                          <a:rPr lang="en-IN" sz="1000" i="1">
+                            <a:latin typeface="Cambria Math" panose="02040503050406030204" pitchFamily="18" charset="0"/>
+                          </a:rPr>
                           <m:t>𝑝</m:t>
                         </m:r>
                       </m:e>
                       <m:sup>
                         <m:r>
-                          <a:rPr lang="en-IN" sz="1000" i="1"/>
+                          <a:rPr lang="en-IN" sz="1000" i="1">
+                            <a:latin typeface="Cambria Math" panose="02040503050406030204" pitchFamily="18" charset="0"/>
+                          </a:rPr>
                           <m:t>𝑘</m:t>
                         </m:r>
                       </m:sup>
@@ -4468,23 +4789,31 @@
                     <m:sSup>
                       <m:sSupPr>
                         <m:ctrlPr>
-                          <a:rPr lang="en-IN" sz="1000" i="1"/>
+                          <a:rPr lang="en-IN" sz="1000" i="1">
+                            <a:latin typeface="Cambria Math" panose="02040503050406030204" pitchFamily="18" charset="0"/>
+                          </a:rPr>
                         </m:ctrlPr>
                       </m:sSupPr>
                       <m:e>
                         <m:d>
                           <m:dPr>
                             <m:ctrlPr>
-                              <a:rPr lang="en-IN" sz="1000" i="1"/>
+                              <a:rPr lang="en-IN" sz="1000" i="1">
+                                <a:latin typeface="Cambria Math" panose="02040503050406030204" pitchFamily="18" charset="0"/>
+                              </a:rPr>
                             </m:ctrlPr>
                           </m:dPr>
                           <m:e>
                             <m:r>
-                              <a:rPr lang="en-IN" sz="1000" i="1"/>
+                              <a:rPr lang="en-IN" sz="1000" i="1">
+                                <a:latin typeface="Cambria Math" panose="02040503050406030204" pitchFamily="18" charset="0"/>
+                              </a:rPr>
                               <m:t>1−</m:t>
                             </m:r>
                             <m:r>
-                              <a:rPr lang="en-IN" sz="1000" i="1"/>
+                              <a:rPr lang="en-IN" sz="1000" i="1">
+                                <a:latin typeface="Cambria Math" panose="02040503050406030204" pitchFamily="18" charset="0"/>
+                              </a:rPr>
                               <m:t>𝑝</m:t>
                             </m:r>
                           </m:e>
@@ -4492,7 +4821,9 @@
                       </m:e>
                       <m:sup>
                         <m:r>
-                          <a:rPr lang="en-IN" sz="1000" i="1"/>
+                          <a:rPr lang="en-IN" sz="1000" i="1">
+                            <a:latin typeface="Cambria Math" panose="02040503050406030204" pitchFamily="18" charset="0"/>
+                          </a:rPr>
                           <m:t>𝑥</m:t>
                         </m:r>
                       </m:sup>
@@ -4506,50 +4837,68 @@
                 <a14:m>
                   <m:oMath xmlns:m="http://schemas.openxmlformats.org/officeDocument/2006/math">
                     <m:r>
-                      <a:rPr lang="en-IN" sz="1000"/>
+                      <a:rPr lang="en-IN" sz="1000">
+                        <a:latin typeface="Cambria Math" panose="02040503050406030204" pitchFamily="18" charset="0"/>
+                      </a:rPr>
                       <m:t>𝔼</m:t>
                     </m:r>
                     <m:d>
                       <m:dPr>
                         <m:ctrlPr>
-                          <a:rPr lang="en-IN" sz="1000" i="1"/>
+                          <a:rPr lang="en-IN" sz="1000" i="1">
+                            <a:latin typeface="Cambria Math" panose="02040503050406030204" pitchFamily="18" charset="0"/>
+                          </a:rPr>
                         </m:ctrlPr>
                       </m:dPr>
                       <m:e>
                         <m:r>
-                          <a:rPr lang="en-IN" sz="1000" i="1"/>
+                          <a:rPr lang="en-IN" sz="1000" i="1">
+                            <a:latin typeface="Cambria Math" panose="02040503050406030204" pitchFamily="18" charset="0"/>
+                          </a:rPr>
                           <m:t>𝑋</m:t>
                         </m:r>
                       </m:e>
                     </m:d>
                     <m:r>
-                      <a:rPr lang="en-IN" sz="1000" i="1"/>
+                      <a:rPr lang="en-IN" sz="1000" i="1">
+                        <a:latin typeface="Cambria Math" panose="02040503050406030204" pitchFamily="18" charset="0"/>
+                      </a:rPr>
                       <m:t>=</m:t>
                     </m:r>
                     <m:f>
                       <m:fPr>
                         <m:ctrlPr>
-                          <a:rPr lang="en-IN" sz="1000" i="1"/>
+                          <a:rPr lang="en-IN" sz="1000" i="1">
+                            <a:latin typeface="Cambria Math" panose="02040503050406030204" pitchFamily="18" charset="0"/>
+                          </a:rPr>
                         </m:ctrlPr>
                       </m:fPr>
                       <m:num>
                         <m:r>
-                          <a:rPr lang="en-IN" sz="1000" i="1"/>
+                          <a:rPr lang="en-IN" sz="1000" i="1">
+                            <a:latin typeface="Cambria Math" panose="02040503050406030204" pitchFamily="18" charset="0"/>
+                          </a:rPr>
                           <m:t>𝑘</m:t>
                         </m:r>
                         <m:d>
                           <m:dPr>
                             <m:ctrlPr>
-                              <a:rPr lang="en-IN" sz="1000" i="1"/>
+                              <a:rPr lang="en-IN" sz="1000" i="1">
+                                <a:latin typeface="Cambria Math" panose="02040503050406030204" pitchFamily="18" charset="0"/>
+                              </a:rPr>
                             </m:ctrlPr>
                           </m:dPr>
                           <m:e>
                             <m:r>
-                              <a:rPr lang="en-IN" sz="1000" i="1"/>
+                              <a:rPr lang="en-IN" sz="1000" i="1">
+                                <a:latin typeface="Cambria Math" panose="02040503050406030204" pitchFamily="18" charset="0"/>
+                              </a:rPr>
                               <m:t>1−</m:t>
                             </m:r>
                             <m:r>
-                              <a:rPr lang="en-IN" sz="1000" i="1"/>
+                              <a:rPr lang="en-IN" sz="1000" i="1">
+                                <a:latin typeface="Cambria Math" panose="02040503050406030204" pitchFamily="18" charset="0"/>
+                              </a:rPr>
                               <m:t>𝑝</m:t>
                             </m:r>
                           </m:e>
@@ -4557,7 +4906,9 @@
                       </m:num>
                       <m:den>
                         <m:r>
-                          <a:rPr lang="en-IN" sz="1000" i="1"/>
+                          <a:rPr lang="en-IN" sz="1000" i="1">
+                            <a:latin typeface="Cambria Math" panose="02040503050406030204" pitchFamily="18" charset="0"/>
+                          </a:rPr>
                           <m:t>𝑝</m:t>
                         </m:r>
                       </m:den>
@@ -4580,44 +4931,60 @@
                     <m:d>
                       <m:dPr>
                         <m:ctrlPr>
-                          <a:rPr lang="en-IN" sz="1000" i="1"/>
+                          <a:rPr lang="en-IN" sz="1000" i="1">
+                            <a:latin typeface="Cambria Math" panose="02040503050406030204" pitchFamily="18" charset="0"/>
+                          </a:rPr>
                         </m:ctrlPr>
                       </m:dPr>
                       <m:e>
                         <m:r>
-                          <a:rPr lang="en-IN" sz="1000" i="1"/>
+                          <a:rPr lang="en-IN" sz="1000" i="1">
+                            <a:latin typeface="Cambria Math" panose="02040503050406030204" pitchFamily="18" charset="0"/>
+                          </a:rPr>
                           <m:t>𝑋</m:t>
                         </m:r>
                       </m:e>
                     </m:d>
                     <m:r>
-                      <a:rPr lang="en-IN" sz="1000" i="1"/>
+                      <a:rPr lang="en-IN" sz="1000" i="1">
+                        <a:latin typeface="Cambria Math" panose="02040503050406030204" pitchFamily="18" charset="0"/>
+                      </a:rPr>
                       <m:t>=</m:t>
                     </m:r>
                     <m:f>
                       <m:fPr>
                         <m:ctrlPr>
-                          <a:rPr lang="en-IN" sz="1000" i="1"/>
+                          <a:rPr lang="en-IN" sz="1000" i="1">
+                            <a:latin typeface="Cambria Math" panose="02040503050406030204" pitchFamily="18" charset="0"/>
+                          </a:rPr>
                         </m:ctrlPr>
                       </m:fPr>
                       <m:num>
                         <m:r>
-                          <a:rPr lang="en-IN" sz="1000" i="1"/>
+                          <a:rPr lang="en-IN" sz="1000" i="1">
+                            <a:latin typeface="Cambria Math" panose="02040503050406030204" pitchFamily="18" charset="0"/>
+                          </a:rPr>
                           <m:t>𝑘</m:t>
                         </m:r>
                         <m:d>
                           <m:dPr>
                             <m:ctrlPr>
-                              <a:rPr lang="en-IN" sz="1000" i="1"/>
+                              <a:rPr lang="en-IN" sz="1000" i="1">
+                                <a:latin typeface="Cambria Math" panose="02040503050406030204" pitchFamily="18" charset="0"/>
+                              </a:rPr>
                             </m:ctrlPr>
                           </m:dPr>
                           <m:e>
                             <m:r>
-                              <a:rPr lang="en-IN" sz="1000" i="1"/>
+                              <a:rPr lang="en-IN" sz="1000" i="1">
+                                <a:latin typeface="Cambria Math" panose="02040503050406030204" pitchFamily="18" charset="0"/>
+                              </a:rPr>
                               <m:t>1−</m:t>
                             </m:r>
                             <m:r>
-                              <a:rPr lang="en-IN" sz="1000" i="1"/>
+                              <a:rPr lang="en-IN" sz="1000" i="1">
+                                <a:latin typeface="Cambria Math" panose="02040503050406030204" pitchFamily="18" charset="0"/>
+                              </a:rPr>
                               <m:t>𝑝</m:t>
                             </m:r>
                           </m:e>
@@ -4627,18 +4994,24 @@
                         <m:sSup>
                           <m:sSupPr>
                             <m:ctrlPr>
-                              <a:rPr lang="en-IN" sz="1000" i="1"/>
+                              <a:rPr lang="en-IN" sz="1000" i="1">
+                                <a:latin typeface="Cambria Math" panose="02040503050406030204" pitchFamily="18" charset="0"/>
+                              </a:rPr>
                             </m:ctrlPr>
                           </m:sSupPr>
                           <m:e>
                             <m:r>
-                              <a:rPr lang="en-IN" sz="1000" i="1"/>
+                              <a:rPr lang="en-IN" sz="1000" i="1">
+                                <a:latin typeface="Cambria Math" panose="02040503050406030204" pitchFamily="18" charset="0"/>
+                              </a:rPr>
                               <m:t>𝑝</m:t>
                             </m:r>
                           </m:e>
                           <m:sup>
                             <m:r>
-                              <a:rPr lang="en-IN" sz="1000" i="1"/>
+                              <a:rPr lang="en-IN" sz="1000" i="1">
+                                <a:latin typeface="Cambria Math" panose="02040503050406030204" pitchFamily="18" charset="0"/>
+                              </a:rPr>
                               <m:t>2</m:t>
                             </m:r>
                           </m:sup>
@@ -4657,7 +5030,7 @@
                 </a:pPr>
                 <a:r>
                   <a:rPr lang="en-IN" sz="1000" b="1" dirty="0"/>
-                  <a:t>Pois</a:t>
+                  <a:t>pois</a:t>
                 </a:r>
                 <a:r>
                   <a:rPr lang="en-IN" sz="1000" dirty="0"/>
@@ -4666,64 +5039,88 @@
                 <a14:m>
                   <m:oMath xmlns:m="http://schemas.openxmlformats.org/officeDocument/2006/math">
                     <m:r>
-                      <a:rPr lang="en-IN" sz="1000" i="1"/>
+                      <a:rPr lang="en-IN" sz="1000" i="1">
+                        <a:latin typeface="Cambria Math" panose="02040503050406030204" pitchFamily="18" charset="0"/>
+                      </a:rPr>
                       <m:t>𝑃</m:t>
                     </m:r>
                     <m:d>
                       <m:dPr>
                         <m:ctrlPr>
-                          <a:rPr lang="en-IN" sz="1000" i="1"/>
+                          <a:rPr lang="en-IN" sz="1000" i="1">
+                            <a:latin typeface="Cambria Math" panose="02040503050406030204" pitchFamily="18" charset="0"/>
+                          </a:rPr>
                         </m:ctrlPr>
                       </m:dPr>
                       <m:e>
                         <m:r>
-                          <a:rPr lang="en-IN" sz="1000" i="1"/>
+                          <a:rPr lang="en-IN" sz="1000" i="1">
+                            <a:latin typeface="Cambria Math" panose="02040503050406030204" pitchFamily="18" charset="0"/>
+                          </a:rPr>
                           <m:t>𝑋</m:t>
                         </m:r>
                         <m:r>
-                          <a:rPr lang="en-IN" sz="1000" i="1"/>
+                          <a:rPr lang="en-IN" sz="1000" i="1">
+                            <a:latin typeface="Cambria Math" panose="02040503050406030204" pitchFamily="18" charset="0"/>
+                          </a:rPr>
                           <m:t>=</m:t>
                         </m:r>
                         <m:r>
-                          <a:rPr lang="en-IN" sz="1000" i="1"/>
+                          <a:rPr lang="en-IN" sz="1000" i="1">
+                            <a:latin typeface="Cambria Math" panose="02040503050406030204" pitchFamily="18" charset="0"/>
+                          </a:rPr>
                           <m:t>𝑥</m:t>
                         </m:r>
                         <m:r>
-                          <a:rPr lang="en-IN" sz="1000" i="1"/>
+                          <a:rPr lang="en-IN" sz="1000" i="1">
+                            <a:latin typeface="Cambria Math" panose="02040503050406030204" pitchFamily="18" charset="0"/>
+                          </a:rPr>
                           <m:t>∣</m:t>
                         </m:r>
                         <m:r>
-                          <a:rPr lang="en-IN" sz="1000" i="1"/>
+                          <a:rPr lang="en-IN" sz="1000" i="1">
+                            <a:latin typeface="Cambria Math" panose="02040503050406030204" pitchFamily="18" charset="0"/>
+                          </a:rPr>
                           <m:t>𝜆</m:t>
                         </m:r>
                       </m:e>
                     </m:d>
                     <m:r>
-                      <a:rPr lang="en-IN" sz="1000" i="1"/>
+                      <a:rPr lang="en-IN" sz="1000" i="1">
+                        <a:latin typeface="Cambria Math" panose="02040503050406030204" pitchFamily="18" charset="0"/>
+                      </a:rPr>
                       <m:t>=</m:t>
                     </m:r>
                     <m:f>
                       <m:fPr>
                         <m:ctrlPr>
-                          <a:rPr lang="en-IN" sz="1000" i="1"/>
+                          <a:rPr lang="en-IN" sz="1000" i="1">
+                            <a:latin typeface="Cambria Math" panose="02040503050406030204" pitchFamily="18" charset="0"/>
+                          </a:rPr>
                         </m:ctrlPr>
                       </m:fPr>
                       <m:num>
                         <m:sSup>
                           <m:sSupPr>
                             <m:ctrlPr>
-                              <a:rPr lang="en-IN" sz="1000" i="1"/>
+                              <a:rPr lang="en-IN" sz="1000" i="1">
+                                <a:latin typeface="Cambria Math" panose="02040503050406030204" pitchFamily="18" charset="0"/>
+                              </a:rPr>
                             </m:ctrlPr>
                           </m:sSupPr>
                           <m:e>
                             <m:r>
-                              <a:rPr lang="en-IN" sz="1000" i="1"/>
+                              <a:rPr lang="en-IN" sz="1000" i="1">
+                                <a:latin typeface="Cambria Math" panose="02040503050406030204" pitchFamily="18" charset="0"/>
+                              </a:rPr>
                               <m:t>𝜆</m:t>
                             </m:r>
                           </m:e>
                           <m:sup>
                             <m:r>
-                              <a:rPr lang="en-IN" sz="1000" i="1"/>
+                              <a:rPr lang="en-IN" sz="1000" i="1">
+                                <a:latin typeface="Cambria Math" panose="02040503050406030204" pitchFamily="18" charset="0"/>
+                              </a:rPr>
                               <m:t>𝑥</m:t>
                             </m:r>
                           </m:sup>
@@ -4731,7 +5128,9 @@
                         <m:func>
                           <m:funcPr>
                             <m:ctrlPr>
-                              <a:rPr lang="en-IN" sz="1000"/>
+                              <a:rPr lang="en-IN" sz="1000">
+                                <a:latin typeface="Cambria Math" panose="02040503050406030204" pitchFamily="18" charset="0"/>
+                              </a:rPr>
                             </m:ctrlPr>
                           </m:funcPr>
                           <m:fName>
@@ -4739,7 +5138,9 @@
                               <m:rPr>
                                 <m:sty m:val="p"/>
                               </m:rPr>
-                              <a:rPr lang="en-IN" sz="1000"/>
+                              <a:rPr lang="en-IN" sz="1000">
+                                <a:latin typeface="Cambria Math" panose="02040503050406030204" pitchFamily="18" charset="0"/>
+                              </a:rPr>
                               <m:t>exp</m:t>
                             </m:r>
                           </m:fName>
@@ -4747,16 +5148,22 @@
                             <m:d>
                               <m:dPr>
                                 <m:ctrlPr>
-                                  <a:rPr lang="en-IN" sz="1000" i="1"/>
+                                  <a:rPr lang="en-IN" sz="1000" i="1">
+                                    <a:latin typeface="Cambria Math" panose="02040503050406030204" pitchFamily="18" charset="0"/>
+                                  </a:rPr>
                                 </m:ctrlPr>
                               </m:dPr>
                               <m:e>
                                 <m:r>
-                                  <a:rPr lang="en-IN" sz="1000" i="1"/>
+                                  <a:rPr lang="en-IN" sz="1000" i="1">
+                                    <a:latin typeface="Cambria Math" panose="02040503050406030204" pitchFamily="18" charset="0"/>
+                                  </a:rPr>
                                   <m:t>−</m:t>
                                 </m:r>
                                 <m:r>
-                                  <a:rPr lang="en-IN" sz="1000" i="1"/>
+                                  <a:rPr lang="en-IN" sz="1000" i="1">
+                                    <a:latin typeface="Cambria Math" panose="02040503050406030204" pitchFamily="18" charset="0"/>
+                                  </a:rPr>
                                   <m:t>𝜆</m:t>
                                 </m:r>
                               </m:e>
@@ -4766,11 +5173,15 @@
                       </m:num>
                       <m:den>
                         <m:r>
-                          <a:rPr lang="en-IN" sz="1000" i="1"/>
+                          <a:rPr lang="en-IN" sz="1000" i="1">
+                            <a:latin typeface="Cambria Math" panose="02040503050406030204" pitchFamily="18" charset="0"/>
+                          </a:rPr>
                           <m:t>𝑥</m:t>
                         </m:r>
                         <m:r>
-                          <a:rPr lang="en-IN" sz="1000" i="1"/>
+                          <a:rPr lang="en-IN" sz="1000" i="1">
+                            <a:latin typeface="Cambria Math" panose="02040503050406030204" pitchFamily="18" charset="0"/>
+                          </a:rPr>
                           <m:t>!</m:t>
                         </m:r>
                       </m:den>
@@ -4786,28 +5197,38 @@
                 <a14:m>
                   <m:oMath xmlns:m="http://schemas.openxmlformats.org/officeDocument/2006/math">
                     <m:r>
-                      <a:rPr lang="en-IN" sz="1000"/>
+                      <a:rPr lang="en-IN" sz="1000">
+                        <a:latin typeface="Cambria Math" panose="02040503050406030204" pitchFamily="18" charset="0"/>
+                      </a:rPr>
                       <m:t>𝔼</m:t>
                     </m:r>
                     <m:d>
                       <m:dPr>
                         <m:ctrlPr>
-                          <a:rPr lang="en-IN" sz="1000" i="1"/>
+                          <a:rPr lang="en-IN" sz="1000" i="1">
+                            <a:latin typeface="Cambria Math" panose="02040503050406030204" pitchFamily="18" charset="0"/>
+                          </a:rPr>
                         </m:ctrlPr>
                       </m:dPr>
                       <m:e>
                         <m:r>
-                          <a:rPr lang="en-IN" sz="1000" i="1"/>
+                          <a:rPr lang="en-IN" sz="1000" i="1">
+                            <a:latin typeface="Cambria Math" panose="02040503050406030204" pitchFamily="18" charset="0"/>
+                          </a:rPr>
                           <m:t>𝑋</m:t>
                         </m:r>
                       </m:e>
                     </m:d>
                     <m:r>
-                      <a:rPr lang="en-IN" sz="1000" i="1"/>
+                      <a:rPr lang="en-IN" sz="1000" i="1">
+                        <a:latin typeface="Cambria Math" panose="02040503050406030204" pitchFamily="18" charset="0"/>
+                      </a:rPr>
                       <m:t>=</m:t>
                     </m:r>
                     <m:r>
-                      <a:rPr lang="en-IN" sz="1000" i="1"/>
+                      <a:rPr lang="en-IN" sz="1000" i="1">
+                        <a:latin typeface="Cambria Math" panose="02040503050406030204" pitchFamily="18" charset="0"/>
+                      </a:rPr>
                       <m:t>𝜆</m:t>
                     </m:r>
                   </m:oMath>
@@ -4828,22 +5249,30 @@
                     <m:d>
                       <m:dPr>
                         <m:ctrlPr>
-                          <a:rPr lang="en-IN" sz="1000" i="1"/>
+                          <a:rPr lang="en-IN" sz="1000" i="1">
+                            <a:latin typeface="Cambria Math" panose="02040503050406030204" pitchFamily="18" charset="0"/>
+                          </a:rPr>
                         </m:ctrlPr>
                       </m:dPr>
                       <m:e>
                         <m:r>
-                          <a:rPr lang="en-IN" sz="1000" i="1"/>
+                          <a:rPr lang="en-IN" sz="1000" i="1">
+                            <a:latin typeface="Cambria Math" panose="02040503050406030204" pitchFamily="18" charset="0"/>
+                          </a:rPr>
                           <m:t>𝑋</m:t>
                         </m:r>
                       </m:e>
                     </m:d>
                     <m:r>
-                      <a:rPr lang="en-IN" sz="1000" i="1"/>
+                      <a:rPr lang="en-IN" sz="1000" i="1">
+                        <a:latin typeface="Cambria Math" panose="02040503050406030204" pitchFamily="18" charset="0"/>
+                      </a:rPr>
                       <m:t>=</m:t>
                     </m:r>
                     <m:r>
-                      <a:rPr lang="en-IN" sz="1000" i="1"/>
+                      <a:rPr lang="en-IN" sz="1000" i="1">
+                        <a:latin typeface="Cambria Math" panose="02040503050406030204" pitchFamily="18" charset="0"/>
+                      </a:rPr>
                       <m:t>𝜆</m:t>
                     </m:r>
                   </m:oMath>
@@ -4869,7 +5298,9 @@
                     <m:func>
                       <m:funcPr>
                         <m:ctrlPr>
-                          <a:rPr lang="en-IN" sz="1000"/>
+                          <a:rPr lang="en-IN" sz="1000">
+                            <a:latin typeface="Cambria Math" panose="02040503050406030204" pitchFamily="18" charset="0"/>
+                          </a:rPr>
                         </m:ctrlPr>
                       </m:funcPr>
                       <m:fName>
@@ -4877,7 +5308,9 @@
                           <m:rPr>
                             <m:sty m:val="p"/>
                           </m:rPr>
-                          <a:rPr lang="en-IN" sz="1000"/>
+                          <a:rPr lang="en-IN" sz="1000">
+                            <a:latin typeface="Cambria Math" panose="02040503050406030204" pitchFamily="18" charset="0"/>
+                          </a:rPr>
                           <m:t>Cov</m:t>
                         </m:r>
                       </m:fName>
@@ -4885,20 +5318,28 @@
                         <m:d>
                           <m:dPr>
                             <m:ctrlPr>
-                              <a:rPr lang="en-IN" sz="1000" i="1"/>
+                              <a:rPr lang="en-IN" sz="1000" i="1">
+                                <a:latin typeface="Cambria Math" panose="02040503050406030204" pitchFamily="18" charset="0"/>
+                              </a:rPr>
                             </m:ctrlPr>
                           </m:dPr>
                           <m:e>
                             <m:r>
-                              <a:rPr lang="en-IN" sz="1000" i="1"/>
+                              <a:rPr lang="en-IN" sz="1000" i="1">
+                                <a:latin typeface="Cambria Math" panose="02040503050406030204" pitchFamily="18" charset="0"/>
+                              </a:rPr>
                               <m:t>𝑋</m:t>
                             </m:r>
                             <m:r>
-                              <a:rPr lang="en-IN" sz="1000" i="1"/>
+                              <a:rPr lang="en-IN" sz="1000" i="1">
+                                <a:latin typeface="Cambria Math" panose="02040503050406030204" pitchFamily="18" charset="0"/>
+                              </a:rPr>
                               <m:t>,</m:t>
                             </m:r>
                             <m:r>
-                              <a:rPr lang="en-IN" sz="1000" i="1"/>
+                              <a:rPr lang="en-IN" sz="1000" i="1">
+                                <a:latin typeface="Cambria Math" panose="02040503050406030204" pitchFamily="18" charset="0"/>
+                              </a:rPr>
                               <m:t>𝑌</m:t>
                             </m:r>
                           </m:e>
@@ -4906,28 +5347,38 @@
                       </m:e>
                     </m:func>
                     <m:r>
-                      <a:rPr lang="en-IN" sz="1000" i="1"/>
+                      <a:rPr lang="en-IN" sz="1000" i="1">
+                        <a:latin typeface="Cambria Math" panose="02040503050406030204" pitchFamily="18" charset="0"/>
+                      </a:rPr>
                       <m:t>=</m:t>
                     </m:r>
                     <m:r>
-                      <a:rPr lang="en-IN" sz="1000"/>
+                      <a:rPr lang="en-IN" sz="1000">
+                        <a:latin typeface="Cambria Math" panose="02040503050406030204" pitchFamily="18" charset="0"/>
+                      </a:rPr>
                       <m:t>𝔼</m:t>
                     </m:r>
                     <m:d>
                       <m:dPr>
                         <m:ctrlPr>
-                          <a:rPr lang="en-IN" sz="1000" i="1"/>
+                          <a:rPr lang="en-IN" sz="1000" i="1">
+                            <a:latin typeface="Cambria Math" panose="02040503050406030204" pitchFamily="18" charset="0"/>
+                          </a:rPr>
                         </m:ctrlPr>
                       </m:dPr>
                       <m:e>
                         <m:r>
-                          <a:rPr lang="en-IN" sz="1000" i="1"/>
+                          <a:rPr lang="en-IN" sz="1000" i="1">
+                            <a:latin typeface="Cambria Math" panose="02040503050406030204" pitchFamily="18" charset="0"/>
+                          </a:rPr>
                           <m:t>𝑋𝑌</m:t>
                         </m:r>
                       </m:e>
                     </m:d>
                     <m:r>
-                      <a:rPr lang="en-IN" sz="1000" i="1"/>
+                      <a:rPr lang="en-IN" sz="1000" i="1">
+                        <a:latin typeface="Cambria Math" panose="02040503050406030204" pitchFamily="18" charset="0"/>
+                      </a:rPr>
                       <m:t>−</m:t>
                     </m:r>
                     <m:d>
@@ -4935,40 +5386,54 @@
                         <m:begChr m:val="["/>
                         <m:endChr m:val="]"/>
                         <m:ctrlPr>
-                          <a:rPr lang="en-IN" sz="1000"/>
+                          <a:rPr lang="en-IN" sz="1000">
+                            <a:latin typeface="Cambria Math" panose="02040503050406030204" pitchFamily="18" charset="0"/>
+                          </a:rPr>
                         </m:ctrlPr>
                       </m:dPr>
                       <m:e>
                         <m:r>
-                          <a:rPr lang="en-IN" sz="1000"/>
+                          <a:rPr lang="en-IN" sz="1000">
+                            <a:latin typeface="Cambria Math" panose="02040503050406030204" pitchFamily="18" charset="0"/>
+                          </a:rPr>
                           <m:t>𝔼</m:t>
                         </m:r>
                         <m:d>
                           <m:dPr>
                             <m:ctrlPr>
-                              <a:rPr lang="en-IN" sz="1000" i="1"/>
+                              <a:rPr lang="en-IN" sz="1000" i="1">
+                                <a:latin typeface="Cambria Math" panose="02040503050406030204" pitchFamily="18" charset="0"/>
+                              </a:rPr>
                             </m:ctrlPr>
                           </m:dPr>
                           <m:e>
                             <m:r>
-                              <a:rPr lang="en-IN" sz="1000" i="1"/>
+                              <a:rPr lang="en-IN" sz="1000" i="1">
+                                <a:latin typeface="Cambria Math" panose="02040503050406030204" pitchFamily="18" charset="0"/>
+                              </a:rPr>
                               <m:t>𝑋</m:t>
                             </m:r>
                           </m:e>
                         </m:d>
                         <m:r>
-                          <a:rPr lang="en-IN" sz="1000"/>
+                          <a:rPr lang="en-IN" sz="1000">
+                            <a:latin typeface="Cambria Math" panose="02040503050406030204" pitchFamily="18" charset="0"/>
+                          </a:rPr>
                           <m:t>𝔼</m:t>
                         </m:r>
                         <m:d>
                           <m:dPr>
                             <m:ctrlPr>
-                              <a:rPr lang="en-IN" sz="1000" i="1"/>
+                              <a:rPr lang="en-IN" sz="1000" i="1">
+                                <a:latin typeface="Cambria Math" panose="02040503050406030204" pitchFamily="18" charset="0"/>
+                              </a:rPr>
                             </m:ctrlPr>
                           </m:dPr>
                           <m:e>
                             <m:r>
-                              <a:rPr lang="en-IN" sz="1000" i="1"/>
+                              <a:rPr lang="en-IN" sz="1000" i="1">
+                                <a:latin typeface="Cambria Math" panose="02040503050406030204" pitchFamily="18" charset="0"/>
+                              </a:rPr>
                               <m:t>𝑌</m:t>
                             </m:r>
                           </m:e>
@@ -4984,24 +5449,32 @@
                 <a14:m>
                   <m:oMath xmlns:m="http://schemas.openxmlformats.org/officeDocument/2006/math">
                     <m:r>
-                      <a:rPr lang="en-IN" sz="1000"/>
+                      <a:rPr lang="en-IN" sz="1000">
+                        <a:latin typeface="Cambria Math" panose="02040503050406030204" pitchFamily="18" charset="0"/>
+                      </a:rPr>
                       <m:t>𝔼</m:t>
                     </m:r>
                     <m:d>
                       <m:dPr>
                         <m:ctrlPr>
-                          <a:rPr lang="en-IN" sz="1000" i="1"/>
+                          <a:rPr lang="en-IN" sz="1000" i="1">
+                            <a:latin typeface="Cambria Math" panose="02040503050406030204" pitchFamily="18" charset="0"/>
+                          </a:rPr>
                         </m:ctrlPr>
                       </m:dPr>
                       <m:e>
                         <m:r>
-                          <a:rPr lang="en-IN" sz="1000" i="1"/>
+                          <a:rPr lang="en-IN" sz="1000" i="1">
+                            <a:latin typeface="Cambria Math" panose="02040503050406030204" pitchFamily="18" charset="0"/>
+                          </a:rPr>
                           <m:t>𝑋𝑌</m:t>
                         </m:r>
                       </m:e>
                     </m:d>
                     <m:r>
-                      <a:rPr lang="en-IN" sz="1000" i="1"/>
+                      <a:rPr lang="en-IN" sz="1000" i="1">
+                        <a:latin typeface="Cambria Math" panose="02040503050406030204" pitchFamily="18" charset="0"/>
+                      </a:rPr>
                       <m:t>=</m:t>
                     </m:r>
                     <m:nary>
@@ -5011,52 +5484,74 @@
                         <m:subHide m:val="on"/>
                         <m:supHide m:val="on"/>
                         <m:ctrlPr>
-                          <a:rPr lang="en-IN" sz="1000" i="1"/>
+                          <a:rPr lang="en-IN" sz="1000" i="1">
+                            <a:latin typeface="Cambria Math" panose="02040503050406030204" pitchFamily="18" charset="0"/>
+                          </a:rPr>
                         </m:ctrlPr>
                       </m:naryPr>
                       <m:sub/>
                       <m:sup/>
                       <m:e>
                         <m:r>
-                          <a:rPr lang="en-IN" sz="1000" i="1"/>
+                          <a:rPr lang="en-IN" sz="1000" i="1">
+                            <a:latin typeface="Cambria Math" panose="02040503050406030204" pitchFamily="18" charset="0"/>
+                          </a:rPr>
                           <m:t>𝑥</m:t>
                         </m:r>
                       </m:e>
                     </m:nary>
                     <m:r>
-                      <a:rPr lang="en-IN" sz="1000" i="1"/>
+                      <a:rPr lang="en-IN" sz="1000" i="1">
+                        <a:latin typeface="Cambria Math" panose="02040503050406030204" pitchFamily="18" charset="0"/>
+                      </a:rPr>
                       <m:t>⋅</m:t>
                     </m:r>
                     <m:r>
-                      <a:rPr lang="en-IN" sz="1000" i="1"/>
+                      <a:rPr lang="en-IN" sz="1000" i="1">
+                        <a:latin typeface="Cambria Math" panose="02040503050406030204" pitchFamily="18" charset="0"/>
+                      </a:rPr>
                       <m:t>𝑦</m:t>
                     </m:r>
                     <m:r>
-                      <a:rPr lang="en-IN" sz="1000" i="1"/>
+                      <a:rPr lang="en-IN" sz="1000" i="1">
+                        <a:latin typeface="Cambria Math" panose="02040503050406030204" pitchFamily="18" charset="0"/>
+                      </a:rPr>
                       <m:t>⋅</m:t>
                     </m:r>
                     <m:r>
-                      <a:rPr lang="en-IN" sz="1000" i="1"/>
+                      <a:rPr lang="en-IN" sz="1000" i="1">
+                        <a:latin typeface="Cambria Math" panose="02040503050406030204" pitchFamily="18" charset="0"/>
+                      </a:rPr>
                       <m:t>𝑃</m:t>
                     </m:r>
                     <m:r>
-                      <a:rPr lang="en-IN" sz="1000" i="1"/>
+                      <a:rPr lang="en-IN" sz="1000" i="1">
+                        <a:latin typeface="Cambria Math" panose="02040503050406030204" pitchFamily="18" charset="0"/>
+                      </a:rPr>
                       <m:t>(</m:t>
                     </m:r>
                     <m:r>
-                      <a:rPr lang="en-IN" sz="1000" i="1"/>
+                      <a:rPr lang="en-IN" sz="1000" i="1">
+                        <a:latin typeface="Cambria Math" panose="02040503050406030204" pitchFamily="18" charset="0"/>
+                      </a:rPr>
                       <m:t>𝑋</m:t>
                     </m:r>
                     <m:r>
-                      <a:rPr lang="en-IN" sz="1000" i="1"/>
+                      <a:rPr lang="en-IN" sz="1000" i="1">
+                        <a:latin typeface="Cambria Math" panose="02040503050406030204" pitchFamily="18" charset="0"/>
+                      </a:rPr>
                       <m:t>∩</m:t>
                     </m:r>
                     <m:r>
-                      <a:rPr lang="en-IN" sz="1000" i="1"/>
+                      <a:rPr lang="en-IN" sz="1000" i="1">
+                        <a:latin typeface="Cambria Math" panose="02040503050406030204" pitchFamily="18" charset="0"/>
+                      </a:rPr>
                       <m:t>𝑌</m:t>
                     </m:r>
                     <m:r>
-                      <a:rPr lang="en-IN" sz="1000" i="1"/>
+                      <a:rPr lang="en-IN" sz="1000" i="1">
+                        <a:latin typeface="Cambria Math" panose="02040503050406030204" pitchFamily="18" charset="0"/>
+                      </a:rPr>
                       <m:t>)</m:t>
                     </m:r>
                   </m:oMath>
@@ -5137,18 +5632,24 @@
                     <m:sSub>
                       <m:sSubPr>
                         <m:ctrlPr>
-                          <a:rPr lang="en-IN" sz="1000"/>
+                          <a:rPr lang="en-IN" sz="1000">
+                            <a:latin typeface="Cambria Math" panose="02040503050406030204" pitchFamily="18" charset="0"/>
+                          </a:rPr>
                         </m:ctrlPr>
                       </m:sSubPr>
                       <m:e>
                         <m:r>
-                          <a:rPr lang="en-IN" sz="1000"/>
+                          <a:rPr lang="en-IN" sz="1000">
+                            <a:latin typeface="Cambria Math" panose="02040503050406030204" pitchFamily="18" charset="0"/>
+                          </a:rPr>
                           <m:t>𝔼</m:t>
                         </m:r>
                       </m:e>
                       <m:sub>
                         <m:r>
-                          <a:rPr lang="en-IN" sz="1000" i="1"/>
+                          <a:rPr lang="en-IN" sz="1000" i="1">
+                            <a:latin typeface="Cambria Math" panose="02040503050406030204" pitchFamily="18" charset="0"/>
+                          </a:rPr>
                           <m:t>𝑌</m:t>
                         </m:r>
                       </m:sub>
@@ -5156,18 +5657,24 @@
                     <m:d>
                       <m:dPr>
                         <m:ctrlPr>
-                          <a:rPr lang="en-IN" sz="1000" i="1"/>
+                          <a:rPr lang="en-IN" sz="1000" i="1">
+                            <a:latin typeface="Cambria Math" panose="02040503050406030204" pitchFamily="18" charset="0"/>
+                          </a:rPr>
                         </m:ctrlPr>
                       </m:dPr>
                       <m:e>
                         <m:r>
-                          <a:rPr lang="en-IN" sz="1000" i="1"/>
+                          <a:rPr lang="en-IN" sz="1000" i="1">
+                            <a:latin typeface="Cambria Math" panose="02040503050406030204" pitchFamily="18" charset="0"/>
+                          </a:rPr>
                           <m:t>𝑌</m:t>
                         </m:r>
                       </m:e>
                     </m:d>
                     <m:r>
-                      <a:rPr lang="en-IN" sz="1000" i="1"/>
+                      <a:rPr lang="en-IN" sz="1000" i="1">
+                        <a:latin typeface="Cambria Math" panose="02040503050406030204" pitchFamily="18" charset="0"/>
+                      </a:rPr>
                       <m:t>=</m:t>
                     </m:r>
                     <m:nary>
@@ -5176,12 +5683,16 @@
                         <m:limLoc m:val="undOvr"/>
                         <m:supHide m:val="on"/>
                         <m:ctrlPr>
-                          <a:rPr lang="en-IN" sz="1000" i="1"/>
+                          <a:rPr lang="en-IN" sz="1000" i="1">
+                            <a:latin typeface="Cambria Math" panose="02040503050406030204" pitchFamily="18" charset="0"/>
+                          </a:rPr>
                         </m:ctrlPr>
                       </m:naryPr>
                       <m:sub>
                         <m:r>
-                          <a:rPr lang="en-IN" sz="1000" i="1"/>
+                          <a:rPr lang="en-IN" sz="1000" i="1">
+                            <a:latin typeface="Cambria Math" panose="02040503050406030204" pitchFamily="18" charset="0"/>
+                          </a:rPr>
                           <m:t>𝑥</m:t>
                         </m:r>
                       </m:sub>
@@ -5190,18 +5701,24 @@
                         <m:sSub>
                           <m:sSubPr>
                             <m:ctrlPr>
-                              <a:rPr lang="en-IN" sz="1000"/>
+                              <a:rPr lang="en-IN" sz="1000">
+                                <a:latin typeface="Cambria Math" panose="02040503050406030204" pitchFamily="18" charset="0"/>
+                              </a:rPr>
                             </m:ctrlPr>
                           </m:sSubPr>
                           <m:e>
                             <m:r>
-                              <a:rPr lang="en-IN" sz="1000"/>
+                              <a:rPr lang="en-IN" sz="1000">
+                                <a:latin typeface="Cambria Math" panose="02040503050406030204" pitchFamily="18" charset="0"/>
+                              </a:rPr>
                               <m:t>𝔼</m:t>
                             </m:r>
                           </m:e>
                           <m:sub>
                             <m:r>
-                              <a:rPr lang="en-IN" sz="1000" i="1"/>
+                              <a:rPr lang="en-IN" sz="1000" i="1">
+                                <a:latin typeface="Cambria Math" panose="02040503050406030204" pitchFamily="18" charset="0"/>
+                              </a:rPr>
                               <m:t>𝑌</m:t>
                             </m:r>
                           </m:sub>
@@ -5211,57 +5728,81 @@
                     <m:d>
                       <m:dPr>
                         <m:ctrlPr>
-                          <a:rPr lang="en-IN" sz="1000" i="1"/>
+                          <a:rPr lang="en-IN" sz="1000" i="1">
+                            <a:latin typeface="Cambria Math" panose="02040503050406030204" pitchFamily="18" charset="0"/>
+                          </a:rPr>
                         </m:ctrlPr>
                       </m:dPr>
                       <m:e>
                         <m:r>
-                          <a:rPr lang="en-IN" sz="1000" i="1"/>
+                          <a:rPr lang="en-IN" sz="1000" i="1">
+                            <a:latin typeface="Cambria Math" panose="02040503050406030204" pitchFamily="18" charset="0"/>
+                          </a:rPr>
                           <m:t>𝑌</m:t>
                         </m:r>
                         <m:r>
-                          <a:rPr lang="en-IN" sz="1000" i="1"/>
+                          <a:rPr lang="en-IN" sz="1000" i="1">
+                            <a:latin typeface="Cambria Math" panose="02040503050406030204" pitchFamily="18" charset="0"/>
+                          </a:rPr>
                           <m:t>∣</m:t>
                         </m:r>
                         <m:r>
-                          <a:rPr lang="en-IN" sz="1000" i="1"/>
+                          <a:rPr lang="en-IN" sz="1000" i="1">
+                            <a:latin typeface="Cambria Math" panose="02040503050406030204" pitchFamily="18" charset="0"/>
+                          </a:rPr>
                           <m:t>𝑋</m:t>
                         </m:r>
                         <m:r>
-                          <a:rPr lang="en-IN" sz="1000" i="1"/>
+                          <a:rPr lang="en-IN" sz="1000" i="1">
+                            <a:latin typeface="Cambria Math" panose="02040503050406030204" pitchFamily="18" charset="0"/>
+                          </a:rPr>
                           <m:t>=</m:t>
                         </m:r>
                         <m:r>
-                          <a:rPr lang="en-IN" sz="1000" i="1"/>
+                          <a:rPr lang="en-IN" sz="1000" i="1">
+                            <a:latin typeface="Cambria Math" panose="02040503050406030204" pitchFamily="18" charset="0"/>
+                          </a:rPr>
                           <m:t>𝑥</m:t>
                         </m:r>
                       </m:e>
                     </m:d>
                     <m:r>
-                      <a:rPr lang="en-IN" sz="1000" i="1"/>
+                      <a:rPr lang="en-IN" sz="1000" i="1">
+                        <a:latin typeface="Cambria Math" panose="02040503050406030204" pitchFamily="18" charset="0"/>
+                      </a:rPr>
                       <m:t>⋅</m:t>
                     </m:r>
                     <m:r>
-                      <a:rPr lang="en-IN" sz="1000" i="1"/>
+                      <a:rPr lang="en-IN" sz="1000" i="1">
+                        <a:latin typeface="Cambria Math" panose="02040503050406030204" pitchFamily="18" charset="0"/>
+                      </a:rPr>
                       <m:t>𝑃</m:t>
                     </m:r>
                     <m:d>
                       <m:dPr>
                         <m:ctrlPr>
-                          <a:rPr lang="en-IN" sz="1000" i="1"/>
+                          <a:rPr lang="en-IN" sz="1000" i="1">
+                            <a:latin typeface="Cambria Math" panose="02040503050406030204" pitchFamily="18" charset="0"/>
+                          </a:rPr>
                         </m:ctrlPr>
                       </m:dPr>
                       <m:e>
                         <m:r>
-                          <a:rPr lang="en-IN" sz="1000" i="1"/>
+                          <a:rPr lang="en-IN" sz="1000" i="1">
+                            <a:latin typeface="Cambria Math" panose="02040503050406030204" pitchFamily="18" charset="0"/>
+                          </a:rPr>
                           <m:t>𝑋</m:t>
                         </m:r>
                         <m:r>
-                          <a:rPr lang="en-IN" sz="1000" i="1"/>
+                          <a:rPr lang="en-IN" sz="1000" i="1">
+                            <a:latin typeface="Cambria Math" panose="02040503050406030204" pitchFamily="18" charset="0"/>
+                          </a:rPr>
                           <m:t>=</m:t>
                         </m:r>
                         <m:r>
-                          <a:rPr lang="en-IN" sz="1000" i="1"/>
+                          <a:rPr lang="en-IN" sz="1000" i="1">
+                            <a:latin typeface="Cambria Math" panose="02040503050406030204" pitchFamily="18" charset="0"/>
+                          </a:rPr>
                           <m:t>𝑥</m:t>
                         </m:r>
                       </m:e>
@@ -5277,18 +5818,24 @@
                     <m:sSub>
                       <m:sSubPr>
                         <m:ctrlPr>
-                          <a:rPr lang="en-IN" sz="1000"/>
+                          <a:rPr lang="en-IN" sz="1000">
+                            <a:latin typeface="Cambria Math" panose="02040503050406030204" pitchFamily="18" charset="0"/>
+                          </a:rPr>
                         </m:ctrlPr>
                       </m:sSubPr>
                       <m:e>
                         <m:r>
-                          <a:rPr lang="en-IN" sz="1000"/>
+                          <a:rPr lang="en-IN" sz="1000">
+                            <a:latin typeface="Cambria Math" panose="02040503050406030204" pitchFamily="18" charset="0"/>
+                          </a:rPr>
                           <m:t>𝔼</m:t>
                         </m:r>
                       </m:e>
                       <m:sub>
                         <m:r>
-                          <a:rPr lang="en-IN" sz="1000" i="1"/>
+                          <a:rPr lang="en-IN" sz="1000" i="1">
+                            <a:latin typeface="Cambria Math" panose="02040503050406030204" pitchFamily="18" charset="0"/>
+                          </a:rPr>
                           <m:t>𝑌</m:t>
                         </m:r>
                       </m:sub>
@@ -5296,34 +5843,48 @@
                     <m:d>
                       <m:dPr>
                         <m:ctrlPr>
-                          <a:rPr lang="en-IN" sz="1000" i="1"/>
+                          <a:rPr lang="en-IN" sz="1000" i="1">
+                            <a:latin typeface="Cambria Math" panose="02040503050406030204" pitchFamily="18" charset="0"/>
+                          </a:rPr>
                         </m:ctrlPr>
                       </m:dPr>
                       <m:e>
                         <m:r>
-                          <a:rPr lang="en-IN" sz="1000" i="1"/>
+                          <a:rPr lang="en-IN" sz="1000" i="1">
+                            <a:latin typeface="Cambria Math" panose="02040503050406030204" pitchFamily="18" charset="0"/>
+                          </a:rPr>
                           <m:t>𝑌</m:t>
                         </m:r>
                         <m:r>
-                          <a:rPr lang="en-IN" sz="1000" i="1"/>
+                          <a:rPr lang="en-IN" sz="1000" i="1">
+                            <a:latin typeface="Cambria Math" panose="02040503050406030204" pitchFamily="18" charset="0"/>
+                          </a:rPr>
                           <m:t>∣</m:t>
                         </m:r>
                         <m:r>
-                          <a:rPr lang="en-IN" sz="1000" i="1"/>
+                          <a:rPr lang="en-IN" sz="1000" i="1">
+                            <a:latin typeface="Cambria Math" panose="02040503050406030204" pitchFamily="18" charset="0"/>
+                          </a:rPr>
                           <m:t>𝑋</m:t>
                         </m:r>
                         <m:r>
-                          <a:rPr lang="en-IN" sz="1000" i="1"/>
+                          <a:rPr lang="en-IN" sz="1000" i="1">
+                            <a:latin typeface="Cambria Math" panose="02040503050406030204" pitchFamily="18" charset="0"/>
+                          </a:rPr>
                           <m:t>=</m:t>
                         </m:r>
                         <m:r>
-                          <a:rPr lang="en-IN" sz="1000" i="1"/>
+                          <a:rPr lang="en-IN" sz="1000" i="1">
+                            <a:latin typeface="Cambria Math" panose="02040503050406030204" pitchFamily="18" charset="0"/>
+                          </a:rPr>
                           <m:t>𝑥</m:t>
                         </m:r>
                       </m:e>
                     </m:d>
                     <m:r>
-                      <a:rPr lang="en-IN" sz="1000" i="1"/>
+                      <a:rPr lang="en-IN" sz="1000" i="1">
+                        <a:latin typeface="Cambria Math" panose="02040503050406030204" pitchFamily="18" charset="0"/>
+                      </a:rPr>
                       <m:t>=</m:t>
                     </m:r>
                     <m:nary>
@@ -5332,57 +5893,81 @@
                         <m:limLoc m:val="undOvr"/>
                         <m:supHide m:val="on"/>
                         <m:ctrlPr>
-                          <a:rPr lang="en-IN" sz="1000" i="1"/>
+                          <a:rPr lang="en-IN" sz="1000" i="1">
+                            <a:latin typeface="Cambria Math" panose="02040503050406030204" pitchFamily="18" charset="0"/>
+                          </a:rPr>
                         </m:ctrlPr>
                       </m:naryPr>
                       <m:sub>
                         <m:r>
-                          <a:rPr lang="en-IN" sz="1000" i="1"/>
+                          <a:rPr lang="en-IN" sz="1000" i="1">
+                            <a:latin typeface="Cambria Math" panose="02040503050406030204" pitchFamily="18" charset="0"/>
+                          </a:rPr>
                           <m:t>𝑦</m:t>
                         </m:r>
                       </m:sub>
                       <m:sup/>
                       <m:e>
                         <m:r>
-                          <a:rPr lang="en-IN" sz="1000" i="1"/>
+                          <a:rPr lang="en-IN" sz="1000" i="1">
+                            <a:latin typeface="Cambria Math" panose="02040503050406030204" pitchFamily="18" charset="0"/>
+                          </a:rPr>
                           <m:t>𝑦</m:t>
                         </m:r>
                       </m:e>
                     </m:nary>
                     <m:r>
-                      <a:rPr lang="en-IN" sz="1000" i="1"/>
+                      <a:rPr lang="en-IN" sz="1000" i="1">
+                        <a:latin typeface="Cambria Math" panose="02040503050406030204" pitchFamily="18" charset="0"/>
+                      </a:rPr>
                       <m:t>⋅</m:t>
                     </m:r>
                     <m:r>
-                      <a:rPr lang="en-IN" sz="1000" i="1"/>
+                      <a:rPr lang="en-IN" sz="1000" i="1">
+                        <a:latin typeface="Cambria Math" panose="02040503050406030204" pitchFamily="18" charset="0"/>
+                      </a:rPr>
                       <m:t>𝑃</m:t>
                     </m:r>
                     <m:r>
-                      <a:rPr lang="en-IN" sz="1000" i="1"/>
+                      <a:rPr lang="en-IN" sz="1000" i="1">
+                        <a:latin typeface="Cambria Math" panose="02040503050406030204" pitchFamily="18" charset="0"/>
+                      </a:rPr>
                       <m:t>(</m:t>
                     </m:r>
                     <m:r>
-                      <a:rPr lang="en-IN" sz="1000" i="1"/>
+                      <a:rPr lang="en-IN" sz="1000" i="1">
+                        <a:latin typeface="Cambria Math" panose="02040503050406030204" pitchFamily="18" charset="0"/>
+                      </a:rPr>
                       <m:t>𝑌</m:t>
                     </m:r>
                     <m:r>
-                      <a:rPr lang="en-IN" sz="1000" i="1"/>
+                      <a:rPr lang="en-IN" sz="1000" i="1">
+                        <a:latin typeface="Cambria Math" panose="02040503050406030204" pitchFamily="18" charset="0"/>
+                      </a:rPr>
                       <m:t>∣</m:t>
                     </m:r>
                     <m:r>
-                      <a:rPr lang="en-IN" sz="1000" i="1"/>
+                      <a:rPr lang="en-IN" sz="1000" i="1">
+                        <a:latin typeface="Cambria Math" panose="02040503050406030204" pitchFamily="18" charset="0"/>
+                      </a:rPr>
                       <m:t>𝑋</m:t>
                     </m:r>
                     <m:r>
-                      <a:rPr lang="en-IN" sz="1000" i="1"/>
+                      <a:rPr lang="en-IN" sz="1000" i="1">
+                        <a:latin typeface="Cambria Math" panose="02040503050406030204" pitchFamily="18" charset="0"/>
+                      </a:rPr>
                       <m:t>=</m:t>
                     </m:r>
                     <m:r>
-                      <a:rPr lang="en-IN" sz="1000" i="1"/>
+                      <a:rPr lang="en-IN" sz="1000" i="1">
+                        <a:latin typeface="Cambria Math" panose="02040503050406030204" pitchFamily="18" charset="0"/>
+                      </a:rPr>
                       <m:t>𝑥</m:t>
                     </m:r>
                     <m:r>
-                      <a:rPr lang="en-IN" sz="1000" i="1"/>
+                      <a:rPr lang="en-IN" sz="1000" i="1">
+                        <a:latin typeface="Cambria Math" panose="02040503050406030204" pitchFamily="18" charset="0"/>
+                      </a:rPr>
                       <m:t>)</m:t>
                     </m:r>
                   </m:oMath>
@@ -5415,22 +6000,30 @@
                     <m:d>
                       <m:dPr>
                         <m:ctrlPr>
-                          <a:rPr lang="en-IN" sz="1000" i="1"/>
+                          <a:rPr lang="en-IN" sz="1000" i="1">
+                            <a:latin typeface="Cambria Math" panose="02040503050406030204" pitchFamily="18" charset="0"/>
+                          </a:rPr>
                         </m:ctrlPr>
                       </m:dPr>
                       <m:e>
                         <m:r>
-                          <a:rPr lang="en-IN" sz="1000" i="1"/>
+                          <a:rPr lang="en-IN" sz="1000" i="1">
+                            <a:latin typeface="Cambria Math" panose="02040503050406030204" pitchFamily="18" charset="0"/>
+                          </a:rPr>
                           <m:t>𝑋</m:t>
                         </m:r>
                       </m:e>
                     </m:d>
                     <m:r>
-                      <a:rPr lang="en-IN" sz="1000" i="1"/>
+                      <a:rPr lang="en-IN" sz="1000" i="1">
+                        <a:latin typeface="Cambria Math" panose="02040503050406030204" pitchFamily="18" charset="0"/>
+                      </a:rPr>
                       <m:t>=</m:t>
                     </m:r>
                     <m:r>
-                      <a:rPr lang="en-IN" sz="1000"/>
+                      <a:rPr lang="en-IN" sz="1000">
+                        <a:latin typeface="Cambria Math" panose="02040503050406030204" pitchFamily="18" charset="0"/>
+                      </a:rPr>
                       <m:t>𝔼</m:t>
                     </m:r>
                     <m:d>
@@ -5438,10 +6031,618 @@
                         <m:begChr m:val="["/>
                         <m:endChr m:val="]"/>
                         <m:ctrlPr>
-                          <a:rPr lang="en-IN" sz="1000" i="1"/>
+                          <a:rPr lang="en-IN" sz="1000" i="1">
+                            <a:latin typeface="Cambria Math" panose="02040503050406030204" pitchFamily="18" charset="0"/>
+                          </a:rPr>
                         </m:ctrlPr>
                       </m:dPr>
                       <m:e>
+                        <m:sSup>
+                          <m:sSupPr>
+                            <m:ctrlPr>
+                              <a:rPr lang="en-IN" sz="1000" i="1">
+                                <a:latin typeface="Cambria Math" panose="02040503050406030204" pitchFamily="18" charset="0"/>
+                              </a:rPr>
+                            </m:ctrlPr>
+                          </m:sSupPr>
+                          <m:e>
+                            <m:d>
+                              <m:dPr>
+                                <m:ctrlPr>
+                                  <a:rPr lang="en-IN" sz="1000" i="1">
+                                    <a:latin typeface="Cambria Math" panose="02040503050406030204" pitchFamily="18" charset="0"/>
+                                  </a:rPr>
+                                </m:ctrlPr>
+                              </m:dPr>
+                              <m:e>
+                                <m:f>
+                                  <m:fPr>
+                                    <m:ctrlPr>
+                                      <a:rPr lang="en-IN" sz="1000" i="1">
+                                        <a:latin typeface="Cambria Math" panose="02040503050406030204" pitchFamily="18" charset="0"/>
+                                      </a:rPr>
+                                    </m:ctrlPr>
+                                  </m:fPr>
+                                  <m:num>
+                                    <m:r>
+                                      <a:rPr lang="en-IN" sz="1000" i="1">
+                                        <a:latin typeface="Cambria Math" panose="02040503050406030204" pitchFamily="18" charset="0"/>
+                                      </a:rPr>
+                                      <m:t>𝑋</m:t>
+                                    </m:r>
+                                    <m:r>
+                                      <a:rPr lang="en-IN" sz="1000" i="1">
+                                        <a:latin typeface="Cambria Math" panose="02040503050406030204" pitchFamily="18" charset="0"/>
+                                      </a:rPr>
+                                      <m:t>−</m:t>
+                                    </m:r>
+                                    <m:sSub>
+                                      <m:sSubPr>
+                                        <m:ctrlPr>
+                                          <a:rPr lang="en-IN" sz="1000" i="1">
+                                            <a:latin typeface="Cambria Math" panose="02040503050406030204" pitchFamily="18" charset="0"/>
+                                          </a:rPr>
+                                        </m:ctrlPr>
+                                      </m:sSubPr>
+                                      <m:e>
+                                        <m:r>
+                                          <a:rPr lang="en-IN" sz="1000" i="1">
+                                            <a:latin typeface="Cambria Math" panose="02040503050406030204" pitchFamily="18" charset="0"/>
+                                          </a:rPr>
+                                          <m:t>𝜇</m:t>
+                                        </m:r>
+                                      </m:e>
+                                      <m:sub>
+                                        <m:r>
+                                          <a:rPr lang="en-IN" sz="1000" i="1">
+                                            <a:latin typeface="Cambria Math" panose="02040503050406030204" pitchFamily="18" charset="0"/>
+                                          </a:rPr>
+                                          <m:t>𝑋</m:t>
+                                        </m:r>
+                                      </m:sub>
+                                    </m:sSub>
+                                  </m:num>
+                                  <m:den>
+                                    <m:sSub>
+                                      <m:sSubPr>
+                                        <m:ctrlPr>
+                                          <a:rPr lang="en-IN" sz="1000" i="1">
+                                            <a:latin typeface="Cambria Math" panose="02040503050406030204" pitchFamily="18" charset="0"/>
+                                          </a:rPr>
+                                        </m:ctrlPr>
+                                      </m:sSubPr>
+                                      <m:e>
+                                        <m:r>
+                                          <a:rPr lang="en-IN" sz="1000" i="1">
+                                            <a:latin typeface="Cambria Math" panose="02040503050406030204" pitchFamily="18" charset="0"/>
+                                          </a:rPr>
+                                          <m:t>𝜎</m:t>
+                                        </m:r>
+                                      </m:e>
+                                      <m:sub>
+                                        <m:r>
+                                          <a:rPr lang="en-IN" sz="1000" i="1">
+                                            <a:latin typeface="Cambria Math" panose="02040503050406030204" pitchFamily="18" charset="0"/>
+                                          </a:rPr>
+                                          <m:t>𝑋</m:t>
+                                        </m:r>
+                                      </m:sub>
+                                    </m:sSub>
+                                  </m:den>
+                                </m:f>
+                              </m:e>
+                            </m:d>
+                          </m:e>
+                          <m:sup>
+                            <m:r>
+                              <a:rPr lang="en-IN" sz="1000" i="1">
+                                <a:latin typeface="Cambria Math" panose="02040503050406030204" pitchFamily="18" charset="0"/>
+                              </a:rPr>
+                              <m:t>3</m:t>
+                            </m:r>
+                          </m:sup>
+                        </m:sSup>
+                      </m:e>
+                    </m:d>
+                    <m:r>
+                      <a:rPr lang="en-IN" sz="1000" i="1">
+                        <a:latin typeface="Cambria Math" panose="02040503050406030204" pitchFamily="18" charset="0"/>
+                      </a:rPr>
+                      <m:t>=</m:t>
+                    </m:r>
+                    <m:nary>
+                      <m:naryPr>
+                        <m:limLoc m:val="subSup"/>
+                        <m:supHide m:val="on"/>
+                        <m:ctrlPr>
+                          <a:rPr lang="en-IN" sz="1000" i="1">
+                            <a:latin typeface="Cambria Math" panose="02040503050406030204" pitchFamily="18" charset="0"/>
+                          </a:rPr>
+                        </m:ctrlPr>
+                      </m:naryPr>
+                      <m:sub>
+                        <m:r>
+                          <a:rPr lang="en-IN" sz="1000" i="1">
+                            <a:latin typeface="Cambria Math" panose="02040503050406030204" pitchFamily="18" charset="0"/>
+                          </a:rPr>
+                          <m:t>𝑥</m:t>
+                        </m:r>
+                      </m:sub>
+                      <m:sup/>
+                      <m:e>
+                        <m:sSup>
+                          <m:sSupPr>
+                            <m:ctrlPr>
+                              <a:rPr lang="en-IN" sz="1000" i="1">
+                                <a:latin typeface="Cambria Math" panose="02040503050406030204" pitchFamily="18" charset="0"/>
+                              </a:rPr>
+                            </m:ctrlPr>
+                          </m:sSupPr>
+                          <m:e>
+                            <m:d>
+                              <m:dPr>
+                                <m:ctrlPr>
+                                  <a:rPr lang="en-IN" sz="1000" i="1">
+                                    <a:latin typeface="Cambria Math" panose="02040503050406030204" pitchFamily="18" charset="0"/>
+                                  </a:rPr>
+                                </m:ctrlPr>
+                              </m:dPr>
+                              <m:e>
+                                <m:f>
+                                  <m:fPr>
+                                    <m:ctrlPr>
+                                      <a:rPr lang="en-IN" sz="1000" i="1">
+                                        <a:latin typeface="Cambria Math" panose="02040503050406030204" pitchFamily="18" charset="0"/>
+                                      </a:rPr>
+                                    </m:ctrlPr>
+                                  </m:fPr>
+                                  <m:num>
+                                    <m:r>
+                                      <a:rPr lang="en-IN" sz="1000" i="1">
+                                        <a:latin typeface="Cambria Math" panose="02040503050406030204" pitchFamily="18" charset="0"/>
+                                      </a:rPr>
+                                      <m:t>𝑥</m:t>
+                                    </m:r>
+                                    <m:r>
+                                      <a:rPr lang="en-IN" sz="1000" i="1">
+                                        <a:latin typeface="Cambria Math" panose="02040503050406030204" pitchFamily="18" charset="0"/>
+                                      </a:rPr>
+                                      <m:t>−</m:t>
+                                    </m:r>
+                                    <m:sSub>
+                                      <m:sSubPr>
+                                        <m:ctrlPr>
+                                          <a:rPr lang="en-IN" sz="1000" i="1">
+                                            <a:latin typeface="Cambria Math" panose="02040503050406030204" pitchFamily="18" charset="0"/>
+                                          </a:rPr>
+                                        </m:ctrlPr>
+                                      </m:sSubPr>
+                                      <m:e>
+                                        <m:r>
+                                          <a:rPr lang="en-IN" sz="1000" i="1">
+                                            <a:latin typeface="Cambria Math" panose="02040503050406030204" pitchFamily="18" charset="0"/>
+                                          </a:rPr>
+                                          <m:t>𝜇</m:t>
+                                        </m:r>
+                                      </m:e>
+                                      <m:sub>
+                                        <m:r>
+                                          <a:rPr lang="en-IN" sz="1000" i="1">
+                                            <a:latin typeface="Cambria Math" panose="02040503050406030204" pitchFamily="18" charset="0"/>
+                                          </a:rPr>
+                                          <m:t>𝑋</m:t>
+                                        </m:r>
+                                      </m:sub>
+                                    </m:sSub>
+                                  </m:num>
+                                  <m:den>
+                                    <m:sSub>
+                                      <m:sSubPr>
+                                        <m:ctrlPr>
+                                          <a:rPr lang="en-IN" sz="1000" i="1">
+                                            <a:latin typeface="Cambria Math" panose="02040503050406030204" pitchFamily="18" charset="0"/>
+                                          </a:rPr>
+                                        </m:ctrlPr>
+                                      </m:sSubPr>
+                                      <m:e>
+                                        <m:r>
+                                          <a:rPr lang="en-IN" sz="1000" i="1">
+                                            <a:latin typeface="Cambria Math" panose="02040503050406030204" pitchFamily="18" charset="0"/>
+                                          </a:rPr>
+                                          <m:t>𝜎</m:t>
+                                        </m:r>
+                                      </m:e>
+                                      <m:sub>
+                                        <m:r>
+                                          <a:rPr lang="en-IN" sz="1000" i="1">
+                                            <a:latin typeface="Cambria Math" panose="02040503050406030204" pitchFamily="18" charset="0"/>
+                                          </a:rPr>
+                                          <m:t>𝑋</m:t>
+                                        </m:r>
+                                      </m:sub>
+                                    </m:sSub>
+                                  </m:den>
+                                </m:f>
+                              </m:e>
+                            </m:d>
+                          </m:e>
+                          <m:sup>
+                            <m:r>
+                              <a:rPr lang="en-IN" sz="1000" i="1">
+                                <a:latin typeface="Cambria Math" panose="02040503050406030204" pitchFamily="18" charset="0"/>
+                              </a:rPr>
+                              <m:t>3</m:t>
+                            </m:r>
+                          </m:sup>
+                        </m:sSup>
+                      </m:e>
+                    </m:nary>
+                    <m:r>
+                      <a:rPr lang="en-IN" sz="1000" i="1">
+                        <a:latin typeface="Cambria Math" panose="02040503050406030204" pitchFamily="18" charset="0"/>
+                      </a:rPr>
+                      <m:t>⋅</m:t>
+                    </m:r>
+                    <m:sSub>
+                      <m:sSubPr>
+                        <m:ctrlPr>
+                          <a:rPr lang="en-IN" sz="1000" i="1">
+                            <a:latin typeface="Cambria Math" panose="02040503050406030204" pitchFamily="18" charset="0"/>
+                          </a:rPr>
+                        </m:ctrlPr>
+                      </m:sSubPr>
+                      <m:e>
+                        <m:r>
+                          <a:rPr lang="en-IN" sz="1000" i="1">
+                            <a:latin typeface="Cambria Math" panose="02040503050406030204" pitchFamily="18" charset="0"/>
+                          </a:rPr>
+                          <m:t>𝑓</m:t>
+                        </m:r>
+                      </m:e>
+                      <m:sub>
+                        <m:r>
+                          <a:rPr lang="en-IN" sz="1000" i="1">
+                            <a:latin typeface="Cambria Math" panose="02040503050406030204" pitchFamily="18" charset="0"/>
+                          </a:rPr>
+                          <m:t>𝑋</m:t>
+                        </m:r>
+                      </m:sub>
+                    </m:sSub>
+                    <m:d>
+                      <m:dPr>
+                        <m:ctrlPr>
+                          <a:rPr lang="en-IN" sz="1000" i="1">
+                            <a:latin typeface="Cambria Math" panose="02040503050406030204" pitchFamily="18" charset="0"/>
+                          </a:rPr>
+                        </m:ctrlPr>
+                      </m:dPr>
+                      <m:e>
+                        <m:r>
+                          <a:rPr lang="en-IN" sz="1000" i="1">
+                            <a:latin typeface="Cambria Math" panose="02040503050406030204" pitchFamily="18" charset="0"/>
+                          </a:rPr>
+                          <m:t>𝑥</m:t>
+                        </m:r>
+                      </m:e>
+                    </m:d>
+                    <m:r>
+                      <m:rPr>
+                        <m:nor/>
+                      </m:rPr>
+                      <a:rPr lang="en-IN" sz="1000"/>
+                      <m:t>d</m:t>
+                    </m:r>
+                    <m:r>
+                      <a:rPr lang="en-IN" sz="1000" i="1">
+                        <a:latin typeface="Cambria Math" panose="02040503050406030204" pitchFamily="18" charset="0"/>
+                      </a:rPr>
+                      <m:t>𝑥</m:t>
+                    </m:r>
+                  </m:oMath>
+                </a14:m>
+                <a:r>
+                  <a:rPr lang="en-IN" sz="1000" dirty="0"/>
+                  <a:t>, LS : mean &lt; median &lt; mode</a:t>
+                </a:r>
+              </a:p>
+              <a:p>
+                <a:pPr>
+                  <a:lnSpc>
+                    <a:spcPct val="100000"/>
+                  </a:lnSpc>
+                </a:pPr>
+                <a:r>
+                  <a:rPr lang="en-IN" sz="1000" b="1" dirty="0"/>
+                  <a:t>Survival Function: </a:t>
+                </a:r>
+                <a14:m>
+                  <m:oMath xmlns:m="http://schemas.openxmlformats.org/officeDocument/2006/math">
+                    <m:sSub>
+                      <m:sSubPr>
+                        <m:ctrlPr>
+                          <a:rPr lang="en-IN" sz="1000" i="1"/>
+                        </m:ctrlPr>
+                      </m:sSubPr>
+                      <m:e>
+                        <m:r>
+                          <a:rPr lang="en-IN" sz="1000" i="1"/>
+                          <m:t>𝑆</m:t>
+                        </m:r>
+                      </m:e>
+                      <m:sub>
+                        <m:r>
+                          <a:rPr lang="en-IN" sz="1000" i="1"/>
+                          <m:t>𝑋</m:t>
+                        </m:r>
+                      </m:sub>
+                    </m:sSub>
+                    <m:d>
+                      <m:dPr>
+                        <m:ctrlPr>
+                          <a:rPr lang="en-IN" sz="1000" i="1"/>
+                        </m:ctrlPr>
+                      </m:dPr>
+                      <m:e>
+                        <m:r>
+                          <a:rPr lang="en-IN" sz="1000" i="1"/>
+                          <m:t>𝑥</m:t>
+                        </m:r>
+                      </m:e>
+                    </m:d>
+                    <m:r>
+                      <a:rPr lang="en-IN" sz="1000" i="1"/>
+                      <m:t>=</m:t>
+                    </m:r>
+                    <m:r>
+                      <a:rPr lang="en-IN" sz="1000" i="1"/>
+                      <m:t>𝑃</m:t>
+                    </m:r>
+                    <m:d>
+                      <m:dPr>
+                        <m:ctrlPr>
+                          <a:rPr lang="en-IN" sz="1000" i="1"/>
+                        </m:ctrlPr>
+                      </m:dPr>
+                      <m:e>
+                        <m:r>
+                          <a:rPr lang="en-IN" sz="1000" i="1"/>
+                          <m:t>𝑋</m:t>
+                        </m:r>
+                        <m:r>
+                          <a:rPr lang="en-IN" sz="1000" i="1"/>
+                          <m:t>&gt;</m:t>
+                        </m:r>
+                        <m:r>
+                          <a:rPr lang="en-IN" sz="1000" i="1"/>
+                          <m:t>𝑥</m:t>
+                        </m:r>
+                      </m:e>
+                    </m:d>
+                    <m:r>
+                      <a:rPr lang="en-IN" sz="1000" i="1"/>
+                      <m:t>=1−</m:t>
+                    </m:r>
+                    <m:sSub>
+                      <m:sSubPr>
+                        <m:ctrlPr>
+                          <a:rPr lang="en-IN" sz="1000" i="1"/>
+                        </m:ctrlPr>
+                      </m:sSubPr>
+                      <m:e>
+                        <m:r>
+                          <a:rPr lang="en-IN" sz="1000" i="1"/>
+                          <m:t>𝐹</m:t>
+                        </m:r>
+                      </m:e>
+                      <m:sub>
+                        <m:r>
+                          <a:rPr lang="en-IN" sz="1000" i="1"/>
+                          <m:t>𝑋</m:t>
+                        </m:r>
+                      </m:sub>
+                    </m:sSub>
+                    <m:d>
+                      <m:dPr>
+                        <m:ctrlPr>
+                          <a:rPr lang="en-IN" sz="1000" i="1"/>
+                        </m:ctrlPr>
+                      </m:dPr>
+                      <m:e>
+                        <m:r>
+                          <a:rPr lang="en-IN" sz="1000" i="1"/>
+                          <m:t>𝑥</m:t>
+                        </m:r>
+                      </m:e>
+                    </m:d>
+                  </m:oMath>
+                </a14:m>
+                <a:endParaRPr lang="en-IN" sz="1000" dirty="0"/>
+              </a:p>
+              <a:p>
+                <a:r>
+                  <a:rPr lang="en-IN" sz="1000" b="1" dirty="0" err="1"/>
+                  <a:t>unif</a:t>
+                </a:r>
+                <a:r>
+                  <a:rPr lang="en-IN" sz="1000" dirty="0"/>
+                  <a:t>: </a:t>
+                </a:r>
+                <a14:m>
+                  <m:oMath xmlns:m="http://schemas.openxmlformats.org/officeDocument/2006/math">
+                    <m:sSub>
+                      <m:sSubPr>
+                        <m:ctrlPr>
+                          <a:rPr lang="en-IN" sz="1000" i="1"/>
+                        </m:ctrlPr>
+                      </m:sSubPr>
+                      <m:e>
+                        <m:r>
+                          <a:rPr lang="en-IN" sz="1000" i="1"/>
+                          <m:t>𝑓</m:t>
+                        </m:r>
+                      </m:e>
+                      <m:sub>
+                        <m:r>
+                          <a:rPr lang="en-IN" sz="1000" i="1"/>
+                          <m:t>𝑋</m:t>
+                        </m:r>
+                      </m:sub>
+                    </m:sSub>
+                    <m:d>
+                      <m:dPr>
+                        <m:ctrlPr>
+                          <a:rPr lang="en-IN" sz="1000" i="1"/>
+                        </m:ctrlPr>
+                      </m:dPr>
+                      <m:e>
+                        <m:r>
+                          <a:rPr lang="en-IN" sz="1000" i="1"/>
+                          <m:t>𝑥</m:t>
+                        </m:r>
+                        <m:r>
+                          <a:rPr lang="en-IN" sz="1000" i="1"/>
+                          <m:t>∣</m:t>
+                        </m:r>
+                        <m:r>
+                          <a:rPr lang="en-IN" sz="1000" i="1"/>
+                          <m:t>𝑎</m:t>
+                        </m:r>
+                        <m:r>
+                          <a:rPr lang="en-IN" sz="1000" i="1"/>
+                          <m:t>,</m:t>
+                        </m:r>
+                        <m:r>
+                          <a:rPr lang="en-IN" sz="1000" i="1"/>
+                          <m:t>𝑏</m:t>
+                        </m:r>
+                      </m:e>
+                    </m:d>
+                    <m:r>
+                      <a:rPr lang="en-IN" sz="1000" i="1"/>
+                      <m:t>=</m:t>
+                    </m:r>
+                    <m:f>
+                      <m:fPr>
+                        <m:ctrlPr>
+                          <a:rPr lang="en-IN" sz="1000" i="1"/>
+                        </m:ctrlPr>
+                      </m:fPr>
+                      <m:num>
+                        <m:r>
+                          <a:rPr lang="en-IN" sz="1000" i="1"/>
+                          <m:t>1</m:t>
+                        </m:r>
+                      </m:num>
+                      <m:den>
+                        <m:r>
+                          <a:rPr lang="en-IN" sz="1000" i="1"/>
+                          <m:t>𝑏</m:t>
+                        </m:r>
+                        <m:r>
+                          <a:rPr lang="en-IN" sz="1000" i="1"/>
+                          <m:t>−</m:t>
+                        </m:r>
+                        <m:r>
+                          <a:rPr lang="en-IN" sz="1000" i="1"/>
+                          <m:t>𝑎</m:t>
+                        </m:r>
+                      </m:den>
+                    </m:f>
+                  </m:oMath>
+                </a14:m>
+                <a:r>
+                  <a:rPr lang="en-IN" sz="1000" dirty="0"/>
+                  <a:t>, </a:t>
+                </a:r>
+                <a14:m>
+                  <m:oMath xmlns:m="http://schemas.openxmlformats.org/officeDocument/2006/math">
+                    <m:r>
+                      <a:rPr lang="en-IN" sz="1000"/>
+                      <m:t>𝔼</m:t>
+                    </m:r>
+                    <m:d>
+                      <m:dPr>
+                        <m:ctrlPr>
+                          <a:rPr lang="en-IN" sz="1000" i="1"/>
+                        </m:ctrlPr>
+                      </m:dPr>
+                      <m:e>
+                        <m:r>
+                          <a:rPr lang="en-IN" sz="1000" i="1"/>
+                          <m:t>𝑋</m:t>
+                        </m:r>
+                      </m:e>
+                    </m:d>
+                    <m:r>
+                      <a:rPr lang="en-IN" sz="1000" i="1"/>
+                      <m:t>=</m:t>
+                    </m:r>
+                    <m:f>
+                      <m:fPr>
+                        <m:ctrlPr>
+                          <a:rPr lang="en-IN" sz="1000" i="1"/>
+                        </m:ctrlPr>
+                      </m:fPr>
+                      <m:num>
+                        <m:r>
+                          <a:rPr lang="en-IN" sz="1000" i="1"/>
+                          <m:t>𝑎</m:t>
+                        </m:r>
+                        <m:r>
+                          <a:rPr lang="en-IN" sz="1000" i="1"/>
+                          <m:t>+</m:t>
+                        </m:r>
+                        <m:r>
+                          <a:rPr lang="en-IN" sz="1000" i="1"/>
+                          <m:t>𝑏</m:t>
+                        </m:r>
+                      </m:num>
+                      <m:den>
+                        <m:r>
+                          <a:rPr lang="en-IN" sz="1000" i="1"/>
+                          <m:t>2</m:t>
+                        </m:r>
+                      </m:den>
+                    </m:f>
+                  </m:oMath>
+                </a14:m>
+                <a:r>
+                  <a:rPr lang="en-IN" sz="1000" dirty="0"/>
+                  <a:t>, </a:t>
+                </a:r>
+                <a14:m>
+                  <m:oMath xmlns:m="http://schemas.openxmlformats.org/officeDocument/2006/math">
+                    <m:r>
+                      <m:rPr>
+                        <m:nor/>
+                      </m:rPr>
+                      <a:rPr lang="en-IN" sz="1000"/>
+                      <m:t>Var</m:t>
+                    </m:r>
+                    <m:d>
+                      <m:dPr>
+                        <m:ctrlPr>
+                          <a:rPr lang="en-IN" sz="1000" i="1"/>
+                        </m:ctrlPr>
+                      </m:dPr>
+                      <m:e>
+                        <m:r>
+                          <a:rPr lang="en-IN" sz="1000" i="1"/>
+                          <m:t>𝑋</m:t>
+                        </m:r>
+                      </m:e>
+                    </m:d>
+                    <m:r>
+                      <a:rPr lang="en-IN" sz="1000" i="1"/>
+                      <m:t>=</m:t>
+                    </m:r>
+                    <m:f>
+                      <m:fPr>
+                        <m:ctrlPr>
+                          <a:rPr lang="en-IN" sz="1000" i="1"/>
+                        </m:ctrlPr>
+                      </m:fPr>
+                      <m:num>
                         <m:sSup>
                           <m:sSupPr>
                             <m:ctrlPr>
@@ -5456,95 +6657,1190 @@
                                 </m:ctrlPr>
                               </m:dPr>
                               <m:e>
-                                <m:f>
-                                  <m:fPr>
-                                    <m:ctrlPr>
-                                      <a:rPr lang="en-IN" sz="1000" i="1"/>
-                                    </m:ctrlPr>
-                                  </m:fPr>
-                                  <m:num>
-                                    <m:r>
-                                      <a:rPr lang="en-IN" sz="1000" i="1"/>
-                                      <m:t>𝑋</m:t>
-                                    </m:r>
-                                    <m:r>
-                                      <a:rPr lang="en-IN" sz="1000" i="1"/>
-                                      <m:t>−</m:t>
-                                    </m:r>
-                                    <m:sSub>
-                                      <m:sSubPr>
-                                        <m:ctrlPr>
-                                          <a:rPr lang="en-IN" sz="1000" i="1"/>
-                                        </m:ctrlPr>
-                                      </m:sSubPr>
-                                      <m:e>
-                                        <m:r>
-                                          <a:rPr lang="en-IN" sz="1000" i="1"/>
-                                          <m:t>𝜇</m:t>
-                                        </m:r>
-                                      </m:e>
-                                      <m:sub>
-                                        <m:r>
-                                          <a:rPr lang="en-IN" sz="1000" i="1"/>
-                                          <m:t>𝑋</m:t>
-                                        </m:r>
-                                      </m:sub>
-                                    </m:sSub>
-                                  </m:num>
-                                  <m:den>
-                                    <m:sSub>
-                                      <m:sSubPr>
-                                        <m:ctrlPr>
-                                          <a:rPr lang="en-IN" sz="1000" i="1"/>
-                                        </m:ctrlPr>
-                                      </m:sSubPr>
-                                      <m:e>
-                                        <m:r>
-                                          <a:rPr lang="en-IN" sz="1000" i="1"/>
-                                          <m:t>𝜎</m:t>
-                                        </m:r>
-                                      </m:e>
-                                      <m:sub>
-                                        <m:r>
-                                          <a:rPr lang="en-IN" sz="1000" i="1"/>
-                                          <m:t>𝑋</m:t>
-                                        </m:r>
-                                      </m:sub>
-                                    </m:sSub>
-                                  </m:den>
-                                </m:f>
+                                <m:r>
+                                  <a:rPr lang="en-IN" sz="1000" i="1"/>
+                                  <m:t>𝑏</m:t>
+                                </m:r>
+                                <m:r>
+                                  <a:rPr lang="en-IN" sz="1000" i="1"/>
+                                  <m:t>−</m:t>
+                                </m:r>
+                                <m:r>
+                                  <a:rPr lang="en-IN" sz="1000" i="1"/>
+                                  <m:t>𝑎</m:t>
+                                </m:r>
                               </m:e>
                             </m:d>
                           </m:e>
                           <m:sup>
                             <m:r>
                               <a:rPr lang="en-IN" sz="1000" i="1"/>
-                              <m:t>3</m:t>
+                              <m:t>2</m:t>
                             </m:r>
                           </m:sup>
                         </m:sSup>
+                      </m:num>
+                      <m:den>
+                        <m:r>
+                          <a:rPr lang="en-IN" sz="1000" i="1"/>
+                          <m:t>12</m:t>
+                        </m:r>
+                      </m:den>
+                    </m:f>
+                  </m:oMath>
+                </a14:m>
+                <a:endParaRPr lang="en-IN" sz="1000" dirty="0"/>
+              </a:p>
+              <a:p>
+                <a:r>
+                  <a:rPr lang="en-IN" sz="1000" b="1" dirty="0"/>
+                  <a:t>norm</a:t>
+                </a:r>
+                <a:r>
+                  <a:rPr lang="en-IN" sz="1000" dirty="0"/>
+                  <a:t>: </a:t>
+                </a:r>
+                <a14:m>
+                  <m:oMath xmlns:m="http://schemas.openxmlformats.org/officeDocument/2006/math">
+                    <m:sSub>
+                      <m:sSubPr>
+                        <m:ctrlPr>
+                          <a:rPr lang="en-IN" sz="1000" i="1"/>
+                        </m:ctrlPr>
+                      </m:sSubPr>
+                      <m:e>
+                        <m:r>
+                          <a:rPr lang="en-IN" sz="1000" i="1"/>
+                          <m:t>𝑓</m:t>
+                        </m:r>
+                      </m:e>
+                      <m:sub>
+                        <m:r>
+                          <a:rPr lang="en-IN" sz="1000" i="1"/>
+                          <m:t>𝑋</m:t>
+                        </m:r>
+                      </m:sub>
+                    </m:sSub>
+                    <m:d>
+                      <m:dPr>
+                        <m:ctrlPr>
+                          <a:rPr lang="en-IN" sz="1000" i="1"/>
+                        </m:ctrlPr>
+                      </m:dPr>
+                      <m:e>
+                        <m:r>
+                          <a:rPr lang="en-IN" sz="1000" i="1"/>
+                          <m:t>𝑥</m:t>
+                        </m:r>
+                        <m:r>
+                          <a:rPr lang="en-IN" sz="1000" i="1"/>
+                          <m:t>∣</m:t>
+                        </m:r>
+                        <m:r>
+                          <a:rPr lang="en-IN" sz="1000" i="1"/>
+                          <m:t>𝜇</m:t>
+                        </m:r>
+                        <m:r>
+                          <a:rPr lang="en-IN" sz="1000" i="1"/>
+                          <m:t>,</m:t>
+                        </m:r>
+                        <m:sSup>
+                          <m:sSupPr>
+                            <m:ctrlPr>
+                              <a:rPr lang="en-IN" sz="1000" i="1"/>
+                            </m:ctrlPr>
+                          </m:sSupPr>
+                          <m:e>
+                            <m:r>
+                              <a:rPr lang="en-IN" sz="1000" i="1"/>
+                              <m:t>𝜎</m:t>
+                            </m:r>
+                          </m:e>
+                          <m:sup>
+                            <m:r>
+                              <a:rPr lang="en-IN" sz="1000" i="1"/>
+                              <m:t>2</m:t>
+                            </m:r>
+                          </m:sup>
+                        </m:sSup>
                       </m:e>
                     </m:d>
                     <m:r>
                       <a:rPr lang="en-IN" sz="1000" i="1"/>
                       <m:t>=</m:t>
                     </m:r>
-                    <m:nary>
-                      <m:naryPr>
-                        <m:limLoc m:val="subSup"/>
-                        <m:supHide m:val="on"/>
-                        <m:ctrlPr>
-                          <a:rPr lang="en-IN" sz="1000" i="1"/>
-                        </m:ctrlPr>
-                      </m:naryPr>
+                    <m:f>
+                      <m:fPr>
+                        <m:ctrlPr>
+                          <a:rPr lang="en-IN" sz="1000" i="1"/>
+                        </m:ctrlPr>
+                      </m:fPr>
+                      <m:num>
+                        <m:r>
+                          <a:rPr lang="en-IN" sz="1000" i="1"/>
+                          <m:t>1</m:t>
+                        </m:r>
+                      </m:num>
+                      <m:den>
+                        <m:rad>
+                          <m:radPr>
+                            <m:degHide m:val="on"/>
+                            <m:ctrlPr>
+                              <a:rPr lang="en-IN" sz="1000" i="1"/>
+                            </m:ctrlPr>
+                          </m:radPr>
+                          <m:deg/>
+                          <m:e>
+                            <m:r>
+                              <a:rPr lang="en-IN" sz="1000" i="1"/>
+                              <m:t>2</m:t>
+                            </m:r>
+                            <m:r>
+                              <a:rPr lang="en-IN" sz="1000" i="1"/>
+                              <m:t>𝜋</m:t>
+                            </m:r>
+                            <m:sSup>
+                              <m:sSupPr>
+                                <m:ctrlPr>
+                                  <a:rPr lang="en-IN" sz="1000" i="1"/>
+                                </m:ctrlPr>
+                              </m:sSupPr>
+                              <m:e>
+                                <m:r>
+                                  <a:rPr lang="en-IN" sz="1000" i="1"/>
+                                  <m:t>𝜎</m:t>
+                                </m:r>
+                              </m:e>
+                              <m:sup>
+                                <m:r>
+                                  <a:rPr lang="en-IN" sz="1000" i="1"/>
+                                  <m:t>2</m:t>
+                                </m:r>
+                              </m:sup>
+                            </m:sSup>
+                          </m:e>
+                        </m:rad>
+                      </m:den>
+                    </m:f>
+                    <m:func>
+                      <m:funcPr>
+                        <m:ctrlPr>
+                          <a:rPr lang="en-IN" sz="1000"/>
+                        </m:ctrlPr>
+                      </m:funcPr>
+                      <m:fName>
+                        <m:r>
+                          <m:rPr>
+                            <m:sty m:val="p"/>
+                          </m:rPr>
+                          <a:rPr lang="en-IN" sz="1000"/>
+                          <m:t>exp</m:t>
+                        </m:r>
+                      </m:fName>
+                      <m:e>
+                        <m:d>
+                          <m:dPr>
+                            <m:begChr m:val="["/>
+                            <m:endChr m:val="]"/>
+                            <m:ctrlPr>
+                              <a:rPr lang="en-IN" sz="1000" i="1"/>
+                            </m:ctrlPr>
+                          </m:dPr>
+                          <m:e>
+                            <m:r>
+                              <a:rPr lang="en-IN" sz="1000" i="1"/>
+                              <m:t>−</m:t>
+                            </m:r>
+                            <m:f>
+                              <m:fPr>
+                                <m:ctrlPr>
+                                  <a:rPr lang="en-IN" sz="1000" i="1"/>
+                                </m:ctrlPr>
+                              </m:fPr>
+                              <m:num>
+                                <m:sSup>
+                                  <m:sSupPr>
+                                    <m:ctrlPr>
+                                      <a:rPr lang="en-IN" sz="1000" i="1"/>
+                                    </m:ctrlPr>
+                                  </m:sSupPr>
+                                  <m:e>
+                                    <m:d>
+                                      <m:dPr>
+                                        <m:ctrlPr>
+                                          <a:rPr lang="en-IN" sz="1000" i="1"/>
+                                        </m:ctrlPr>
+                                      </m:dPr>
+                                      <m:e>
+                                        <m:r>
+                                          <a:rPr lang="en-IN" sz="1000" i="1"/>
+                                          <m:t>𝑥</m:t>
+                                        </m:r>
+                                        <m:r>
+                                          <a:rPr lang="en-IN" sz="1000" i="1"/>
+                                          <m:t>−</m:t>
+                                        </m:r>
+                                        <m:r>
+                                          <a:rPr lang="en-IN" sz="1000" i="1"/>
+                                          <m:t>𝜇</m:t>
+                                        </m:r>
+                                      </m:e>
+                                    </m:d>
+                                  </m:e>
+                                  <m:sup>
+                                    <m:r>
+                                      <a:rPr lang="en-IN" sz="1000" i="1"/>
+                                      <m:t>2</m:t>
+                                    </m:r>
+                                  </m:sup>
+                                </m:sSup>
+                              </m:num>
+                              <m:den>
+                                <m:r>
+                                  <a:rPr lang="en-IN" sz="1000" i="1"/>
+                                  <m:t>2</m:t>
+                                </m:r>
+                                <m:sSup>
+                                  <m:sSupPr>
+                                    <m:ctrlPr>
+                                      <a:rPr lang="en-IN" sz="1000" i="1"/>
+                                    </m:ctrlPr>
+                                  </m:sSupPr>
+                                  <m:e>
+                                    <m:r>
+                                      <a:rPr lang="en-IN" sz="1000" i="1"/>
+                                      <m:t>𝜎</m:t>
+                                    </m:r>
+                                  </m:e>
+                                  <m:sup>
+                                    <m:r>
+                                      <a:rPr lang="en-IN" sz="1000" i="1"/>
+                                      <m:t>2</m:t>
+                                    </m:r>
+                                  </m:sup>
+                                </m:sSup>
+                              </m:den>
+                            </m:f>
+                          </m:e>
+                        </m:d>
+                      </m:e>
+                    </m:func>
+                  </m:oMath>
+                </a14:m>
+                <a:r>
+                  <a:rPr lang="en-IN" sz="1000" dirty="0">
+                    <a:effectLst/>
+                  </a:rPr>
+                  <a:t> , </a:t>
+                </a:r>
+                <a14:m>
+                  <m:oMath xmlns:m="http://schemas.openxmlformats.org/officeDocument/2006/math">
+                    <m:r>
+                      <a:rPr lang="en-IN" sz="1000"/>
+                      <m:t>𝔼</m:t>
+                    </m:r>
+                    <m:d>
+                      <m:dPr>
+                        <m:ctrlPr>
+                          <a:rPr lang="en-IN" sz="1000" i="1"/>
+                        </m:ctrlPr>
+                      </m:dPr>
+                      <m:e>
+                        <m:r>
+                          <a:rPr lang="en-IN" sz="1000" i="1"/>
+                          <m:t>𝑋</m:t>
+                        </m:r>
+                      </m:e>
+                    </m:d>
+                    <m:r>
+                      <a:rPr lang="en-IN" sz="1000" i="1"/>
+                      <m:t>=</m:t>
+                    </m:r>
+                    <m:r>
+                      <a:rPr lang="en-IN" sz="1000" i="1"/>
+                      <m:t>𝜇</m:t>
+                    </m:r>
+                  </m:oMath>
+                </a14:m>
+                <a:r>
+                  <a:rPr lang="en-IN" sz="1000" dirty="0"/>
+                  <a:t>, </a:t>
+                </a:r>
+                <a14:m>
+                  <m:oMath xmlns:m="http://schemas.openxmlformats.org/officeDocument/2006/math">
+                    <m:r>
+                      <m:rPr>
+                        <m:nor/>
+                      </m:rPr>
+                      <a:rPr lang="en-IN" sz="1000"/>
+                      <m:t>Var</m:t>
+                    </m:r>
+                    <m:d>
+                      <m:dPr>
+                        <m:ctrlPr>
+                          <a:rPr lang="en-IN" sz="1000" i="1"/>
+                        </m:ctrlPr>
+                      </m:dPr>
+                      <m:e>
+                        <m:r>
+                          <a:rPr lang="en-IN" sz="1000" i="1"/>
+                          <m:t>𝑋</m:t>
+                        </m:r>
+                      </m:e>
+                    </m:d>
+                    <m:r>
+                      <a:rPr lang="en-IN" sz="1000" i="1"/>
+                      <m:t>=</m:t>
+                    </m:r>
+                    <m:sSup>
+                      <m:sSupPr>
+                        <m:ctrlPr>
+                          <a:rPr lang="en-IN" sz="1000" i="1"/>
+                        </m:ctrlPr>
+                      </m:sSupPr>
+                      <m:e>
+                        <m:r>
+                          <a:rPr lang="en-IN" sz="1000" i="1"/>
+                          <m:t>𝜎</m:t>
+                        </m:r>
+                      </m:e>
+                      <m:sup>
+                        <m:r>
+                          <a:rPr lang="en-IN" sz="1000" i="1"/>
+                          <m:t>2</m:t>
+                        </m:r>
+                      </m:sup>
+                    </m:sSup>
+                  </m:oMath>
+                </a14:m>
+                <a:endParaRPr lang="en-IN" sz="1000" dirty="0"/>
+              </a:p>
+              <a:p>
+                <a:r>
+                  <a:rPr lang="en-IN" sz="1000" b="1" dirty="0" err="1"/>
+                  <a:t>lnorm</a:t>
+                </a:r>
+                <a:r>
+                  <a:rPr lang="en-IN" sz="1000" dirty="0"/>
+                  <a:t>: </a:t>
+                </a:r>
+                <a14:m>
+                  <m:oMath xmlns:m="http://schemas.openxmlformats.org/officeDocument/2006/math">
+                    <m:sSub>
+                      <m:sSubPr>
+                        <m:ctrlPr>
+                          <a:rPr lang="en-IN" sz="1000" i="1"/>
+                        </m:ctrlPr>
+                      </m:sSubPr>
+                      <m:e>
+                        <m:r>
+                          <a:rPr lang="en-IN" sz="1000" i="1"/>
+                          <m:t>𝑓</m:t>
+                        </m:r>
+                      </m:e>
                       <m:sub>
                         <m:r>
                           <a:rPr lang="en-IN" sz="1000" i="1"/>
+                          <m:t>𝑋</m:t>
+                        </m:r>
+                      </m:sub>
+                    </m:sSub>
+                    <m:d>
+                      <m:dPr>
+                        <m:ctrlPr>
+                          <a:rPr lang="en-IN" sz="1000" i="1"/>
+                        </m:ctrlPr>
+                      </m:dPr>
+                      <m:e>
+                        <m:r>
+                          <a:rPr lang="en-IN" sz="1000" i="1"/>
                           <m:t>𝑥</m:t>
                         </m:r>
+                        <m:r>
+                          <a:rPr lang="en-IN" sz="1000" i="1"/>
+                          <m:t>∣</m:t>
+                        </m:r>
+                        <m:r>
+                          <a:rPr lang="en-IN" sz="1000" i="1"/>
+                          <m:t>𝜇</m:t>
+                        </m:r>
+                        <m:r>
+                          <a:rPr lang="en-IN" sz="1000" i="1"/>
+                          <m:t>,</m:t>
+                        </m:r>
+                        <m:sSup>
+                          <m:sSupPr>
+                            <m:ctrlPr>
+                              <a:rPr lang="en-IN" sz="1000" i="1"/>
+                            </m:ctrlPr>
+                          </m:sSupPr>
+                          <m:e>
+                            <m:r>
+                              <a:rPr lang="en-IN" sz="1000" i="1"/>
+                              <m:t>𝜎</m:t>
+                            </m:r>
+                          </m:e>
+                          <m:sup>
+                            <m:r>
+                              <a:rPr lang="en-IN" sz="1000" i="1"/>
+                              <m:t>2</m:t>
+                            </m:r>
+                          </m:sup>
+                        </m:sSup>
+                      </m:e>
+                    </m:d>
+                    <m:r>
+                      <a:rPr lang="en-IN" sz="1000" i="1"/>
+                      <m:t>=</m:t>
+                    </m:r>
+                    <m:f>
+                      <m:fPr>
+                        <m:ctrlPr>
+                          <a:rPr lang="en-IN" sz="1000" i="1"/>
+                        </m:ctrlPr>
+                      </m:fPr>
+                      <m:num>
+                        <m:r>
+                          <a:rPr lang="en-IN" sz="1000" i="1"/>
+                          <m:t>1</m:t>
+                        </m:r>
+                      </m:num>
+                      <m:den>
+                        <m:r>
+                          <a:rPr lang="en-IN" sz="1000" i="1"/>
+                          <m:t>𝑥</m:t>
+                        </m:r>
+                        <m:rad>
+                          <m:radPr>
+                            <m:degHide m:val="on"/>
+                            <m:ctrlPr>
+                              <a:rPr lang="en-IN" sz="1000" i="1"/>
+                            </m:ctrlPr>
+                          </m:radPr>
+                          <m:deg/>
+                          <m:e>
+                            <m:r>
+                              <a:rPr lang="en-IN" sz="1000" i="1"/>
+                              <m:t>2</m:t>
+                            </m:r>
+                            <m:r>
+                              <a:rPr lang="en-IN" sz="1000" i="1"/>
+                              <m:t>𝜋</m:t>
+                            </m:r>
+                            <m:sSup>
+                              <m:sSupPr>
+                                <m:ctrlPr>
+                                  <a:rPr lang="en-IN" sz="1000" i="1"/>
+                                </m:ctrlPr>
+                              </m:sSupPr>
+                              <m:e>
+                                <m:r>
+                                  <a:rPr lang="en-IN" sz="1000" i="1"/>
+                                  <m:t>𝜎</m:t>
+                                </m:r>
+                              </m:e>
+                              <m:sup>
+                                <m:r>
+                                  <a:rPr lang="en-IN" sz="1000" i="1"/>
+                                  <m:t>2</m:t>
+                                </m:r>
+                              </m:sup>
+                            </m:sSup>
+                          </m:e>
+                        </m:rad>
+                      </m:den>
+                    </m:f>
+                    <m:func>
+                      <m:funcPr>
+                        <m:ctrlPr>
+                          <a:rPr lang="en-IN" sz="1000"/>
+                        </m:ctrlPr>
+                      </m:funcPr>
+                      <m:fName>
+                        <m:r>
+                          <m:rPr>
+                            <m:sty m:val="p"/>
+                          </m:rPr>
+                          <a:rPr lang="en-IN" sz="1000"/>
+                          <m:t>exp</m:t>
+                        </m:r>
+                      </m:fName>
+                      <m:e>
+                        <m:d>
+                          <m:dPr>
+                            <m:begChr m:val="{"/>
+                            <m:endChr m:val="}"/>
+                            <m:ctrlPr>
+                              <a:rPr lang="en-IN" sz="1000" i="1"/>
+                            </m:ctrlPr>
+                          </m:dPr>
+                          <m:e>
+                            <m:r>
+                              <a:rPr lang="en-IN" sz="1000" i="1"/>
+                              <m:t>−</m:t>
+                            </m:r>
+                            <m:f>
+                              <m:fPr>
+                                <m:ctrlPr>
+                                  <a:rPr lang="en-IN" sz="1000" i="1"/>
+                                </m:ctrlPr>
+                              </m:fPr>
+                              <m:num>
+                                <m:sSup>
+                                  <m:sSupPr>
+                                    <m:ctrlPr>
+                                      <a:rPr lang="en-IN" sz="1000" i="1"/>
+                                    </m:ctrlPr>
+                                  </m:sSupPr>
+                                  <m:e>
+                                    <m:d>
+                                      <m:dPr>
+                                        <m:begChr m:val="["/>
+                                        <m:endChr m:val="]"/>
+                                        <m:ctrlPr>
+                                          <a:rPr lang="en-IN" sz="1000" i="1"/>
+                                        </m:ctrlPr>
+                                      </m:dPr>
+                                      <m:e>
+                                        <m:func>
+                                          <m:funcPr>
+                                            <m:ctrlPr>
+                                              <a:rPr lang="en-IN" sz="1000"/>
+                                            </m:ctrlPr>
+                                          </m:funcPr>
+                                          <m:fName>
+                                            <m:r>
+                                              <m:rPr>
+                                                <m:sty m:val="p"/>
+                                              </m:rPr>
+                                              <a:rPr lang="en-IN" sz="1000"/>
+                                              <m:t>log</m:t>
+                                            </m:r>
+                                          </m:fName>
+                                          <m:e>
+                                            <m:d>
+                                              <m:dPr>
+                                                <m:ctrlPr>
+                                                  <a:rPr lang="en-IN" sz="1000" i="1"/>
+                                                </m:ctrlPr>
+                                              </m:dPr>
+                                              <m:e>
+                                                <m:r>
+                                                  <a:rPr lang="en-IN" sz="1000" i="1"/>
+                                                  <m:t>𝑥</m:t>
+                                                </m:r>
+                                              </m:e>
+                                            </m:d>
+                                          </m:e>
+                                        </m:func>
+                                        <m:r>
+                                          <a:rPr lang="en-IN" sz="1000" i="1"/>
+                                          <m:t>−</m:t>
+                                        </m:r>
+                                        <m:r>
+                                          <a:rPr lang="en-IN" sz="1000" i="1"/>
+                                          <m:t>𝜇</m:t>
+                                        </m:r>
+                                      </m:e>
+                                    </m:d>
+                                  </m:e>
+                                  <m:sup>
+                                    <m:r>
+                                      <a:rPr lang="en-IN" sz="1000" i="1"/>
+                                      <m:t>2</m:t>
+                                    </m:r>
+                                  </m:sup>
+                                </m:sSup>
+                              </m:num>
+                              <m:den>
+                                <m:r>
+                                  <a:rPr lang="en-IN" sz="1000" i="1"/>
+                                  <m:t>2</m:t>
+                                </m:r>
+                                <m:sSup>
+                                  <m:sSupPr>
+                                    <m:ctrlPr>
+                                      <a:rPr lang="en-IN" sz="1000" i="1"/>
+                                    </m:ctrlPr>
+                                  </m:sSupPr>
+                                  <m:e>
+                                    <m:r>
+                                      <a:rPr lang="en-IN" sz="1000" i="1"/>
+                                      <m:t>𝜎</m:t>
+                                    </m:r>
+                                  </m:e>
+                                  <m:sup>
+                                    <m:r>
+                                      <a:rPr lang="en-IN" sz="1000" i="1"/>
+                                      <m:t>2</m:t>
+                                    </m:r>
+                                  </m:sup>
+                                </m:sSup>
+                              </m:den>
+                            </m:f>
+                          </m:e>
+                        </m:d>
+                      </m:e>
+                    </m:func>
+                  </m:oMath>
+                </a14:m>
+                <a:r>
+                  <a:rPr lang="en-IN" sz="1000" dirty="0">
+                    <a:effectLst/>
+                  </a:rPr>
+                  <a:t> , </a:t>
+                </a:r>
+                <a14:m>
+                  <m:oMath xmlns:m="http://schemas.openxmlformats.org/officeDocument/2006/math">
+                    <m:r>
+                      <a:rPr lang="en-IN" sz="1000"/>
+                      <m:t>𝔼</m:t>
+                    </m:r>
+                    <m:d>
+                      <m:dPr>
+                        <m:ctrlPr>
+                          <a:rPr lang="en-IN" sz="1000" i="1"/>
+                        </m:ctrlPr>
+                      </m:dPr>
+                      <m:e>
+                        <m:r>
+                          <a:rPr lang="en-IN" sz="1000" i="1"/>
+                          <m:t>𝑋</m:t>
+                        </m:r>
+                      </m:e>
+                    </m:d>
+                    <m:r>
+                      <a:rPr lang="en-IN" sz="1000" i="1"/>
+                      <m:t>=</m:t>
+                    </m:r>
+                    <m:func>
+                      <m:funcPr>
+                        <m:ctrlPr>
+                          <a:rPr lang="en-IN" sz="1000"/>
+                        </m:ctrlPr>
+                      </m:funcPr>
+                      <m:fName>
+                        <m:r>
+                          <m:rPr>
+                            <m:sty m:val="p"/>
+                          </m:rPr>
+                          <a:rPr lang="en-IN" sz="1000"/>
+                          <m:t>exp</m:t>
+                        </m:r>
+                      </m:fName>
+                      <m:e>
+                        <m:d>
+                          <m:dPr>
+                            <m:begChr m:val="["/>
+                            <m:endChr m:val="]"/>
+                            <m:ctrlPr>
+                              <a:rPr lang="en-IN" sz="1000" i="1"/>
+                            </m:ctrlPr>
+                          </m:dPr>
+                          <m:e>
+                            <m:r>
+                              <a:rPr lang="en-IN" sz="1000" i="1"/>
+                              <m:t>𝜇</m:t>
+                            </m:r>
+                            <m:r>
+                              <a:rPr lang="en-IN" sz="1000" i="1"/>
+                              <m:t>+</m:t>
+                            </m:r>
+                            <m:d>
+                              <m:dPr>
+                                <m:ctrlPr>
+                                  <a:rPr lang="en-IN" sz="1000" i="1"/>
+                                </m:ctrlPr>
+                              </m:dPr>
+                              <m:e>
+                                <m:sSup>
+                                  <m:sSupPr>
+                                    <m:ctrlPr>
+                                      <a:rPr lang="en-IN" sz="1000" i="1"/>
+                                    </m:ctrlPr>
+                                  </m:sSupPr>
+                                  <m:e>
+                                    <m:r>
+                                      <a:rPr lang="en-IN" sz="1000" i="1"/>
+                                      <m:t>𝜎</m:t>
+                                    </m:r>
+                                  </m:e>
+                                  <m:sup>
+                                    <m:r>
+                                      <a:rPr lang="en-IN" sz="1000" i="1"/>
+                                      <m:t>2</m:t>
+                                    </m:r>
+                                  </m:sup>
+                                </m:sSup>
+                                <m:r>
+                                  <a:rPr lang="en-IN" sz="1000" i="1"/>
+                                  <m:t>/2</m:t>
+                                </m:r>
+                              </m:e>
+                            </m:d>
+                          </m:e>
+                        </m:d>
+                      </m:e>
+                    </m:func>
+                  </m:oMath>
+                </a14:m>
+                <a:r>
+                  <a:rPr lang="en-IN" sz="1000" dirty="0"/>
+                  <a:t>, </a:t>
+                </a:r>
+                <a14:m>
+                  <m:oMath xmlns:m="http://schemas.openxmlformats.org/officeDocument/2006/math">
+                    <m:r>
+                      <m:rPr>
+                        <m:nor/>
+                      </m:rPr>
+                      <a:rPr lang="en-IN" sz="1000"/>
+                      <m:t>Var</m:t>
+                    </m:r>
+                    <m:d>
+                      <m:dPr>
+                        <m:ctrlPr>
+                          <a:rPr lang="en-IN" sz="1000" i="1"/>
+                        </m:ctrlPr>
+                      </m:dPr>
+                      <m:e>
+                        <m:r>
+                          <a:rPr lang="en-IN" sz="1000" i="1"/>
+                          <m:t>𝑋</m:t>
+                        </m:r>
+                      </m:e>
+                    </m:d>
+                    <m:r>
+                      <a:rPr lang="en-IN" sz="1000" i="1"/>
+                      <m:t>=</m:t>
+                    </m:r>
+                    <m:func>
+                      <m:funcPr>
+                        <m:ctrlPr>
+                          <a:rPr lang="en-IN" sz="1000"/>
+                        </m:ctrlPr>
+                      </m:funcPr>
+                      <m:fName>
+                        <m:r>
+                          <m:rPr>
+                            <m:sty m:val="p"/>
+                          </m:rPr>
+                          <a:rPr lang="en-IN" sz="1000"/>
+                          <m:t>exp</m:t>
+                        </m:r>
+                      </m:fName>
+                      <m:e>
+                        <m:d>
+                          <m:dPr>
+                            <m:begChr m:val="["/>
+                            <m:endChr m:val="]"/>
+                            <m:ctrlPr>
+                              <a:rPr lang="en-IN" sz="1000" i="1"/>
+                            </m:ctrlPr>
+                          </m:dPr>
+                          <m:e>
+                            <m:r>
+                              <a:rPr lang="en-IN" sz="1000" i="1"/>
+                              <m:t>2</m:t>
+                            </m:r>
+                            <m:d>
+                              <m:dPr>
+                                <m:ctrlPr>
+                                  <a:rPr lang="en-IN" sz="1000" i="1"/>
+                                </m:ctrlPr>
+                              </m:dPr>
+                              <m:e>
+                                <m:r>
+                                  <a:rPr lang="en-IN" sz="1000" i="1"/>
+                                  <m:t>𝜇</m:t>
+                                </m:r>
+                                <m:r>
+                                  <a:rPr lang="en-IN" sz="1000" i="1"/>
+                                  <m:t>+</m:t>
+                                </m:r>
+                                <m:sSup>
+                                  <m:sSupPr>
+                                    <m:ctrlPr>
+                                      <a:rPr lang="en-IN" sz="1000" i="1"/>
+                                    </m:ctrlPr>
+                                  </m:sSupPr>
+                                  <m:e>
+                                    <m:r>
+                                      <a:rPr lang="en-IN" sz="1000" i="1"/>
+                                      <m:t>𝜎</m:t>
+                                    </m:r>
+                                  </m:e>
+                                  <m:sup>
+                                    <m:r>
+                                      <a:rPr lang="en-IN" sz="1000" i="1"/>
+                                      <m:t>2</m:t>
+                                    </m:r>
+                                  </m:sup>
+                                </m:sSup>
+                              </m:e>
+                            </m:d>
+                          </m:e>
+                        </m:d>
+                      </m:e>
+                    </m:func>
+                    <m:r>
+                      <a:rPr lang="en-IN" sz="1000" i="1"/>
+                      <m:t>−</m:t>
+                    </m:r>
+                    <m:func>
+                      <m:funcPr>
+                        <m:ctrlPr>
+                          <a:rPr lang="en-IN" sz="1000"/>
+                        </m:ctrlPr>
+                      </m:funcPr>
+                      <m:fName>
+                        <m:r>
+                          <m:rPr>
+                            <m:sty m:val="p"/>
+                          </m:rPr>
+                          <a:rPr lang="en-IN" sz="1000"/>
+                          <m:t>exp</m:t>
+                        </m:r>
+                      </m:fName>
+                      <m:e>
+                        <m:d>
+                          <m:dPr>
+                            <m:ctrlPr>
+                              <a:rPr lang="en-IN" sz="1000" i="1"/>
+                            </m:ctrlPr>
+                          </m:dPr>
+                          <m:e>
+                            <m:r>
+                              <a:rPr lang="en-IN" sz="1000" i="1"/>
+                              <m:t>2</m:t>
+                            </m:r>
+                            <m:r>
+                              <a:rPr lang="en-IN" sz="1000" i="1"/>
+                              <m:t>𝜇</m:t>
+                            </m:r>
+                            <m:r>
+                              <a:rPr lang="en-IN" sz="1000" i="1"/>
+                              <m:t>+</m:t>
+                            </m:r>
+                            <m:sSup>
+                              <m:sSupPr>
+                                <m:ctrlPr>
+                                  <a:rPr lang="en-IN" sz="1000" i="1"/>
+                                </m:ctrlPr>
+                              </m:sSupPr>
+                              <m:e>
+                                <m:r>
+                                  <a:rPr lang="en-IN" sz="1000" i="1"/>
+                                  <m:t>𝜎</m:t>
+                                </m:r>
+                              </m:e>
+                              <m:sup>
+                                <m:r>
+                                  <a:rPr lang="en-IN" sz="1000" i="1"/>
+                                  <m:t>2</m:t>
+                                </m:r>
+                              </m:sup>
+                            </m:sSup>
+                          </m:e>
+                        </m:d>
+                      </m:e>
+                    </m:func>
+                  </m:oMath>
+                </a14:m>
+                <a:endParaRPr lang="en-IN" sz="1000" dirty="0"/>
+              </a:p>
+              <a:p>
+                <a:r>
+                  <a:rPr lang="en-IN" sz="1000" b="1" dirty="0"/>
+                  <a:t>exp</a:t>
+                </a:r>
+                <a:r>
+                  <a:rPr lang="en-IN" sz="1000" dirty="0"/>
+                  <a:t>: </a:t>
+                </a:r>
+                <a14:m>
+                  <m:oMath xmlns:m="http://schemas.openxmlformats.org/officeDocument/2006/math">
+                    <m:sSub>
+                      <m:sSubPr>
+                        <m:ctrlPr>
+                          <a:rPr lang="en-IN" sz="1000" i="1"/>
+                        </m:ctrlPr>
+                      </m:sSubPr>
+                      <m:e>
+                        <m:r>
+                          <a:rPr lang="en-IN" sz="1000" i="1"/>
+                          <m:t>𝑓</m:t>
+                        </m:r>
+                      </m:e>
+                      <m:sub>
+                        <m:r>
+                          <a:rPr lang="en-IN" sz="1000" i="1"/>
+                          <m:t>𝑋</m:t>
+                        </m:r>
                       </m:sub>
-                      <m:sup/>
-                      <m:e>
+                    </m:sSub>
+                    <m:d>
+                      <m:dPr>
+                        <m:ctrlPr>
+                          <a:rPr lang="en-IN" sz="1000" i="1"/>
+                        </m:ctrlPr>
+                      </m:dPr>
+                      <m:e>
+                        <m:r>
+                          <a:rPr lang="en-IN" sz="1000" i="1"/>
+                          <m:t>𝑥</m:t>
+                        </m:r>
+                        <m:r>
+                          <a:rPr lang="en-IN" sz="1000" i="1"/>
+                          <m:t>∣</m:t>
+                        </m:r>
+                        <m:r>
+                          <a:rPr lang="en-IN" sz="1000" i="1"/>
+                          <m:t>𝜆</m:t>
+                        </m:r>
+                      </m:e>
+                    </m:d>
+                    <m:r>
+                      <a:rPr lang="en-IN" sz="1000" i="1"/>
+                      <m:t>=</m:t>
+                    </m:r>
+                    <m:r>
+                      <a:rPr lang="en-IN" sz="1000" i="1"/>
+                      <m:t>𝜆</m:t>
+                    </m:r>
+                    <m:func>
+                      <m:funcPr>
+                        <m:ctrlPr>
+                          <a:rPr lang="en-IN" sz="1000"/>
+                        </m:ctrlPr>
+                      </m:funcPr>
+                      <m:fName>
+                        <m:r>
+                          <m:rPr>
+                            <m:sty m:val="p"/>
+                          </m:rPr>
+                          <a:rPr lang="en-IN" sz="1000"/>
+                          <m:t>exp</m:t>
+                        </m:r>
+                      </m:fName>
+                      <m:e>
+                        <m:d>
+                          <m:dPr>
+                            <m:ctrlPr>
+                              <a:rPr lang="en-IN" sz="1000" i="1"/>
+                            </m:ctrlPr>
+                          </m:dPr>
+                          <m:e>
+                            <m:r>
+                              <a:rPr lang="en-IN" sz="1000" i="1"/>
+                              <m:t>−</m:t>
+                            </m:r>
+                            <m:r>
+                              <a:rPr lang="en-IN" sz="1000" i="1"/>
+                              <m:t>𝜆</m:t>
+                            </m:r>
+                            <m:r>
+                              <a:rPr lang="en-IN" sz="1000" i="1"/>
+                              <m:t>𝑥</m:t>
+                            </m:r>
+                          </m:e>
+                        </m:d>
+                      </m:e>
+                    </m:func>
+                  </m:oMath>
+                </a14:m>
+                <a:r>
+                  <a:rPr lang="en-IN" sz="1000" dirty="0">
+                    <a:effectLst/>
+                  </a:rPr>
+                  <a:t> , </a:t>
+                </a:r>
+                <a14:m>
+                  <m:oMath xmlns:m="http://schemas.openxmlformats.org/officeDocument/2006/math">
+                    <m:r>
+                      <a:rPr lang="en-IN" sz="1000"/>
+                      <m:t>𝔼</m:t>
+                    </m:r>
+                    <m:d>
+                      <m:dPr>
+                        <m:ctrlPr>
+                          <a:rPr lang="en-IN" sz="1000" i="1"/>
+                        </m:ctrlPr>
+                      </m:dPr>
+                      <m:e>
+                        <m:r>
+                          <a:rPr lang="en-IN" sz="1000" i="1"/>
+                          <m:t>𝑋</m:t>
+                        </m:r>
+                      </m:e>
+                    </m:d>
+                    <m:r>
+                      <a:rPr lang="en-IN" sz="1000" i="1"/>
+                      <m:t>=1/</m:t>
+                    </m:r>
+                    <m:r>
+                      <a:rPr lang="en-IN" sz="1000" i="1"/>
+                      <m:t>𝜆</m:t>
+                    </m:r>
+                  </m:oMath>
+                </a14:m>
+                <a:r>
+                  <a:rPr lang="en-IN" sz="1000" dirty="0"/>
+                  <a:t>, </a:t>
+                </a:r>
+                <a14:m>
+                  <m:oMath xmlns:m="http://schemas.openxmlformats.org/officeDocument/2006/math">
+                    <m:r>
+                      <m:rPr>
+                        <m:nor/>
+                      </m:rPr>
+                      <a:rPr lang="en-IN" sz="1000"/>
+                      <m:t>Var</m:t>
+                    </m:r>
+                    <m:d>
+                      <m:dPr>
+                        <m:ctrlPr>
+                          <a:rPr lang="en-IN" sz="1000" i="1"/>
+                        </m:ctrlPr>
+                      </m:dPr>
+                      <m:e>
+                        <m:r>
+                          <a:rPr lang="en-IN" sz="1000" i="1"/>
+                          <m:t>𝑋</m:t>
+                        </m:r>
+                      </m:e>
+                    </m:d>
+                    <m:r>
+                      <a:rPr lang="en-IN" sz="1000" i="1"/>
+                      <m:t>=1/</m:t>
+                    </m:r>
+                    <m:sSup>
+                      <m:sSupPr>
+                        <m:ctrlPr>
+                          <a:rPr lang="en-IN" sz="1000" i="1"/>
+                        </m:ctrlPr>
+                      </m:sSupPr>
+                      <m:e>
+                        <m:r>
+                          <a:rPr lang="en-IN" sz="1000" i="1"/>
+                          <m:t>𝜆</m:t>
+                        </m:r>
+                      </m:e>
+                      <m:sup>
+                        <m:r>
+                          <a:rPr lang="en-IN" sz="1000" i="1"/>
+                          <m:t>2</m:t>
+                        </m:r>
+                      </m:sup>
+                    </m:sSup>
+                  </m:oMath>
+                </a14:m>
+                <a:endParaRPr lang="en-IN" sz="1000" dirty="0"/>
+              </a:p>
+              <a:p>
+                <a:r>
+                  <a:rPr lang="en-IN" sz="1000" b="1" dirty="0"/>
+                  <a:t>beta</a:t>
+                </a:r>
+                <a:r>
+                  <a:rPr lang="en-IN" sz="1000" dirty="0"/>
+                  <a:t>: </a:t>
+                </a:r>
+                <a14:m>
+                  <m:oMath xmlns:m="http://schemas.openxmlformats.org/officeDocument/2006/math">
+                    <m:r>
+                      <a:rPr lang="en-IN" sz="1000"/>
+                      <m:t>𝔼</m:t>
+                    </m:r>
+                    <m:d>
+                      <m:dPr>
+                        <m:ctrlPr>
+                          <a:rPr lang="en-IN" sz="1000" i="1"/>
+                        </m:ctrlPr>
+                      </m:dPr>
+                      <m:e>
+                        <m:r>
+                          <a:rPr lang="en-IN" sz="1000" i="1"/>
+                          <m:t>𝑋</m:t>
+                        </m:r>
+                      </m:e>
+                    </m:d>
+                    <m:r>
+                      <a:rPr lang="en-IN" sz="1000" i="1"/>
+                      <m:t>=</m:t>
+                    </m:r>
+                    <m:f>
+                      <m:fPr>
+                        <m:ctrlPr>
+                          <a:rPr lang="en-IN" sz="1000" i="1"/>
+                        </m:ctrlPr>
+                      </m:fPr>
+                      <m:num>
+                        <m:r>
+                          <a:rPr lang="en-IN" sz="1000" i="1"/>
+                          <m:t>𝛼</m:t>
+                        </m:r>
+                      </m:num>
+                      <m:den>
+                        <m:r>
+                          <a:rPr lang="en-IN" sz="1000" i="1"/>
+                          <m:t>𝛼</m:t>
+                        </m:r>
+                        <m:r>
+                          <a:rPr lang="en-IN" sz="1000" i="1"/>
+                          <m:t>+</m:t>
+                        </m:r>
+                        <m:r>
+                          <a:rPr lang="en-IN" sz="1000" i="1"/>
+                          <m:t>𝛽</m:t>
+                        </m:r>
+                      </m:den>
+                    </m:f>
+                  </m:oMath>
+                </a14:m>
+                <a:r>
+                  <a:rPr lang="en-IN" sz="1000" dirty="0"/>
+                  <a:t>, </a:t>
+                </a:r>
+                <a14:m>
+                  <m:oMath xmlns:m="http://schemas.openxmlformats.org/officeDocument/2006/math">
+                    <m:r>
+                      <m:rPr>
+                        <m:nor/>
+                      </m:rPr>
+                      <a:rPr lang="en-IN" sz="1000"/>
+                      <m:t>Var</m:t>
+                    </m:r>
+                    <m:d>
+                      <m:dPr>
+                        <m:ctrlPr>
+                          <a:rPr lang="en-IN" sz="1000" i="1"/>
+                        </m:ctrlPr>
+                      </m:dPr>
+                      <m:e>
+                        <m:r>
+                          <a:rPr lang="en-IN" sz="1000" i="1"/>
+                          <m:t>𝑋</m:t>
+                        </m:r>
+                      </m:e>
+                    </m:d>
+                    <m:r>
+                      <a:rPr lang="en-IN" sz="1000" i="1"/>
+                      <m:t>=</m:t>
+                    </m:r>
+                    <m:f>
+                      <m:fPr>
+                        <m:ctrlPr>
+                          <a:rPr lang="en-IN" sz="1000" i="1"/>
+                        </m:ctrlPr>
+                      </m:fPr>
+                      <m:num>
+                        <m:r>
+                          <a:rPr lang="en-IN" sz="1000" i="1"/>
+                          <m:t>𝛼𝛽</m:t>
+                        </m:r>
+                      </m:num>
+                      <m:den>
                         <m:sSup>
                           <m:sSupPr>
                             <m:ctrlPr>
@@ -5559,79 +7855,623 @@
                                 </m:ctrlPr>
                               </m:dPr>
                               <m:e>
-                                <m:f>
-                                  <m:fPr>
+                                <m:r>
+                                  <a:rPr lang="en-IN" sz="1000" i="1"/>
+                                  <m:t>𝛼</m:t>
+                                </m:r>
+                                <m:r>
+                                  <a:rPr lang="en-IN" sz="1000" i="1"/>
+                                  <m:t>+</m:t>
+                                </m:r>
+                                <m:r>
+                                  <a:rPr lang="en-IN" sz="1000" i="1"/>
+                                  <m:t>𝛽</m:t>
+                                </m:r>
+                              </m:e>
+                            </m:d>
+                          </m:e>
+                          <m:sup>
+                            <m:r>
+                              <a:rPr lang="en-IN" sz="1000" i="1"/>
+                              <m:t>2</m:t>
+                            </m:r>
+                          </m:sup>
+                        </m:sSup>
+                        <m:d>
+                          <m:dPr>
+                            <m:ctrlPr>
+                              <a:rPr lang="en-IN" sz="1000" i="1"/>
+                            </m:ctrlPr>
+                          </m:dPr>
+                          <m:e>
+                            <m:r>
+                              <a:rPr lang="en-IN" sz="1000" i="1"/>
+                              <m:t>𝛼</m:t>
+                            </m:r>
+                            <m:r>
+                              <a:rPr lang="en-IN" sz="1000" i="1"/>
+                              <m:t>+</m:t>
+                            </m:r>
+                            <m:r>
+                              <a:rPr lang="en-IN" sz="1000" i="1"/>
+                              <m:t>𝛽</m:t>
+                            </m:r>
+                            <m:r>
+                              <a:rPr lang="en-IN" sz="1000" i="1"/>
+                              <m:t>+1</m:t>
+                            </m:r>
+                          </m:e>
+                        </m:d>
+                      </m:den>
+                    </m:f>
+                  </m:oMath>
+                </a14:m>
+                <a:endParaRPr lang="en-IN" sz="1000" dirty="0"/>
+              </a:p>
+              <a:p>
+                <a:r>
+                  <a:rPr lang="en-IN" sz="1000" b="1" dirty="0" err="1"/>
+                  <a:t>weibull</a:t>
+                </a:r>
+                <a:r>
+                  <a:rPr lang="en-IN" sz="1000" dirty="0"/>
+                  <a:t>: </a:t>
+                </a:r>
+                <a14:m>
+                  <m:oMath xmlns:m="http://schemas.openxmlformats.org/officeDocument/2006/math">
+                    <m:sSub>
+                      <m:sSubPr>
+                        <m:ctrlPr>
+                          <a:rPr lang="en-IN" sz="1000" i="1"/>
+                        </m:ctrlPr>
+                      </m:sSubPr>
+                      <m:e>
+                        <m:r>
+                          <a:rPr lang="en-IN" sz="1000" i="1"/>
+                          <m:t>𝑓</m:t>
+                        </m:r>
+                      </m:e>
+                      <m:sub>
+                        <m:r>
+                          <a:rPr lang="en-IN" sz="1000" i="1"/>
+                          <m:t>𝑋</m:t>
+                        </m:r>
+                      </m:sub>
+                    </m:sSub>
+                    <m:d>
+                      <m:dPr>
+                        <m:ctrlPr>
+                          <a:rPr lang="en-IN" sz="1000" i="1"/>
+                        </m:ctrlPr>
+                      </m:dPr>
+                      <m:e>
+                        <m:r>
+                          <a:rPr lang="en-IN" sz="1000" i="1"/>
+                          <m:t>𝑥</m:t>
+                        </m:r>
+                        <m:r>
+                          <a:rPr lang="en-IN" sz="1000" i="1"/>
+                          <m:t>∣</m:t>
+                        </m:r>
+                        <m:r>
+                          <a:rPr lang="en-IN" sz="1000" i="1"/>
+                          <m:t>𝜆</m:t>
+                        </m:r>
+                        <m:r>
+                          <a:rPr lang="en-IN" sz="1000" i="1"/>
+                          <m:t>,</m:t>
+                        </m:r>
+                        <m:r>
+                          <a:rPr lang="en-IN" sz="1000" i="1"/>
+                          <m:t>𝑘</m:t>
+                        </m:r>
+                      </m:e>
+                    </m:d>
+                    <m:r>
+                      <a:rPr lang="en-IN" sz="1000" i="1"/>
+                      <m:t>=</m:t>
+                    </m:r>
+                    <m:f>
+                      <m:fPr>
+                        <m:ctrlPr>
+                          <a:rPr lang="en-IN" sz="1000" i="1"/>
+                        </m:ctrlPr>
+                      </m:fPr>
+                      <m:num>
+                        <m:r>
+                          <a:rPr lang="en-IN" sz="1000" i="1"/>
+                          <m:t>𝑘</m:t>
+                        </m:r>
+                      </m:num>
+                      <m:den>
+                        <m:r>
+                          <a:rPr lang="en-IN" sz="1000" i="1"/>
+                          <m:t>𝜆</m:t>
+                        </m:r>
+                      </m:den>
+                    </m:f>
+                    <m:sSup>
+                      <m:sSupPr>
+                        <m:ctrlPr>
+                          <a:rPr lang="en-IN" sz="1000" i="1"/>
+                        </m:ctrlPr>
+                      </m:sSupPr>
+                      <m:e>
+                        <m:d>
+                          <m:dPr>
+                            <m:ctrlPr>
+                              <a:rPr lang="en-IN" sz="1000" i="1"/>
+                            </m:ctrlPr>
+                          </m:dPr>
+                          <m:e>
+                            <m:f>
+                              <m:fPr>
+                                <m:ctrlPr>
+                                  <a:rPr lang="en-IN" sz="1000" i="1"/>
+                                </m:ctrlPr>
+                              </m:fPr>
+                              <m:num>
+                                <m:r>
+                                  <a:rPr lang="en-IN" sz="1000" i="1"/>
+                                  <m:t>𝑥</m:t>
+                                </m:r>
+                              </m:num>
+                              <m:den>
+                                <m:r>
+                                  <a:rPr lang="en-IN" sz="1000" i="1"/>
+                                  <m:t>𝜆</m:t>
+                                </m:r>
+                              </m:den>
+                            </m:f>
+                          </m:e>
+                        </m:d>
+                      </m:e>
+                      <m:sup>
+                        <m:r>
+                          <a:rPr lang="en-IN" sz="1000" i="1"/>
+                          <m:t>𝑘</m:t>
+                        </m:r>
+                        <m:r>
+                          <a:rPr lang="en-IN" sz="1000" i="1"/>
+                          <m:t>−1</m:t>
+                        </m:r>
+                      </m:sup>
+                    </m:sSup>
+                    <m:func>
+                      <m:funcPr>
+                        <m:ctrlPr>
+                          <a:rPr lang="en-IN" sz="1000" i="1"/>
+                        </m:ctrlPr>
+                      </m:funcPr>
+                      <m:fName>
+                        <m:sSup>
+                          <m:sSupPr>
+                            <m:ctrlPr>
+                              <a:rPr lang="en-IN" sz="1000"/>
+                            </m:ctrlPr>
+                          </m:sSupPr>
+                          <m:e>
+                            <m:r>
+                              <m:rPr>
+                                <m:sty m:val="p"/>
+                              </m:rPr>
+                              <a:rPr lang="en-IN" sz="1000"/>
+                              <m:t>exp</m:t>
+                            </m:r>
+                          </m:e>
+                          <m:sup>
+                            <m:r>
+                              <a:rPr lang="en-IN" sz="1000" i="1"/>
+                              <m:t>−</m:t>
+                            </m:r>
+                            <m:sSup>
+                              <m:sSupPr>
+                                <m:ctrlPr>
+                                  <a:rPr lang="en-IN" sz="1000" i="1"/>
+                                </m:ctrlPr>
+                              </m:sSupPr>
+                              <m:e>
+                                <m:d>
+                                  <m:dPr>
                                     <m:ctrlPr>
                                       <a:rPr lang="en-IN" sz="1000" i="1"/>
                                     </m:ctrlPr>
-                                  </m:fPr>
-                                  <m:num>
+                                  </m:dPr>
+                                  <m:e>
                                     <m:r>
                                       <a:rPr lang="en-IN" sz="1000" i="1"/>
                                       <m:t>𝑥</m:t>
                                     </m:r>
                                     <m:r>
                                       <a:rPr lang="en-IN" sz="1000" i="1"/>
-                                      <m:t>−</m:t>
+                                      <m:t>/</m:t>
                                     </m:r>
-                                    <m:sSub>
-                                      <m:sSubPr>
-                                        <m:ctrlPr>
-                                          <a:rPr lang="en-IN" sz="1000" i="1"/>
-                                        </m:ctrlPr>
-                                      </m:sSubPr>
-                                      <m:e>
-                                        <m:r>
-                                          <a:rPr lang="en-IN" sz="1000" i="1"/>
-                                          <m:t>𝜇</m:t>
-                                        </m:r>
-                                      </m:e>
-                                      <m:sub>
-                                        <m:r>
-                                          <a:rPr lang="en-IN" sz="1000" i="1"/>
-                                          <m:t>𝑋</m:t>
-                                        </m:r>
-                                      </m:sub>
-                                    </m:sSub>
-                                  </m:num>
-                                  <m:den>
-                                    <m:sSub>
-                                      <m:sSubPr>
-                                        <m:ctrlPr>
-                                          <a:rPr lang="en-IN" sz="1000" i="1"/>
-                                        </m:ctrlPr>
-                                      </m:sSubPr>
-                                      <m:e>
-                                        <m:r>
-                                          <a:rPr lang="en-IN" sz="1000" i="1"/>
-                                          <m:t>𝜎</m:t>
-                                        </m:r>
-                                      </m:e>
-                                      <m:sub>
-                                        <m:r>
-                                          <a:rPr lang="en-IN" sz="1000" i="1"/>
-                                          <m:t>𝑋</m:t>
-                                        </m:r>
-                                      </m:sub>
-                                    </m:sSub>
-                                  </m:den>
-                                </m:f>
+                                    <m:r>
+                                      <a:rPr lang="en-IN" sz="1000" i="1"/>
+                                      <m:t>𝜆</m:t>
+                                    </m:r>
+                                  </m:e>
+                                </m:d>
                               </m:e>
-                            </m:d>
+                              <m:sup>
+                                <m:r>
+                                  <a:rPr lang="en-IN" sz="1000" i="1"/>
+                                  <m:t>𝑘</m:t>
+                                </m:r>
+                              </m:sup>
+                            </m:sSup>
+                          </m:sup>
+                        </m:sSup>
+                      </m:fName>
+                      <m:e/>
+                    </m:func>
+                  </m:oMath>
+                </a14:m>
+                <a:endParaRPr lang="en-CA" sz="1000" dirty="0"/>
+              </a:p>
+              <a:p>
+                <a:r>
+                  <a:rPr lang="en-IN" sz="1000" b="1" dirty="0"/>
+                  <a:t>gamma</a:t>
+                </a:r>
+                <a:r>
+                  <a:rPr lang="en-IN" sz="1000" dirty="0"/>
+                  <a:t>: </a:t>
+                </a:r>
+                <a14:m>
+                  <m:oMath xmlns:m="http://schemas.openxmlformats.org/officeDocument/2006/math">
+                    <m:sSub>
+                      <m:sSubPr>
+                        <m:ctrlPr>
+                          <a:rPr lang="en-IN" sz="1000" i="1"/>
+                        </m:ctrlPr>
+                      </m:sSubPr>
+                      <m:e>
+                        <m:r>
+                          <a:rPr lang="en-IN" sz="1000" i="1"/>
+                          <m:t>𝑓</m:t>
+                        </m:r>
+                      </m:e>
+                      <m:sub>
+                        <m:r>
+                          <a:rPr lang="en-IN" sz="1000" i="1"/>
+                          <m:t>𝑋</m:t>
+                        </m:r>
+                      </m:sub>
+                    </m:sSub>
+                    <m:d>
+                      <m:dPr>
+                        <m:ctrlPr>
+                          <a:rPr lang="en-IN" sz="1000" i="1"/>
+                        </m:ctrlPr>
+                      </m:dPr>
+                      <m:e>
+                        <m:r>
+                          <a:rPr lang="en-IN" sz="1000" i="1"/>
+                          <m:t>𝑥</m:t>
+                        </m:r>
+                        <m:r>
+                          <a:rPr lang="en-IN" sz="1000" i="1"/>
+                          <m:t>∣</m:t>
+                        </m:r>
+                        <m:r>
+                          <a:rPr lang="en-IN" sz="1000" i="1"/>
+                          <m:t>𝑘</m:t>
+                        </m:r>
+                        <m:r>
+                          <a:rPr lang="en-IN" sz="1000" i="1"/>
+                          <m:t>,</m:t>
+                        </m:r>
+                        <m:r>
+                          <a:rPr lang="en-IN" sz="1000" i="1"/>
+                          <m:t>𝜃</m:t>
+                        </m:r>
+                      </m:e>
+                    </m:d>
+                    <m:r>
+                      <a:rPr lang="en-IN" sz="1000" i="1"/>
+                      <m:t>=</m:t>
+                    </m:r>
+                    <m:f>
+                      <m:fPr>
+                        <m:ctrlPr>
+                          <a:rPr lang="en-IN" sz="1000" i="1"/>
+                        </m:ctrlPr>
+                      </m:fPr>
+                      <m:num>
+                        <m:r>
+                          <a:rPr lang="en-IN" sz="1000" i="1"/>
+                          <m:t>1</m:t>
+                        </m:r>
+                      </m:num>
+                      <m:den>
+                        <m:r>
+                          <m:rPr>
+                            <m:sty m:val="p"/>
+                          </m:rPr>
+                          <a:rPr lang="en-IN" sz="1000"/>
+                          <m:t>Γ</m:t>
+                        </m:r>
+                        <m:d>
+                          <m:dPr>
+                            <m:ctrlPr>
+                              <a:rPr lang="en-IN" sz="1000" i="1"/>
+                            </m:ctrlPr>
+                          </m:dPr>
+                          <m:e>
+                            <m:r>
+                              <a:rPr lang="en-IN" sz="1000" i="1"/>
+                              <m:t>𝑘</m:t>
+                            </m:r>
+                          </m:e>
+                        </m:d>
+                        <m:sSup>
+                          <m:sSupPr>
+                            <m:ctrlPr>
+                              <a:rPr lang="en-IN" sz="1000" i="1"/>
+                            </m:ctrlPr>
+                          </m:sSupPr>
+                          <m:e>
+                            <m:r>
+                              <a:rPr lang="en-IN" sz="1000" i="1"/>
+                              <m:t>𝜃</m:t>
+                            </m:r>
                           </m:e>
                           <m:sup>
                             <m:r>
                               <a:rPr lang="en-IN" sz="1000" i="1"/>
-                              <m:t>3</m:t>
+                              <m:t>𝑘</m:t>
                             </m:r>
                           </m:sup>
                         </m:sSup>
-                      </m:e>
-                    </m:nary>
+                      </m:den>
+                    </m:f>
+                    <m:sSup>
+                      <m:sSupPr>
+                        <m:ctrlPr>
+                          <a:rPr lang="en-IN" sz="1000" i="1"/>
+                        </m:ctrlPr>
+                      </m:sSupPr>
+                      <m:e>
+                        <m:r>
+                          <a:rPr lang="en-IN" sz="1000" i="1"/>
+                          <m:t>𝑥</m:t>
+                        </m:r>
+                      </m:e>
+                      <m:sup>
+                        <m:r>
+                          <a:rPr lang="en-IN" sz="1000" i="1"/>
+                          <m:t>𝑘</m:t>
+                        </m:r>
+                        <m:r>
+                          <a:rPr lang="en-IN" sz="1000" i="1"/>
+                          <m:t>−1</m:t>
+                        </m:r>
+                      </m:sup>
+                    </m:sSup>
+                    <m:func>
+                      <m:funcPr>
+                        <m:ctrlPr>
+                          <a:rPr lang="en-IN" sz="1000"/>
+                        </m:ctrlPr>
+                      </m:funcPr>
+                      <m:fName>
+                        <m:r>
+                          <m:rPr>
+                            <m:sty m:val="p"/>
+                          </m:rPr>
+                          <a:rPr lang="en-IN" sz="1000"/>
+                          <m:t>exp</m:t>
+                        </m:r>
+                      </m:fName>
+                      <m:e>
+                        <m:d>
+                          <m:dPr>
+                            <m:ctrlPr>
+                              <a:rPr lang="en-IN" sz="1000" i="1"/>
+                            </m:ctrlPr>
+                          </m:dPr>
+                          <m:e>
+                            <m:r>
+                              <a:rPr lang="en-IN" sz="1000" i="1"/>
+                              <m:t>−</m:t>
+                            </m:r>
+                            <m:r>
+                              <a:rPr lang="en-IN" sz="1000" i="1"/>
+                              <m:t>𝑥</m:t>
+                            </m:r>
+                            <m:r>
+                              <a:rPr lang="en-IN" sz="1000" i="1"/>
+                              <m:t>/</m:t>
+                            </m:r>
+                            <m:r>
+                              <a:rPr lang="en-IN" sz="1000" i="1"/>
+                              <m:t>𝜃</m:t>
+                            </m:r>
+                          </m:e>
+                        </m:d>
+                      </m:e>
+                    </m:func>
+                  </m:oMath>
+                </a14:m>
+                <a:r>
+                  <a:rPr lang="en-IN" sz="1000" dirty="0">
+                    <a:effectLst/>
+                  </a:rPr>
+                  <a:t> , </a:t>
+                </a:r>
+                <a14:m>
+                  <m:oMath xmlns:m="http://schemas.openxmlformats.org/officeDocument/2006/math">
+                    <m:r>
+                      <a:rPr lang="en-IN" sz="1000"/>
+                      <m:t>𝔼</m:t>
+                    </m:r>
+                    <m:d>
+                      <m:dPr>
+                        <m:ctrlPr>
+                          <a:rPr lang="en-IN" sz="1000" i="1"/>
+                        </m:ctrlPr>
+                      </m:dPr>
+                      <m:e>
+                        <m:r>
+                          <a:rPr lang="en-IN" sz="1000" i="1"/>
+                          <m:t>𝑋</m:t>
+                        </m:r>
+                      </m:e>
+                    </m:d>
                     <m:r>
                       <a:rPr lang="en-IN" sz="1000" i="1"/>
-                      <m:t>⋅</m:t>
-                    </m:r>
+                      <m:t>=</m:t>
+                    </m:r>
+                    <m:r>
+                      <a:rPr lang="en-IN" sz="1000" i="1"/>
+                      <m:t>𝑘</m:t>
+                    </m:r>
+                    <m:r>
+                      <a:rPr lang="en-IN" sz="1000" i="1"/>
+                      <m:t>𝜃</m:t>
+                    </m:r>
+                  </m:oMath>
+                </a14:m>
+                <a:r>
+                  <a:rPr lang="en-IN" sz="1000" dirty="0"/>
+                  <a:t>, </a:t>
+                </a:r>
+                <a14:m>
+                  <m:oMath xmlns:m="http://schemas.openxmlformats.org/officeDocument/2006/math">
+                    <m:r>
+                      <m:rPr>
+                        <m:nor/>
+                      </m:rPr>
+                      <a:rPr lang="en-IN" sz="1000"/>
+                      <m:t>Var</m:t>
+                    </m:r>
+                    <m:d>
+                      <m:dPr>
+                        <m:ctrlPr>
+                          <a:rPr lang="en-IN" sz="1000" i="1"/>
+                        </m:ctrlPr>
+                      </m:dPr>
+                      <m:e>
+                        <m:r>
+                          <a:rPr lang="en-IN" sz="1000" i="1"/>
+                          <m:t>𝑋</m:t>
+                        </m:r>
+                      </m:e>
+                    </m:d>
+                    <m:r>
+                      <a:rPr lang="en-IN" sz="1000" i="1"/>
+                      <m:t>=</m:t>
+                    </m:r>
+                    <m:r>
+                      <a:rPr lang="en-IN" sz="1000" i="1"/>
+                      <m:t>𝑘</m:t>
+                    </m:r>
+                    <m:sSup>
+                      <m:sSupPr>
+                        <m:ctrlPr>
+                          <a:rPr lang="en-IN" sz="1000" i="1"/>
+                        </m:ctrlPr>
+                      </m:sSupPr>
+                      <m:e>
+                        <m:r>
+                          <a:rPr lang="en-IN" sz="1000" i="1"/>
+                          <m:t>𝜃</m:t>
+                        </m:r>
+                      </m:e>
+                      <m:sup>
+                        <m:r>
+                          <a:rPr lang="en-IN" sz="1000" i="1"/>
+                          <m:t>2</m:t>
+                        </m:r>
+                      </m:sup>
+                    </m:sSup>
+                  </m:oMath>
+                </a14:m>
+                <a:endParaRPr lang="en-IN" sz="1000" dirty="0"/>
+              </a:p>
+              <a:p>
+                <a:pPr marL="171450" indent="-171450">
+                  <a:buFont typeface="Arial" panose="020B0604020202020204" pitchFamily="34" charset="0"/>
+                  <a:buChar char="•"/>
+                </a:pPr>
+                <a:r>
+                  <a:rPr lang="en-IN" sz="1000" b="1" dirty="0"/>
+                  <a:t>Gamma is </a:t>
+                </a:r>
+                <a14:m>
+                  <m:oMath xmlns:m="http://schemas.openxmlformats.org/officeDocument/2006/math">
+                    <m:r>
+                      <a:rPr lang="en-IN" sz="1000" b="1" i="1"/>
+                      <m:t>𝒌</m:t>
+                    </m:r>
+                  </m:oMath>
+                </a14:m>
+                <a:r>
+                  <a:rPr lang="en-IN" sz="1000" b="1" dirty="0"/>
+                  <a:t> wait times until the event has happened</a:t>
+                </a:r>
+                <a:endParaRPr lang="en-IN" sz="1000" dirty="0"/>
+              </a:p>
+              <a:p>
+                <a:pPr marL="171450" indent="-171450">
+                  <a:buFont typeface="Arial" panose="020B0604020202020204" pitchFamily="34" charset="0"/>
+                  <a:buChar char="•"/>
+                </a:pPr>
+                <a:r>
+                  <a:rPr lang="en-IN" sz="1000" dirty="0"/>
+                  <a:t>In Weibull k dictates </a:t>
+                </a:r>
+                <a:r>
+                  <a:rPr lang="en-IN" sz="1000" b="1" dirty="0"/>
+                  <a:t>the probability of an event after a certain time period has passed. It is not memoryless. </a:t>
+                </a:r>
+                <a:r>
+                  <a:rPr lang="en-IN" sz="1000" dirty="0"/>
+                  <a:t>If </a:t>
+                </a:r>
+                <a14:m>
+                  <m:oMath xmlns:m="http://schemas.openxmlformats.org/officeDocument/2006/math">
+                    <m:r>
+                      <a:rPr lang="en-IN" sz="1000" i="1"/>
+                      <m:t>𝑘</m:t>
+                    </m:r>
+                    <m:r>
+                      <a:rPr lang="en-IN" sz="1000" i="1"/>
+                      <m:t> &gt; 1</m:t>
+                    </m:r>
+                  </m:oMath>
+                </a14:m>
+                <a:r>
+                  <a:rPr lang="en-IN" sz="1000" dirty="0"/>
+                  <a:t> then the event is more likely to occur as more time passes. </a:t>
+                </a:r>
+              </a:p>
+              <a:p>
+                <a:pPr>
+                  <a:lnSpc>
+                    <a:spcPct val="100000"/>
+                  </a:lnSpc>
+                </a:pPr>
+                <a:r>
+                  <a:rPr lang="en-IN" sz="1000" dirty="0"/>
+                  <a:t>Conditional Distribution on Continuous Random variable</a:t>
+                </a:r>
+              </a:p>
+              <a:p>
+                <a:pPr marL="171450" indent="-171450">
+                  <a:lnSpc>
+                    <a:spcPct val="100000"/>
+                  </a:lnSpc>
+                  <a:buFont typeface="Arial" panose="020B0604020202020204" pitchFamily="34" charset="0"/>
+                  <a:buChar char="•"/>
+                </a:pPr>
+                <a:r>
+                  <a:rPr lang="en-IN" sz="1000" dirty="0"/>
+                  <a:t>P(A) = 0, </a:t>
+                </a:r>
+                <a14:m>
+                  <m:oMath xmlns:m="http://schemas.openxmlformats.org/officeDocument/2006/math">
                     <m:sSub>
                       <m:sSubPr>
                         <m:ctrlPr>
@@ -5648,6 +8488,18 @@
                         <m:r>
                           <a:rPr lang="en-IN" sz="1000" i="1"/>
                           <m:t>𝑋</m:t>
+                        </m:r>
+                        <m:r>
+                          <a:rPr lang="en-IN" sz="1000" i="1"/>
+                          <m:t>∣</m:t>
+                        </m:r>
+                        <m:r>
+                          <a:rPr lang="en-IN" sz="1000" i="1"/>
+                          <m:t>𝑋</m:t>
+                        </m:r>
+                        <m:r>
+                          <a:rPr lang="en-IN" sz="1000" i="1"/>
+                          <m:t>≥2500</m:t>
                         </m:r>
                       </m:sub>
                     </m:sSub>
@@ -5665,27 +8517,230 @@
                       </m:e>
                     </m:d>
                     <m:r>
-                      <m:rPr>
-                        <m:nor/>
-                      </m:rPr>
-                      <a:rPr lang="en-IN" sz="1000"/>
-                      <m:t>d</m:t>
-                    </m:r>
-                    <m:r>
                       <a:rPr lang="en-IN" sz="1000" i="1"/>
-                      <m:t>𝑥</m:t>
-                    </m:r>
+                      <m:t>=</m:t>
+                    </m:r>
+                    <m:f>
+                      <m:fPr>
+                        <m:ctrlPr>
+                          <a:rPr lang="en-IN" sz="1000" i="1"/>
+                        </m:ctrlPr>
+                      </m:fPr>
+                      <m:num>
+                        <m:sSub>
+                          <m:sSubPr>
+                            <m:ctrlPr>
+                              <a:rPr lang="en-IN" sz="1000" i="1"/>
+                            </m:ctrlPr>
+                          </m:sSubPr>
+                          <m:e>
+                            <m:r>
+                              <a:rPr lang="en-IN" sz="1000" i="1"/>
+                              <m:t>𝑓</m:t>
+                            </m:r>
+                          </m:e>
+                          <m:sub>
+                            <m:r>
+                              <a:rPr lang="en-IN" sz="1000" i="1"/>
+                              <m:t>𝑋</m:t>
+                            </m:r>
+                          </m:sub>
+                        </m:sSub>
+                        <m:d>
+                          <m:dPr>
+                            <m:ctrlPr>
+                              <a:rPr lang="en-IN" sz="1000" i="1"/>
+                            </m:ctrlPr>
+                          </m:dPr>
+                          <m:e>
+                            <m:r>
+                              <a:rPr lang="en-IN" sz="1000" i="1"/>
+                              <m:t>𝑥</m:t>
+                            </m:r>
+                          </m:e>
+                        </m:d>
+                      </m:num>
+                      <m:den>
+                        <m:r>
+                          <a:rPr lang="en-IN" sz="1000" i="1"/>
+                          <m:t>𝑃</m:t>
+                        </m:r>
+                        <m:d>
+                          <m:dPr>
+                            <m:ctrlPr>
+                              <a:rPr lang="en-IN" sz="1000" i="1"/>
+                            </m:ctrlPr>
+                          </m:dPr>
+                          <m:e>
+                            <m:r>
+                              <a:rPr lang="en-IN" sz="1000" i="1"/>
+                              <m:t>𝑋</m:t>
+                            </m:r>
+                            <m:r>
+                              <a:rPr lang="en-IN" sz="1000" i="1"/>
+                              <m:t>≥2500</m:t>
+                            </m:r>
+                          </m:e>
+                        </m:d>
+                      </m:den>
+                    </m:f>
                   </m:oMath>
                 </a14:m>
                 <a:r>
-                  <a:rPr lang="en-IN" sz="1000" dirty="0"/>
-                  <a:t>, LS : mean &lt; median &lt; mode</a:t>
+                  <a:rPr lang="en-IN" sz="1000" dirty="0">
+                    <a:effectLst/>
+                  </a:rPr>
+                  <a:t> </a:t>
                 </a:r>
               </a:p>
               <a:p>
-                <a:endParaRPr lang="en-IN" sz="1000" dirty="0"/>
-              </a:p>
-              <a:p>
+                <a:pPr marL="171450" indent="-171450">
+                  <a:buFont typeface="Arial" panose="020B0604020202020204" pitchFamily="34" charset="0"/>
+                  <a:buChar char="•"/>
+                </a:pPr>
+                <a:r>
+                  <a:rPr lang="en-IN" sz="1000" dirty="0"/>
+                  <a:t>P(B) = 0, </a:t>
+                </a:r>
+                <a14:m>
+                  <m:oMath xmlns:m="http://schemas.openxmlformats.org/officeDocument/2006/math">
+                    <m:sSub>
+                      <m:sSubPr>
+                        <m:ctrlPr>
+                          <a:rPr lang="en-IN" sz="1000" i="1"/>
+                        </m:ctrlPr>
+                      </m:sSubPr>
+                      <m:e>
+                        <m:r>
+                          <a:rPr lang="en-IN" sz="1000" i="1"/>
+                          <m:t>𝑓</m:t>
+                        </m:r>
+                      </m:e>
+                      <m:sub>
+                        <m:r>
+                          <a:rPr lang="en-IN" sz="1000" i="1"/>
+                          <m:t>𝑌</m:t>
+                        </m:r>
+                        <m:r>
+                          <a:rPr lang="en-IN" sz="1000" i="1"/>
+                          <m:t>|</m:t>
+                        </m:r>
+                        <m:r>
+                          <a:rPr lang="en-IN" sz="1000" i="1"/>
+                          <m:t>𝑋</m:t>
+                        </m:r>
+                      </m:sub>
+                    </m:sSub>
+                    <m:d>
+                      <m:dPr>
+                        <m:ctrlPr>
+                          <a:rPr lang="en-IN" sz="1000" i="1"/>
+                        </m:ctrlPr>
+                      </m:dPr>
+                      <m:e>
+                        <m:r>
+                          <a:rPr lang="en-IN" sz="1000" i="1"/>
+                          <m:t>𝑦</m:t>
+                        </m:r>
+                      </m:e>
+                    </m:d>
+                    <m:r>
+                      <a:rPr lang="en-IN" sz="1000" i="1"/>
+                      <m:t>=</m:t>
+                    </m:r>
+                    <m:f>
+                      <m:fPr>
+                        <m:ctrlPr>
+                          <a:rPr lang="en-IN" sz="1000" i="1"/>
+                        </m:ctrlPr>
+                      </m:fPr>
+                      <m:num>
+                        <m:sSub>
+                          <m:sSubPr>
+                            <m:ctrlPr>
+                              <a:rPr lang="en-IN" sz="1000" i="1"/>
+                            </m:ctrlPr>
+                          </m:sSubPr>
+                          <m:e>
+                            <m:r>
+                              <a:rPr lang="en-IN" sz="1000" i="1"/>
+                              <m:t>𝑓</m:t>
+                            </m:r>
+                          </m:e>
+                          <m:sub>
+                            <m:r>
+                              <a:rPr lang="en-IN" sz="1000" i="1"/>
+                              <m:t>𝑌</m:t>
+                            </m:r>
+                            <m:r>
+                              <a:rPr lang="en-IN" sz="1000" i="1"/>
+                              <m:t>,</m:t>
+                            </m:r>
+                            <m:r>
+                              <a:rPr lang="en-IN" sz="1000" i="1"/>
+                              <m:t>𝑋</m:t>
+                            </m:r>
+                          </m:sub>
+                        </m:sSub>
+                        <m:d>
+                          <m:dPr>
+                            <m:ctrlPr>
+                              <a:rPr lang="en-IN" sz="1000" i="1"/>
+                            </m:ctrlPr>
+                          </m:dPr>
+                          <m:e>
+                            <m:r>
+                              <a:rPr lang="en-IN" sz="1000" i="1"/>
+                              <m:t>𝑦</m:t>
+                            </m:r>
+                            <m:r>
+                              <a:rPr lang="en-IN" sz="1000" i="1"/>
+                              <m:t>,</m:t>
+                            </m:r>
+                            <m:r>
+                              <a:rPr lang="en-IN" sz="1000" i="1"/>
+                              <m:t>𝑥</m:t>
+                            </m:r>
+                          </m:e>
+                        </m:d>
+                      </m:num>
+                      <m:den>
+                        <m:sSub>
+                          <m:sSubPr>
+                            <m:ctrlPr>
+                              <a:rPr lang="en-IN" sz="1000" i="1"/>
+                            </m:ctrlPr>
+                          </m:sSubPr>
+                          <m:e>
+                            <m:r>
+                              <a:rPr lang="en-IN" sz="1000" i="1"/>
+                              <m:t>𝑓</m:t>
+                            </m:r>
+                          </m:e>
+                          <m:sub>
+                            <m:r>
+                              <a:rPr lang="en-IN" sz="1000" i="1"/>
+                              <m:t>𝑋</m:t>
+                            </m:r>
+                          </m:sub>
+                        </m:sSub>
+                        <m:d>
+                          <m:dPr>
+                            <m:ctrlPr>
+                              <a:rPr lang="en-IN" sz="1000" i="1"/>
+                            </m:ctrlPr>
+                          </m:dPr>
+                          <m:e>
+                            <m:r>
+                              <a:rPr lang="en-IN" sz="1000" i="1"/>
+                              <m:t>𝑥</m:t>
+                            </m:r>
+                          </m:e>
+                        </m:d>
+                      </m:den>
+                    </m:f>
+                  </m:oMath>
+                </a14:m>
                 <a:endParaRPr lang="en-IN" sz="1000" dirty="0"/>
               </a:p>
             </p:txBody>
@@ -5709,7 +8764,7 @@
             <p:spPr>
               <a:xfrm>
                 <a:off x="0" y="0"/>
-                <a:ext cx="11285034" cy="3926844"/>
+                <a:ext cx="5892800" cy="6745949"/>
               </a:xfrm>
               <a:prstGeom prst="rect">
                 <a:avLst/>
@@ -5717,7 +8772,7 @@
               <a:blipFill>
                 <a:blip r:embed="rId3"/>
                 <a:stretch>
-                  <a:fillRect b="-323"/>
+                  <a:fillRect/>
                 </a:stretch>
               </a:blipFill>
             </p:spPr>
@@ -5736,6 +8791,317 @@
           </p:sp>
         </mc:Fallback>
       </mc:AlternateContent>
+      <p:sp>
+        <p:nvSpPr>
+          <p:cNvPr id="2" name="TextBox 1">
+            <a:extLst>
+              <a:ext uri="{FF2B5EF4-FFF2-40B4-BE49-F238E27FC236}">
+                <a16:creationId xmlns:a16="http://schemas.microsoft.com/office/drawing/2014/main" id="{57534058-C665-00D8-DCDF-BA5EF0BEBE42}"/>
+              </a:ext>
+            </a:extLst>
+          </p:cNvPr>
+          <p:cNvSpPr txBox="1"/>
+          <p:nvPr/>
+        </p:nvSpPr>
+        <p:spPr>
+          <a:xfrm>
+            <a:off x="5892800" y="0"/>
+            <a:ext cx="6299200" cy="4455963"/>
+          </a:xfrm>
+          <a:prstGeom prst="rect">
+            <a:avLst/>
+          </a:prstGeom>
+          <a:noFill/>
+        </p:spPr>
+        <p:txBody>
+          <a:bodyPr wrap="square" rtlCol="0">
+            <a:spAutoFit/>
+          </a:bodyPr>
+          <a:lstStyle/>
+          <a:p>
+            <a:pPr>
+              <a:lnSpc>
+                <a:spcPct val="150000"/>
+              </a:lnSpc>
+            </a:pPr>
+            <a:r>
+              <a:rPr lang="en-IN" sz="1000" b="1" dirty="0"/>
+              <a:t>MLE Steps:</a:t>
+            </a:r>
+          </a:p>
+          <a:p>
+            <a:pPr marL="342900" lvl="0" indent="-342900">
+              <a:buFont typeface="+mj-lt"/>
+              <a:buAutoNum type="arabicPeriod"/>
+            </a:pPr>
+            <a:r>
+              <a:rPr lang="en-IN" sz="1000" dirty="0"/>
+              <a:t>Choose your fighter</a:t>
+            </a:r>
+          </a:p>
+          <a:p>
+            <a:pPr marL="342900" lvl="0" indent="-342900">
+              <a:buFont typeface="+mj-lt"/>
+              <a:buAutoNum type="arabicPeriod"/>
+            </a:pPr>
+            <a:r>
+              <a:rPr lang="en-IN" sz="1000" dirty="0"/>
+              <a:t>Estimate likelihood</a:t>
+            </a:r>
+          </a:p>
+          <a:p>
+            <a:pPr marL="342900" lvl="0" indent="-342900">
+              <a:buFont typeface="+mj-lt"/>
+              <a:buAutoNum type="arabicPeriod"/>
+            </a:pPr>
+            <a:r>
+              <a:rPr lang="en-IN" sz="1000" dirty="0"/>
+              <a:t>Perform log-likelihood transformation</a:t>
+            </a:r>
+          </a:p>
+          <a:p>
+            <a:pPr marL="342900" lvl="0" indent="-342900">
+              <a:buFont typeface="+mj-lt"/>
+              <a:buAutoNum type="arabicPeriod"/>
+            </a:pPr>
+            <a:r>
+              <a:rPr lang="en-IN" sz="1000" dirty="0"/>
+              <a:t>Partially differentiate with respect to the parameter of interest</a:t>
+            </a:r>
+          </a:p>
+          <a:p>
+            <a:pPr marL="342900" lvl="0" indent="-342900">
+              <a:buFont typeface="+mj-lt"/>
+              <a:buAutoNum type="arabicPeriod"/>
+            </a:pPr>
+            <a:r>
+              <a:rPr lang="en-IN" sz="1000" dirty="0"/>
+              <a:t>Make it equal to zero and estimate the parameter of interest</a:t>
+            </a:r>
+          </a:p>
+          <a:p>
+            <a:pPr marL="342900" lvl="0" indent="-342900">
+              <a:buFont typeface="+mj-lt"/>
+              <a:buAutoNum type="arabicPeriod"/>
+            </a:pPr>
+            <a:r>
+              <a:rPr lang="en-IN" sz="1000" dirty="0"/>
+              <a:t>Make sure that it is local maximum by double differentiating the log-likelihood and checking if the value is negative.</a:t>
+            </a:r>
+          </a:p>
+          <a:p>
+            <a:pPr marL="342900" indent="-342900">
+              <a:buFont typeface="+mj-lt"/>
+              <a:buAutoNum type="arabicPeriod"/>
+            </a:pPr>
+            <a:r>
+              <a:rPr lang="en-IN" sz="1000" dirty="0"/>
+              <a:t>For empirical estimates of parameter of interest, we choose a range of values for parameter and see which value corresponds to the maximum log-likelihood value.</a:t>
+            </a:r>
+          </a:p>
+          <a:p>
+            <a:pPr>
+              <a:lnSpc>
+                <a:spcPct val="150000"/>
+              </a:lnSpc>
+            </a:pPr>
+            <a:r>
+              <a:rPr lang="en-IN" sz="1000" b="1" dirty="0"/>
+              <a:t>Create Sequence in R</a:t>
+            </a:r>
+            <a:r>
+              <a:rPr lang="en-IN" sz="1000" dirty="0"/>
+              <a:t>: </a:t>
+            </a:r>
+            <a:r>
+              <a:rPr lang="en-IN" sz="1000" dirty="0" err="1"/>
+              <a:t>possible_betas</a:t>
+            </a:r>
+            <a:r>
+              <a:rPr lang="en-IN" sz="1000" dirty="0"/>
+              <a:t> = </a:t>
+            </a:r>
+            <a:r>
+              <a:rPr lang="en-IN" sz="1000" u="sng" dirty="0">
+                <a:hlinkClick r:id="rId4"/>
+              </a:rPr>
+              <a:t>seq</a:t>
+            </a:r>
+            <a:r>
+              <a:rPr lang="en-IN" sz="1000" dirty="0"/>
+              <a:t>(5, 50, 0.5)</a:t>
+            </a:r>
+          </a:p>
+          <a:p>
+            <a:pPr>
+              <a:lnSpc>
+                <a:spcPct val="150000"/>
+              </a:lnSpc>
+            </a:pPr>
+            <a:r>
+              <a:rPr lang="en-IN" sz="1000" b="1" dirty="0"/>
+              <a:t>To apply log-likelihood</a:t>
+            </a:r>
+            <a:r>
+              <a:rPr lang="en-IN" sz="1000" dirty="0"/>
+              <a:t>: </a:t>
+            </a:r>
+            <a:r>
+              <a:rPr lang="en-IN" sz="1000" dirty="0" err="1"/>
+              <a:t>log_likelihood</a:t>
+            </a:r>
+            <a:r>
+              <a:rPr lang="en-IN" sz="1000" dirty="0"/>
+              <a:t> = </a:t>
+            </a:r>
+            <a:r>
+              <a:rPr lang="en-IN" sz="1000" dirty="0" err="1"/>
+              <a:t>map_dbl</a:t>
+            </a:r>
+            <a:r>
+              <a:rPr lang="en-IN" sz="1000" dirty="0"/>
+              <a:t>(1 / </a:t>
+            </a:r>
+            <a:r>
+              <a:rPr lang="en-IN" sz="1000" dirty="0" err="1"/>
+              <a:t>possible_betas</a:t>
+            </a:r>
+            <a:r>
+              <a:rPr lang="en-IN" sz="1000" dirty="0"/>
+              <a:t>, ~ </a:t>
+            </a:r>
+            <a:r>
+              <a:rPr lang="en-IN" sz="1000" u="sng" dirty="0">
+                <a:hlinkClick r:id="rId5"/>
+              </a:rPr>
+              <a:t>log(prod(dexp(sample_n30$values, .)))) </a:t>
+            </a:r>
+            <a:endParaRPr lang="en-IN" sz="1000" dirty="0"/>
+          </a:p>
+          <a:p>
+            <a:pPr>
+              <a:lnSpc>
+                <a:spcPct val="150000"/>
+              </a:lnSpc>
+            </a:pPr>
+            <a:r>
+              <a:rPr lang="en-IN" sz="1000" b="1" dirty="0"/>
+              <a:t>Discrete Sampling</a:t>
+            </a:r>
+            <a:endParaRPr lang="en-IN" sz="1000" dirty="0"/>
+          </a:p>
+          <a:p>
+            <a:pPr>
+              <a:lnSpc>
+                <a:spcPct val="150000"/>
+              </a:lnSpc>
+            </a:pPr>
+            <a:r>
+              <a:rPr lang="en-IN" sz="1000" dirty="0"/>
+              <a:t>To sample from Discrete distribution, we use sample() function in R.</a:t>
+            </a:r>
+          </a:p>
+          <a:p>
+            <a:r>
+              <a:rPr lang="en-IN" sz="1000" dirty="0" err="1"/>
+              <a:t>set.seed</a:t>
+            </a:r>
+            <a:r>
+              <a:rPr lang="en-IN" sz="1000" dirty="0"/>
+              <a:t>(551)</a:t>
+            </a:r>
+          </a:p>
+          <a:p>
+            <a:r>
+              <a:rPr lang="en-IN" sz="1000" dirty="0"/>
+              <a:t>outcomes &lt;- c("banana", "bob-</a:t>
+            </a:r>
+            <a:r>
+              <a:rPr lang="en-IN" sz="1000" dirty="0" err="1"/>
+              <a:t>omb</a:t>
+            </a:r>
+            <a:r>
+              <a:rPr lang="en-IN" sz="1000" dirty="0"/>
+              <a:t>", "coin", "horn", "shell")</a:t>
+            </a:r>
+          </a:p>
+          <a:p>
+            <a:r>
+              <a:rPr lang="en-IN" sz="1000" dirty="0"/>
+              <a:t>probs &lt;- c(0.12, 0.05, 0.75, 0.03, 0.05)</a:t>
+            </a:r>
+          </a:p>
+          <a:p>
+            <a:r>
+              <a:rPr lang="en-IN" sz="1000" dirty="0"/>
+              <a:t>n &lt;- 10</a:t>
+            </a:r>
+          </a:p>
+          <a:p>
+            <a:r>
+              <a:rPr lang="en-IN" sz="1000" dirty="0" err="1"/>
+              <a:t>R_mario_sample</a:t>
+            </a:r>
+            <a:r>
+              <a:rPr lang="en-IN" sz="1000" dirty="0"/>
+              <a:t> &lt;- sample(outcomes, size = n, replace = TRUE, prob = probs)</a:t>
+            </a:r>
+          </a:p>
+          <a:p>
+            <a:r>
+              <a:rPr lang="en-IN" sz="1000" dirty="0" err="1"/>
+              <a:t>R_mario_sample</a:t>
+            </a:r>
+            <a:endParaRPr lang="en-IN" sz="1000" dirty="0"/>
+          </a:p>
+          <a:p>
+            <a:pPr>
+              <a:lnSpc>
+                <a:spcPct val="150000"/>
+              </a:lnSpc>
+            </a:pPr>
+            <a:r>
+              <a:rPr lang="en-IN" sz="1000" b="1" dirty="0"/>
+              <a:t>Empirical Codes:</a:t>
+            </a:r>
+          </a:p>
+          <a:p>
+            <a:pPr>
+              <a:lnSpc>
+                <a:spcPct val="150000"/>
+              </a:lnSpc>
+            </a:pPr>
+            <a:r>
+              <a:rPr lang="en-IN" sz="1000" dirty="0"/>
+              <a:t>mean(), var(), </a:t>
+            </a:r>
+            <a:r>
+              <a:rPr lang="en-IN" sz="1000" dirty="0" err="1"/>
+              <a:t>sd</a:t>
+            </a:r>
+            <a:r>
+              <a:rPr lang="en-IN" sz="1000" dirty="0"/>
+              <a:t>(), quantile()</a:t>
+            </a:r>
+          </a:p>
+          <a:p>
+            <a:pPr>
+              <a:lnSpc>
+                <a:spcPct val="150000"/>
+              </a:lnSpc>
+            </a:pPr>
+            <a:endParaRPr lang="en-IN" sz="1000" dirty="0"/>
+          </a:p>
+          <a:p>
+            <a:pPr>
+              <a:lnSpc>
+                <a:spcPct val="150000"/>
+              </a:lnSpc>
+            </a:pPr>
+            <a:endParaRPr lang="en-IN" sz="1000" dirty="0"/>
+          </a:p>
+        </p:txBody>
+      </p:sp>
     </p:spTree>
     <p:extLst>
       <p:ext uri="{BB962C8B-B14F-4D97-AF65-F5344CB8AC3E}">
